--- a/msa-ppt/2. 마이크로 서비스 구축.pptx
+++ b/msa-ppt/2. 마이크로 서비스 구축.pptx
@@ -22,6 +22,18 @@
     <p:sldId id="274" r:id="rId16"/>
     <p:sldId id="276" r:id="rId17"/>
     <p:sldId id="271" r:id="rId18"/>
+    <p:sldId id="277" r:id="rId19"/>
+    <p:sldId id="282" r:id="rId20"/>
+    <p:sldId id="278" r:id="rId21"/>
+    <p:sldId id="279" r:id="rId22"/>
+    <p:sldId id="280" r:id="rId23"/>
+    <p:sldId id="283" r:id="rId24"/>
+    <p:sldId id="284" r:id="rId25"/>
+    <p:sldId id="281" r:id="rId26"/>
+    <p:sldId id="285" r:id="rId27"/>
+    <p:sldId id="286" r:id="rId28"/>
+    <p:sldId id="287" r:id="rId29"/>
+    <p:sldId id="288" r:id="rId30"/>
   </p:sldIdLst>
   <p:sldSz cx="12192000" cy="6858000"/>
   <p:notesSz cx="6858000" cy="9144000"/>
@@ -158,9 +170,28 @@
             <p14:sldId id="274"/>
             <p14:sldId id="276"/>
             <p14:sldId id="271"/>
+            <p14:sldId id="277"/>
+            <p14:sldId id="282"/>
+          </p14:sldIdLst>
+        </p14:section>
+        <p14:section name="BoardService 애플리케이션 생성" id="{27A33E18-2094-46A5-A0AA-3D2F3AB0045F}">
+          <p14:sldIdLst>
+            <p14:sldId id="278"/>
+            <p14:sldId id="279"/>
+            <p14:sldId id="280"/>
+            <p14:sldId id="283"/>
+            <p14:sldId id="284"/>
+            <p14:sldId id="281"/>
+            <p14:sldId id="285"/>
+            <p14:sldId id="286"/>
+            <p14:sldId id="287"/>
+            <p14:sldId id="288"/>
           </p14:sldIdLst>
         </p14:section>
       </p14:sectionLst>
+    </p:ext>
+    <p:ext uri="{EFAFB233-063F-42B5-8137-9DF3F51BA10A}">
+      <p15:sldGuideLst xmlns:p15="http://schemas.microsoft.com/office/powerpoint/2012/main"/>
     </p:ext>
   </p:extLst>
 </p:presentation>
@@ -4149,7 +4180,7 @@
           <a:p>
             <a:r>
               <a:rPr lang="en-US" altLang="ko-KR"/>
-              <a:t>Application.yml </a:t>
+              <a:t>application.yml </a:t>
             </a:r>
             <a:r>
               <a:rPr lang="ko-KR" altLang="en-US"/>
@@ -6210,10 +6241,10 @@
       </p:sp>
       <p:pic>
         <p:nvPicPr>
-          <p:cNvPr id="7" name="그림 6">
+          <p:cNvPr id="8" name="그림 7">
             <a:extLst>
               <a:ext uri="{FF2B5EF4-FFF2-40B4-BE49-F238E27FC236}">
-                <a16:creationId xmlns:a16="http://schemas.microsoft.com/office/drawing/2014/main" id="{C1EB4A90-91C7-54DD-E6A4-41E9261267B2}"/>
+                <a16:creationId xmlns:a16="http://schemas.microsoft.com/office/drawing/2014/main" id="{4926E620-93EC-869F-6188-8482560CC3BD}"/>
               </a:ext>
             </a:extLst>
           </p:cNvPr>
@@ -6230,8 +6261,8 @@
         </p:blipFill>
         <p:spPr>
           <a:xfrm>
-            <a:off x="3434745" y="1828647"/>
-            <a:ext cx="5029902" cy="3391373"/>
+            <a:off x="3543003" y="1828647"/>
+            <a:ext cx="4934639" cy="3400900"/>
           </a:xfrm>
           <a:prstGeom prst="rect">
             <a:avLst/>
@@ -6599,36 +6630,6 @@
       </p:sp>
       <p:pic>
         <p:nvPicPr>
-          <p:cNvPr id="6" name="그림 5">
-            <a:extLst>
-              <a:ext uri="{FF2B5EF4-FFF2-40B4-BE49-F238E27FC236}">
-                <a16:creationId xmlns:a16="http://schemas.microsoft.com/office/drawing/2014/main" id="{844C6B64-9323-A254-3042-08BF578F8B3F}"/>
-              </a:ext>
-            </a:extLst>
-          </p:cNvPr>
-          <p:cNvPicPr>
-            <a:picLocks noChangeAspect="1"/>
-          </p:cNvPicPr>
-          <p:nvPr/>
-        </p:nvPicPr>
-        <p:blipFill>
-          <a:blip r:embed="rId2"/>
-          <a:stretch>
-            <a:fillRect/>
-          </a:stretch>
-        </p:blipFill>
-        <p:spPr>
-          <a:xfrm>
-            <a:off x="393192" y="1912034"/>
-            <a:ext cx="11652504" cy="2860031"/>
-          </a:xfrm>
-          <a:prstGeom prst="rect">
-            <a:avLst/>
-          </a:prstGeom>
-        </p:spPr>
-      </p:pic>
-      <p:pic>
-        <p:nvPicPr>
           <p:cNvPr id="8" name="그림 7">
             <a:extLst>
               <a:ext uri="{FF2B5EF4-FFF2-40B4-BE49-F238E27FC236}">
@@ -6642,7 +6643,7 @@
           <p:nvPr/>
         </p:nvPicPr>
         <p:blipFill>
-          <a:blip r:embed="rId3"/>
+          <a:blip r:embed="rId2"/>
           <a:stretch>
             <a:fillRect/>
           </a:stretch>
@@ -6672,7 +6673,7 @@
           <p:nvPr/>
         </p:nvPicPr>
         <p:blipFill>
-          <a:blip r:embed="rId4"/>
+          <a:blip r:embed="rId3"/>
           <a:stretch>
             <a:fillRect/>
           </a:stretch>
@@ -6840,10 +6841,601 @@
           </a:fontRef>
         </p:style>
       </p:cxnSp>
+      <p:pic>
+        <p:nvPicPr>
+          <p:cNvPr id="4" name="그림 3">
+            <a:extLst>
+              <a:ext uri="{FF2B5EF4-FFF2-40B4-BE49-F238E27FC236}">
+                <a16:creationId xmlns:a16="http://schemas.microsoft.com/office/drawing/2014/main" id="{985EF522-F902-63C1-2CCC-E787538FE323}"/>
+              </a:ext>
+            </a:extLst>
+          </p:cNvPr>
+          <p:cNvPicPr>
+            <a:picLocks noChangeAspect="1"/>
+          </p:cNvPicPr>
+          <p:nvPr/>
+        </p:nvPicPr>
+        <p:blipFill>
+          <a:blip r:embed="rId4"/>
+          <a:stretch>
+            <a:fillRect/>
+          </a:stretch>
+        </p:blipFill>
+        <p:spPr>
+          <a:xfrm>
+            <a:off x="276863" y="1881890"/>
+            <a:ext cx="11699234" cy="2655045"/>
+          </a:xfrm>
+          <a:prstGeom prst="rect">
+            <a:avLst/>
+          </a:prstGeom>
+        </p:spPr>
+      </p:pic>
     </p:spTree>
     <p:extLst>
       <p:ext uri="{BB962C8B-B14F-4D97-AF65-F5344CB8AC3E}">
         <p14:creationId xmlns:p14="http://schemas.microsoft.com/office/powerpoint/2010/main" val="2070920851"/>
+      </p:ext>
+    </p:extLst>
+  </p:cSld>
+  <p:clrMapOvr>
+    <a:masterClrMapping/>
+  </p:clrMapOvr>
+</p:sld>
+</file>
+
+<file path=ppt/slides/slide18.xml><?xml version="1.0" encoding="utf-8"?>
+<p:sld xmlns:a="http://schemas.openxmlformats.org/drawingml/2006/main" xmlns:r="http://schemas.openxmlformats.org/officeDocument/2006/relationships" xmlns:p="http://schemas.openxmlformats.org/presentationml/2006/main">
+  <p:cSld>
+    <p:spTree>
+      <p:nvGrpSpPr>
+        <p:cNvPr id="1" name=""/>
+        <p:cNvGrpSpPr/>
+        <p:nvPr/>
+      </p:nvGrpSpPr>
+      <p:grpSpPr>
+        <a:xfrm>
+          <a:off x="0" y="0"/>
+          <a:ext cx="0" cy="0"/>
+          <a:chOff x="0" y="0"/>
+          <a:chExt cx="0" cy="0"/>
+        </a:xfrm>
+      </p:grpSpPr>
+      <p:sp>
+        <p:nvSpPr>
+          <p:cNvPr id="2" name="제목 1">
+            <a:extLst>
+              <a:ext uri="{FF2B5EF4-FFF2-40B4-BE49-F238E27FC236}">
+                <a16:creationId xmlns:a16="http://schemas.microsoft.com/office/drawing/2014/main" id="{8E35EB1E-CF22-BAC3-74CF-942A54818DF0}"/>
+              </a:ext>
+            </a:extLst>
+          </p:cNvPr>
+          <p:cNvSpPr>
+            <a:spLocks noGrp="1"/>
+          </p:cNvSpPr>
+          <p:nvPr>
+            <p:ph type="title"/>
+          </p:nvPr>
+        </p:nvSpPr>
+        <p:spPr/>
+        <p:txBody>
+          <a:bodyPr/>
+          <a:lstStyle/>
+          <a:p>
+            <a:r>
+              <a:rPr lang="en-US" altLang="ko-KR"/>
+              <a:t>User DB </a:t>
+            </a:r>
+            <a:r>
+              <a:rPr lang="ko-KR" altLang="en-US"/>
+              <a:t>확인</a:t>
+            </a:r>
+          </a:p>
+        </p:txBody>
+      </p:sp>
+      <p:pic>
+        <p:nvPicPr>
+          <p:cNvPr id="4" name="그림 3">
+            <a:extLst>
+              <a:ext uri="{FF2B5EF4-FFF2-40B4-BE49-F238E27FC236}">
+                <a16:creationId xmlns:a16="http://schemas.microsoft.com/office/drawing/2014/main" id="{877B97EF-02E2-FB8C-76F2-8A3B337D69B5}"/>
+              </a:ext>
+            </a:extLst>
+          </p:cNvPr>
+          <p:cNvPicPr>
+            <a:picLocks noChangeAspect="1"/>
+          </p:cNvPicPr>
+          <p:nvPr/>
+        </p:nvPicPr>
+        <p:blipFill>
+          <a:blip r:embed="rId2"/>
+          <a:stretch>
+            <a:fillRect/>
+          </a:stretch>
+        </p:blipFill>
+        <p:spPr>
+          <a:xfrm>
+            <a:off x="1097280" y="1855308"/>
+            <a:ext cx="5315692" cy="2324424"/>
+          </a:xfrm>
+          <a:prstGeom prst="rect">
+            <a:avLst/>
+          </a:prstGeom>
+          <a:ln>
+            <a:solidFill>
+              <a:schemeClr val="tx1"/>
+            </a:solidFill>
+          </a:ln>
+        </p:spPr>
+      </p:pic>
+      <p:sp>
+        <p:nvSpPr>
+          <p:cNvPr id="7" name="직사각형 6">
+            <a:extLst>
+              <a:ext uri="{FF2B5EF4-FFF2-40B4-BE49-F238E27FC236}">
+                <a16:creationId xmlns:a16="http://schemas.microsoft.com/office/drawing/2014/main" id="{E8092EC6-F19F-526F-C241-CEFE55223F38}"/>
+              </a:ext>
+            </a:extLst>
+          </p:cNvPr>
+          <p:cNvSpPr/>
+          <p:nvPr/>
+        </p:nvSpPr>
+        <p:spPr>
+          <a:xfrm>
+            <a:off x="7909560" y="4270248"/>
+            <a:ext cx="914400" cy="914400"/>
+          </a:xfrm>
+          <a:prstGeom prst="rect">
+            <a:avLst/>
+          </a:prstGeom>
+        </p:spPr>
+        <p:style>
+          <a:lnRef idx="2">
+            <a:schemeClr val="accent1">
+              <a:shade val="15000"/>
+            </a:schemeClr>
+          </a:lnRef>
+          <a:fillRef idx="1">
+            <a:schemeClr val="accent1"/>
+          </a:fillRef>
+          <a:effectRef idx="0">
+            <a:schemeClr val="accent1"/>
+          </a:effectRef>
+          <a:fontRef idx="minor">
+            <a:schemeClr val="lt1"/>
+          </a:fontRef>
+        </p:style>
+        <p:txBody>
+          <a:bodyPr rtlCol="0" anchor="ctr"/>
+          <a:lstStyle/>
+          <a:p>
+            <a:pPr algn="ctr"/>
+            <a:endParaRPr lang="ko-KR" altLang="en-US"/>
+          </a:p>
+        </p:txBody>
+      </p:sp>
+      <p:pic>
+        <p:nvPicPr>
+          <p:cNvPr id="9" name="그림 8">
+            <a:extLst>
+              <a:ext uri="{FF2B5EF4-FFF2-40B4-BE49-F238E27FC236}">
+                <a16:creationId xmlns:a16="http://schemas.microsoft.com/office/drawing/2014/main" id="{F8519893-289A-9D5D-83F4-687255EE038A}"/>
+              </a:ext>
+            </a:extLst>
+          </p:cNvPr>
+          <p:cNvPicPr>
+            <a:picLocks noChangeAspect="1"/>
+          </p:cNvPicPr>
+          <p:nvPr/>
+        </p:nvPicPr>
+        <p:blipFill>
+          <a:blip r:embed="rId3"/>
+          <a:stretch>
+            <a:fillRect/>
+          </a:stretch>
+        </p:blipFill>
+        <p:spPr>
+          <a:xfrm>
+            <a:off x="1097280" y="4297680"/>
+            <a:ext cx="3134162" cy="1114581"/>
+          </a:xfrm>
+          <a:prstGeom prst="rect">
+            <a:avLst/>
+          </a:prstGeom>
+          <a:ln>
+            <a:solidFill>
+              <a:schemeClr val="tx1"/>
+            </a:solidFill>
+          </a:ln>
+        </p:spPr>
+      </p:pic>
+    </p:spTree>
+    <p:extLst>
+      <p:ext uri="{BB962C8B-B14F-4D97-AF65-F5344CB8AC3E}">
+        <p14:creationId xmlns:p14="http://schemas.microsoft.com/office/powerpoint/2010/main" val="564809054"/>
+      </p:ext>
+    </p:extLst>
+  </p:cSld>
+  <p:clrMapOvr>
+    <a:masterClrMapping/>
+  </p:clrMapOvr>
+</p:sld>
+</file>
+
+<file path=ppt/slides/slide19.xml><?xml version="1.0" encoding="utf-8"?>
+<p:sld xmlns:a="http://schemas.openxmlformats.org/drawingml/2006/main" xmlns:r="http://schemas.openxmlformats.org/officeDocument/2006/relationships" xmlns:p="http://schemas.openxmlformats.org/presentationml/2006/main">
+  <p:cSld>
+    <p:spTree>
+      <p:nvGrpSpPr>
+        <p:cNvPr id="1" name=""/>
+        <p:cNvGrpSpPr/>
+        <p:nvPr/>
+      </p:nvGrpSpPr>
+      <p:grpSpPr>
+        <a:xfrm>
+          <a:off x="0" y="0"/>
+          <a:ext cx="0" cy="0"/>
+          <a:chOff x="0" y="0"/>
+          <a:chExt cx="0" cy="0"/>
+        </a:xfrm>
+      </p:grpSpPr>
+      <p:sp>
+        <p:nvSpPr>
+          <p:cNvPr id="2" name="제목 1">
+            <a:extLst>
+              <a:ext uri="{FF2B5EF4-FFF2-40B4-BE49-F238E27FC236}">
+                <a16:creationId xmlns:a16="http://schemas.microsoft.com/office/drawing/2014/main" id="{BD6B3241-6641-96FE-8C43-7A090362C743}"/>
+              </a:ext>
+            </a:extLst>
+          </p:cNvPr>
+          <p:cNvSpPr>
+            <a:spLocks noGrp="1"/>
+          </p:cNvSpPr>
+          <p:nvPr>
+            <p:ph type="title"/>
+          </p:nvPr>
+        </p:nvSpPr>
+        <p:spPr/>
+        <p:txBody>
+          <a:bodyPr/>
+          <a:lstStyle/>
+          <a:p>
+            <a:r>
+              <a:rPr lang="en-US" altLang="ko-KR"/>
+              <a:t>UserRepository </a:t>
+            </a:r>
+            <a:r>
+              <a:rPr lang="ko-KR" altLang="en-US"/>
+              <a:t>경로 변경</a:t>
+            </a:r>
+          </a:p>
+        </p:txBody>
+      </p:sp>
+      <p:pic>
+        <p:nvPicPr>
+          <p:cNvPr id="4" name="그림 3">
+            <a:extLst>
+              <a:ext uri="{FF2B5EF4-FFF2-40B4-BE49-F238E27FC236}">
+                <a16:creationId xmlns:a16="http://schemas.microsoft.com/office/drawing/2014/main" id="{619262E9-CB8C-FB44-79B7-4FEE97E28BC3}"/>
+              </a:ext>
+            </a:extLst>
+          </p:cNvPr>
+          <p:cNvPicPr>
+            <a:picLocks noChangeAspect="1"/>
+          </p:cNvPicPr>
+          <p:nvPr/>
+        </p:nvPicPr>
+        <p:blipFill>
+          <a:blip r:embed="rId2"/>
+          <a:stretch>
+            <a:fillRect/>
+          </a:stretch>
+        </p:blipFill>
+        <p:spPr>
+          <a:xfrm>
+            <a:off x="3853617" y="1801367"/>
+            <a:ext cx="2071695" cy="4991535"/>
+          </a:xfrm>
+          <a:prstGeom prst="rect">
+            <a:avLst/>
+          </a:prstGeom>
+        </p:spPr>
+      </p:pic>
+      <p:grpSp>
+        <p:nvGrpSpPr>
+          <p:cNvPr id="5" name="그룹 4">
+            <a:extLst>
+              <a:ext uri="{FF2B5EF4-FFF2-40B4-BE49-F238E27FC236}">
+                <a16:creationId xmlns:a16="http://schemas.microsoft.com/office/drawing/2014/main" id="{6F952876-A9AD-87AE-BD83-77837BDF2288}"/>
+              </a:ext>
+            </a:extLst>
+          </p:cNvPr>
+          <p:cNvGrpSpPr/>
+          <p:nvPr/>
+        </p:nvGrpSpPr>
+        <p:grpSpPr>
+          <a:xfrm>
+            <a:off x="708957" y="1801368"/>
+            <a:ext cx="2966931" cy="4992777"/>
+            <a:chOff x="352341" y="1828647"/>
+            <a:chExt cx="2966931" cy="4992777"/>
+          </a:xfrm>
+        </p:grpSpPr>
+        <p:pic>
+          <p:nvPicPr>
+            <p:cNvPr id="6" name="그림 5">
+              <a:extLst>
+                <a:ext uri="{FF2B5EF4-FFF2-40B4-BE49-F238E27FC236}">
+                  <a16:creationId xmlns:a16="http://schemas.microsoft.com/office/drawing/2014/main" id="{3B5A8999-3A5D-D50F-2F07-56EF11F19C74}"/>
+                </a:ext>
+              </a:extLst>
+            </p:cNvPr>
+            <p:cNvPicPr>
+              <a:picLocks noChangeAspect="1"/>
+            </p:cNvPicPr>
+            <p:nvPr/>
+          </p:nvPicPr>
+          <p:blipFill>
+            <a:blip r:embed="rId3"/>
+            <a:stretch>
+              <a:fillRect/>
+            </a:stretch>
+          </p:blipFill>
+          <p:spPr>
+            <a:xfrm>
+              <a:off x="352341" y="1828647"/>
+              <a:ext cx="2966931" cy="4992777"/>
+            </a:xfrm>
+            <a:prstGeom prst="rect">
+              <a:avLst/>
+            </a:prstGeom>
+          </p:spPr>
+        </p:pic>
+        <p:sp>
+          <p:nvSpPr>
+            <p:cNvPr id="7" name="직사각형 6">
+              <a:extLst>
+                <a:ext uri="{FF2B5EF4-FFF2-40B4-BE49-F238E27FC236}">
+                  <a16:creationId xmlns:a16="http://schemas.microsoft.com/office/drawing/2014/main" id="{5D8EB686-B4EE-9FAD-0A05-F3C5E1E3A79A}"/>
+                </a:ext>
+              </a:extLst>
+            </p:cNvPr>
+            <p:cNvSpPr/>
+            <p:nvPr/>
+          </p:nvSpPr>
+          <p:spPr>
+            <a:xfrm>
+              <a:off x="576072" y="4550214"/>
+              <a:ext cx="1042416" cy="338328"/>
+            </a:xfrm>
+            <a:prstGeom prst="rect">
+              <a:avLst/>
+            </a:prstGeom>
+            <a:noFill/>
+            <a:ln>
+              <a:solidFill>
+                <a:srgbClr val="FF0000"/>
+              </a:solidFill>
+            </a:ln>
+          </p:spPr>
+          <p:style>
+            <a:lnRef idx="2">
+              <a:schemeClr val="accent1">
+                <a:shade val="15000"/>
+              </a:schemeClr>
+            </a:lnRef>
+            <a:fillRef idx="1">
+              <a:schemeClr val="accent1"/>
+            </a:fillRef>
+            <a:effectRef idx="0">
+              <a:schemeClr val="accent1"/>
+            </a:effectRef>
+            <a:fontRef idx="minor">
+              <a:schemeClr val="lt1"/>
+            </a:fontRef>
+          </p:style>
+          <p:txBody>
+            <a:bodyPr rtlCol="0" anchor="ctr"/>
+            <a:lstStyle/>
+            <a:p>
+              <a:pPr algn="ctr"/>
+              <a:endParaRPr lang="ko-KR" altLang="en-US"/>
+            </a:p>
+          </p:txBody>
+        </p:sp>
+      </p:grpSp>
+      <p:sp>
+        <p:nvSpPr>
+          <p:cNvPr id="8" name="직사각형 7">
+            <a:extLst>
+              <a:ext uri="{FF2B5EF4-FFF2-40B4-BE49-F238E27FC236}">
+                <a16:creationId xmlns:a16="http://schemas.microsoft.com/office/drawing/2014/main" id="{2122AA2E-54FF-B273-3528-0EA4505EA5E3}"/>
+              </a:ext>
+            </a:extLst>
+          </p:cNvPr>
+          <p:cNvSpPr/>
+          <p:nvPr/>
+        </p:nvSpPr>
+        <p:spPr>
+          <a:xfrm>
+            <a:off x="4075176" y="3559766"/>
+            <a:ext cx="1228344" cy="472737"/>
+          </a:xfrm>
+          <a:prstGeom prst="rect">
+            <a:avLst/>
+          </a:prstGeom>
+          <a:noFill/>
+          <a:ln>
+            <a:solidFill>
+              <a:srgbClr val="FF0000"/>
+            </a:solidFill>
+          </a:ln>
+        </p:spPr>
+        <p:style>
+          <a:lnRef idx="2">
+            <a:schemeClr val="accent1">
+              <a:shade val="15000"/>
+            </a:schemeClr>
+          </a:lnRef>
+          <a:fillRef idx="1">
+            <a:schemeClr val="accent1"/>
+          </a:fillRef>
+          <a:effectRef idx="0">
+            <a:schemeClr val="accent1"/>
+          </a:effectRef>
+          <a:fontRef idx="minor">
+            <a:schemeClr val="lt1"/>
+          </a:fontRef>
+        </p:style>
+        <p:txBody>
+          <a:bodyPr rtlCol="0" anchor="ctr"/>
+          <a:lstStyle/>
+          <a:p>
+            <a:pPr algn="ctr"/>
+            <a:endParaRPr lang="ko-KR" altLang="en-US"/>
+          </a:p>
+        </p:txBody>
+      </p:sp>
+      <p:sp>
+        <p:nvSpPr>
+          <p:cNvPr id="9" name="TextBox 8">
+            <a:extLst>
+              <a:ext uri="{FF2B5EF4-FFF2-40B4-BE49-F238E27FC236}">
+                <a16:creationId xmlns:a16="http://schemas.microsoft.com/office/drawing/2014/main" id="{AC918932-1876-F6DB-1972-50C2C1459233}"/>
+              </a:ext>
+            </a:extLst>
+          </p:cNvPr>
+          <p:cNvSpPr txBox="1"/>
+          <p:nvPr/>
+        </p:nvSpPr>
+        <p:spPr>
+          <a:xfrm>
+            <a:off x="6096000" y="1801368"/>
+            <a:ext cx="5553456" cy="738664"/>
+          </a:xfrm>
+          <a:prstGeom prst="rect">
+            <a:avLst/>
+          </a:prstGeom>
+          <a:noFill/>
+        </p:spPr>
+        <p:txBody>
+          <a:bodyPr wrap="square" rtlCol="0">
+            <a:spAutoFit/>
+          </a:bodyPr>
+          <a:lstStyle/>
+          <a:p>
+            <a:r>
+              <a:rPr lang="en-US" altLang="ko-KR" sz="1400"/>
+              <a:t>Repository</a:t>
+            </a:r>
+            <a:r>
+              <a:rPr lang="ko-KR" altLang="en-US" sz="1400"/>
+              <a:t>를 </a:t>
+            </a:r>
+            <a:r>
+              <a:rPr lang="en-US" altLang="ko-KR" sz="1400"/>
+              <a:t>repository </a:t>
+            </a:r>
+            <a:r>
+              <a:rPr lang="ko-KR" altLang="en-US" sz="1400"/>
+              <a:t>폴더 하위에 관리하는것도 방법이지만</a:t>
+            </a:r>
+            <a:r>
+              <a:rPr lang="en-US" altLang="ko-KR" sz="1400"/>
+              <a:t>. repositor</a:t>
+            </a:r>
+            <a:r>
+              <a:rPr lang="ko-KR" altLang="en-US" sz="1400"/>
+              <a:t>는 </a:t>
+            </a:r>
+            <a:r>
+              <a:rPr lang="en-US" altLang="ko-KR" sz="1400"/>
+              <a:t>DB </a:t>
+            </a:r>
+            <a:r>
+              <a:rPr lang="ko-KR" altLang="en-US" sz="1400"/>
+              <a:t>및 테이블에 가까운 계층임으로 </a:t>
+            </a:r>
+            <a:r>
+              <a:rPr lang="en-US" altLang="ko-KR" sz="1400"/>
+              <a:t>domain</a:t>
+            </a:r>
+            <a:r>
+              <a:rPr lang="ko-KR" altLang="en-US" sz="1400"/>
+              <a:t>에 넣기도 한다</a:t>
+            </a:r>
+            <a:r>
+              <a:rPr lang="en-US" altLang="ko-KR" sz="1400"/>
+              <a:t>.</a:t>
+            </a:r>
+            <a:br>
+              <a:rPr lang="en-US" altLang="ko-KR" sz="1400"/>
+            </a:br>
+            <a:r>
+              <a:rPr lang="en-US" altLang="ko-KR" sz="1400"/>
+              <a:t>(</a:t>
+            </a:r>
+            <a:r>
+              <a:rPr lang="ko-KR" altLang="en-US" sz="1400"/>
+              <a:t>도메인 계층</a:t>
+            </a:r>
+            <a:r>
+              <a:rPr lang="en-US" altLang="ko-KR" sz="1400"/>
+              <a:t>)</a:t>
+            </a:r>
+            <a:endParaRPr lang="ko-KR" altLang="en-US" sz="1400"/>
+          </a:p>
+        </p:txBody>
+      </p:sp>
+      <p:cxnSp>
+        <p:nvCxnSpPr>
+          <p:cNvPr id="11" name="직선 화살표 연결선 10">
+            <a:extLst>
+              <a:ext uri="{FF2B5EF4-FFF2-40B4-BE49-F238E27FC236}">
+                <a16:creationId xmlns:a16="http://schemas.microsoft.com/office/drawing/2014/main" id="{1550D33A-EEA2-40EF-5C72-5DD1C7415BFE}"/>
+              </a:ext>
+            </a:extLst>
+          </p:cNvPr>
+          <p:cNvCxnSpPr>
+            <a:stCxn id="7" idx="3"/>
+            <a:endCxn id="8" idx="1"/>
+          </p:cNvCxnSpPr>
+          <p:nvPr/>
+        </p:nvCxnSpPr>
+        <p:spPr>
+          <a:xfrm flipV="1">
+            <a:off x="1975104" y="3796135"/>
+            <a:ext cx="2100072" cy="895964"/>
+          </a:xfrm>
+          <a:prstGeom prst="straightConnector1">
+            <a:avLst/>
+          </a:prstGeom>
+          <a:ln>
+            <a:solidFill>
+              <a:srgbClr val="FF0000"/>
+            </a:solidFill>
+            <a:tailEnd type="triangle"/>
+          </a:ln>
+        </p:spPr>
+        <p:style>
+          <a:lnRef idx="1">
+            <a:schemeClr val="accent1"/>
+          </a:lnRef>
+          <a:fillRef idx="0">
+            <a:schemeClr val="accent1"/>
+          </a:fillRef>
+          <a:effectRef idx="0">
+            <a:schemeClr val="accent1"/>
+          </a:effectRef>
+          <a:fontRef idx="minor">
+            <a:schemeClr val="tx1"/>
+          </a:fontRef>
+        </p:style>
+      </p:cxnSp>
+    </p:spTree>
+    <p:extLst>
+      <p:ext uri="{BB962C8B-B14F-4D97-AF65-F5344CB8AC3E}">
+        <p14:creationId xmlns:p14="http://schemas.microsoft.com/office/powerpoint/2010/main" val="1211951033"/>
       </p:ext>
     </p:extLst>
   </p:cSld>
@@ -6937,6 +7529,5562 @@
     <p:extLst>
       <p:ext uri="{BB962C8B-B14F-4D97-AF65-F5344CB8AC3E}">
         <p14:creationId xmlns:p14="http://schemas.microsoft.com/office/powerpoint/2010/main" val="3955550561"/>
+      </p:ext>
+    </p:extLst>
+  </p:cSld>
+  <p:clrMapOvr>
+    <a:masterClrMapping/>
+  </p:clrMapOvr>
+</p:sld>
+</file>
+
+<file path=ppt/slides/slide20.xml><?xml version="1.0" encoding="utf-8"?>
+<p:sld xmlns:a="http://schemas.openxmlformats.org/drawingml/2006/main" xmlns:r="http://schemas.openxmlformats.org/officeDocument/2006/relationships" xmlns:p="http://schemas.openxmlformats.org/presentationml/2006/main">
+  <p:cSld>
+    <p:spTree>
+      <p:nvGrpSpPr>
+        <p:cNvPr id="1" name=""/>
+        <p:cNvGrpSpPr/>
+        <p:nvPr/>
+      </p:nvGrpSpPr>
+      <p:grpSpPr>
+        <a:xfrm>
+          <a:off x="0" y="0"/>
+          <a:ext cx="0" cy="0"/>
+          <a:chOff x="0" y="0"/>
+          <a:chExt cx="0" cy="0"/>
+        </a:xfrm>
+      </p:grpSpPr>
+      <p:sp>
+        <p:nvSpPr>
+          <p:cNvPr id="2" name="제목 1">
+            <a:extLst>
+              <a:ext uri="{FF2B5EF4-FFF2-40B4-BE49-F238E27FC236}">
+                <a16:creationId xmlns:a16="http://schemas.microsoft.com/office/drawing/2014/main" id="{BE6E5FC7-AA83-06B1-E243-50AD17849283}"/>
+              </a:ext>
+            </a:extLst>
+          </p:cNvPr>
+          <p:cNvSpPr>
+            <a:spLocks noGrp="1"/>
+          </p:cNvSpPr>
+          <p:nvPr>
+            <p:ph type="title"/>
+          </p:nvPr>
+        </p:nvSpPr>
+        <p:spPr/>
+        <p:txBody>
+          <a:bodyPr/>
+          <a:lstStyle/>
+          <a:p>
+            <a:r>
+              <a:rPr lang="en-US" altLang="ko-KR"/>
+              <a:t>BoardService </a:t>
+            </a:r>
+            <a:r>
+              <a:rPr lang="ko-KR" altLang="en-US"/>
+              <a:t>애플리케이션 생성</a:t>
+            </a:r>
+          </a:p>
+        </p:txBody>
+      </p:sp>
+      <p:pic>
+        <p:nvPicPr>
+          <p:cNvPr id="4" name="그림 3">
+            <a:extLst>
+              <a:ext uri="{FF2B5EF4-FFF2-40B4-BE49-F238E27FC236}">
+                <a16:creationId xmlns:a16="http://schemas.microsoft.com/office/drawing/2014/main" id="{B91CF585-27CD-0BAB-C6DE-625C45893824}"/>
+              </a:ext>
+            </a:extLst>
+          </p:cNvPr>
+          <p:cNvPicPr>
+            <a:picLocks noChangeAspect="1"/>
+          </p:cNvPicPr>
+          <p:nvPr/>
+        </p:nvPicPr>
+        <p:blipFill>
+          <a:blip r:embed="rId2"/>
+          <a:stretch>
+            <a:fillRect/>
+          </a:stretch>
+        </p:blipFill>
+        <p:spPr>
+          <a:xfrm>
+            <a:off x="1097280" y="1860516"/>
+            <a:ext cx="10058400" cy="4388751"/>
+          </a:xfrm>
+          <a:prstGeom prst="rect">
+            <a:avLst/>
+          </a:prstGeom>
+          <a:ln>
+            <a:solidFill>
+              <a:schemeClr val="tx1"/>
+            </a:solidFill>
+          </a:ln>
+        </p:spPr>
+      </p:pic>
+      <p:sp>
+        <p:nvSpPr>
+          <p:cNvPr id="5" name="TextBox 4">
+            <a:extLst>
+              <a:ext uri="{FF2B5EF4-FFF2-40B4-BE49-F238E27FC236}">
+                <a16:creationId xmlns:a16="http://schemas.microsoft.com/office/drawing/2014/main" id="{F5CB63AD-C086-A4E0-F1F1-E28767A2E6A9}"/>
+              </a:ext>
+            </a:extLst>
+          </p:cNvPr>
+          <p:cNvSpPr txBox="1"/>
+          <p:nvPr/>
+        </p:nvSpPr>
+        <p:spPr>
+          <a:xfrm>
+            <a:off x="5257800" y="1965960"/>
+            <a:ext cx="2542032" cy="374904"/>
+          </a:xfrm>
+          <a:prstGeom prst="rect">
+            <a:avLst/>
+          </a:prstGeom>
+          <a:noFill/>
+        </p:spPr>
+        <p:txBody>
+          <a:bodyPr wrap="square" rtlCol="0">
+            <a:spAutoFit/>
+          </a:bodyPr>
+          <a:lstStyle/>
+          <a:p>
+            <a:r>
+              <a:rPr lang="en-US" altLang="ko-KR"/>
+              <a:t>https://start.spring.io/</a:t>
+            </a:r>
+            <a:endParaRPr lang="ko-KR" altLang="en-US"/>
+          </a:p>
+        </p:txBody>
+      </p:sp>
+    </p:spTree>
+    <p:extLst>
+      <p:ext uri="{BB962C8B-B14F-4D97-AF65-F5344CB8AC3E}">
+        <p14:creationId xmlns:p14="http://schemas.microsoft.com/office/powerpoint/2010/main" val="3047379179"/>
+      </p:ext>
+    </p:extLst>
+  </p:cSld>
+  <p:clrMapOvr>
+    <a:masterClrMapping/>
+  </p:clrMapOvr>
+</p:sld>
+</file>
+
+<file path=ppt/slides/slide21.xml><?xml version="1.0" encoding="utf-8"?>
+<p:sld xmlns:a="http://schemas.openxmlformats.org/drawingml/2006/main" xmlns:r="http://schemas.openxmlformats.org/officeDocument/2006/relationships" xmlns:p="http://schemas.openxmlformats.org/presentationml/2006/main">
+  <p:cSld>
+    <p:spTree>
+      <p:nvGrpSpPr>
+        <p:cNvPr id="1" name=""/>
+        <p:cNvGrpSpPr/>
+        <p:nvPr/>
+      </p:nvGrpSpPr>
+      <p:grpSpPr>
+        <a:xfrm>
+          <a:off x="0" y="0"/>
+          <a:ext cx="0" cy="0"/>
+          <a:chOff x="0" y="0"/>
+          <a:chExt cx="0" cy="0"/>
+        </a:xfrm>
+      </p:grpSpPr>
+      <p:sp>
+        <p:nvSpPr>
+          <p:cNvPr id="2" name="제목 1">
+            <a:extLst>
+              <a:ext uri="{FF2B5EF4-FFF2-40B4-BE49-F238E27FC236}">
+                <a16:creationId xmlns:a16="http://schemas.microsoft.com/office/drawing/2014/main" id="{494C3FDF-7CB0-D0BE-C199-622ABD1ECBDA}"/>
+              </a:ext>
+            </a:extLst>
+          </p:cNvPr>
+          <p:cNvSpPr>
+            <a:spLocks noGrp="1"/>
+          </p:cNvSpPr>
+          <p:nvPr>
+            <p:ph type="title"/>
+          </p:nvPr>
+        </p:nvSpPr>
+        <p:spPr/>
+        <p:txBody>
+          <a:bodyPr/>
+          <a:lstStyle/>
+          <a:p>
+            <a:r>
+              <a:rPr lang="ko-KR" altLang="en-US"/>
+              <a:t>프로젝트 경로</a:t>
+            </a:r>
+          </a:p>
+        </p:txBody>
+      </p:sp>
+      <p:grpSp>
+        <p:nvGrpSpPr>
+          <p:cNvPr id="6" name="그룹 5">
+            <a:extLst>
+              <a:ext uri="{FF2B5EF4-FFF2-40B4-BE49-F238E27FC236}">
+                <a16:creationId xmlns:a16="http://schemas.microsoft.com/office/drawing/2014/main" id="{67284953-0040-405E-5910-19705506F638}"/>
+              </a:ext>
+            </a:extLst>
+          </p:cNvPr>
+          <p:cNvGrpSpPr/>
+          <p:nvPr/>
+        </p:nvGrpSpPr>
+        <p:grpSpPr>
+          <a:xfrm>
+            <a:off x="1173484" y="1865376"/>
+            <a:ext cx="8125959" cy="4093565"/>
+            <a:chOff x="1219204" y="2039112"/>
+            <a:chExt cx="8125959" cy="4093565"/>
+          </a:xfrm>
+        </p:grpSpPr>
+        <p:pic>
+          <p:nvPicPr>
+            <p:cNvPr id="4" name="그림 3">
+              <a:extLst>
+                <a:ext uri="{FF2B5EF4-FFF2-40B4-BE49-F238E27FC236}">
+                  <a16:creationId xmlns:a16="http://schemas.microsoft.com/office/drawing/2014/main" id="{32AF4A34-026A-0D1F-41D0-97874DF3396F}"/>
+                </a:ext>
+              </a:extLst>
+            </p:cNvPr>
+            <p:cNvPicPr>
+              <a:picLocks noChangeAspect="1"/>
+            </p:cNvPicPr>
+            <p:nvPr/>
+          </p:nvPicPr>
+          <p:blipFill>
+            <a:blip r:embed="rId2"/>
+            <a:srcRect t="2116"/>
+            <a:stretch>
+              <a:fillRect/>
+            </a:stretch>
+          </p:blipFill>
+          <p:spPr>
+            <a:xfrm>
+              <a:off x="1219204" y="2039112"/>
+              <a:ext cx="8125959" cy="4093565"/>
+            </a:xfrm>
+            <a:prstGeom prst="rect">
+              <a:avLst/>
+            </a:prstGeom>
+            <a:ln>
+              <a:solidFill>
+                <a:schemeClr val="tx1"/>
+              </a:solidFill>
+            </a:ln>
+          </p:spPr>
+        </p:pic>
+        <p:sp>
+          <p:nvSpPr>
+            <p:cNvPr id="5" name="직사각형 4">
+              <a:extLst>
+                <a:ext uri="{FF2B5EF4-FFF2-40B4-BE49-F238E27FC236}">
+                  <a16:creationId xmlns:a16="http://schemas.microsoft.com/office/drawing/2014/main" id="{4A83C0C8-E82B-D2A1-9931-6337287C6D02}"/>
+                </a:ext>
+              </a:extLst>
+            </p:cNvPr>
+            <p:cNvSpPr/>
+            <p:nvPr/>
+          </p:nvSpPr>
+          <p:spPr>
+            <a:xfrm>
+              <a:off x="4215384" y="4398264"/>
+              <a:ext cx="1170432" cy="256032"/>
+            </a:xfrm>
+            <a:prstGeom prst="rect">
+              <a:avLst/>
+            </a:prstGeom>
+            <a:noFill/>
+            <a:ln>
+              <a:solidFill>
+                <a:schemeClr val="tx1"/>
+              </a:solidFill>
+            </a:ln>
+          </p:spPr>
+          <p:style>
+            <a:lnRef idx="2">
+              <a:schemeClr val="accent1">
+                <a:shade val="15000"/>
+              </a:schemeClr>
+            </a:lnRef>
+            <a:fillRef idx="1">
+              <a:schemeClr val="accent1"/>
+            </a:fillRef>
+            <a:effectRef idx="0">
+              <a:schemeClr val="accent1"/>
+            </a:effectRef>
+            <a:fontRef idx="minor">
+              <a:schemeClr val="lt1"/>
+            </a:fontRef>
+          </p:style>
+          <p:txBody>
+            <a:bodyPr rtlCol="0" anchor="ctr"/>
+            <a:lstStyle/>
+            <a:p>
+              <a:pPr algn="ctr"/>
+              <a:endParaRPr lang="ko-KR" altLang="en-US"/>
+            </a:p>
+          </p:txBody>
+        </p:sp>
+      </p:grpSp>
+      <p:sp>
+        <p:nvSpPr>
+          <p:cNvPr id="7" name="TextBox 6">
+            <a:extLst>
+              <a:ext uri="{FF2B5EF4-FFF2-40B4-BE49-F238E27FC236}">
+                <a16:creationId xmlns:a16="http://schemas.microsoft.com/office/drawing/2014/main" id="{66BF957B-6B12-FAC0-844F-FFB0993869B4}"/>
+              </a:ext>
+            </a:extLst>
+          </p:cNvPr>
+          <p:cNvSpPr txBox="1"/>
+          <p:nvPr/>
+        </p:nvSpPr>
+        <p:spPr>
+          <a:xfrm>
+            <a:off x="4169664" y="5129784"/>
+            <a:ext cx="4087368" cy="523220"/>
+          </a:xfrm>
+          <a:prstGeom prst="rect">
+            <a:avLst/>
+          </a:prstGeom>
+          <a:noFill/>
+        </p:spPr>
+        <p:txBody>
+          <a:bodyPr wrap="square" rtlCol="0">
+            <a:spAutoFit/>
+          </a:bodyPr>
+          <a:lstStyle/>
+          <a:p>
+            <a:r>
+              <a:rPr lang="ko-KR" altLang="en-US" sz="1400"/>
+              <a:t>다운로드 받은 압축파일을 </a:t>
+            </a:r>
+            <a:br>
+              <a:rPr lang="en-US" altLang="ko-KR" sz="1400"/>
+            </a:br>
+            <a:r>
+              <a:rPr lang="en-US" altLang="ko-KR" sz="1400"/>
+              <a:t>MSA_learning </a:t>
+            </a:r>
+            <a:r>
+              <a:rPr lang="ko-KR" altLang="en-US" sz="1400"/>
+              <a:t>폴더에 압축풀기</a:t>
+            </a:r>
+          </a:p>
+        </p:txBody>
+      </p:sp>
+    </p:spTree>
+    <p:extLst>
+      <p:ext uri="{BB962C8B-B14F-4D97-AF65-F5344CB8AC3E}">
+        <p14:creationId xmlns:p14="http://schemas.microsoft.com/office/powerpoint/2010/main" val="2501216949"/>
+      </p:ext>
+    </p:extLst>
+  </p:cSld>
+  <p:clrMapOvr>
+    <a:masterClrMapping/>
+  </p:clrMapOvr>
+</p:sld>
+</file>
+
+<file path=ppt/slides/slide22.xml><?xml version="1.0" encoding="utf-8"?>
+<p:sld xmlns:a="http://schemas.openxmlformats.org/drawingml/2006/main" xmlns:r="http://schemas.openxmlformats.org/officeDocument/2006/relationships" xmlns:p="http://schemas.openxmlformats.org/presentationml/2006/main">
+  <p:cSld>
+    <p:spTree>
+      <p:nvGrpSpPr>
+        <p:cNvPr id="1" name=""/>
+        <p:cNvGrpSpPr/>
+        <p:nvPr/>
+      </p:nvGrpSpPr>
+      <p:grpSpPr>
+        <a:xfrm>
+          <a:off x="0" y="0"/>
+          <a:ext cx="0" cy="0"/>
+          <a:chOff x="0" y="0"/>
+          <a:chExt cx="0" cy="0"/>
+        </a:xfrm>
+      </p:grpSpPr>
+      <p:sp>
+        <p:nvSpPr>
+          <p:cNvPr id="2" name="제목 1">
+            <a:extLst>
+              <a:ext uri="{FF2B5EF4-FFF2-40B4-BE49-F238E27FC236}">
+                <a16:creationId xmlns:a16="http://schemas.microsoft.com/office/drawing/2014/main" id="{21E0EB1C-9338-AFD3-ABA2-9AC59DF613B6}"/>
+              </a:ext>
+            </a:extLst>
+          </p:cNvPr>
+          <p:cNvSpPr>
+            <a:spLocks noGrp="1"/>
+          </p:cNvSpPr>
+          <p:nvPr>
+            <p:ph type="title"/>
+          </p:nvPr>
+        </p:nvSpPr>
+        <p:spPr/>
+        <p:txBody>
+          <a:bodyPr/>
+          <a:lstStyle/>
+          <a:p>
+            <a:r>
+              <a:rPr lang="en-US" altLang="ko-KR"/>
+              <a:t>application.yml </a:t>
+            </a:r>
+            <a:r>
+              <a:rPr lang="ko-KR" altLang="en-US"/>
+              <a:t>작성</a:t>
+            </a:r>
+          </a:p>
+        </p:txBody>
+      </p:sp>
+      <p:grpSp>
+        <p:nvGrpSpPr>
+          <p:cNvPr id="6" name="그룹 5">
+            <a:extLst>
+              <a:ext uri="{FF2B5EF4-FFF2-40B4-BE49-F238E27FC236}">
+                <a16:creationId xmlns:a16="http://schemas.microsoft.com/office/drawing/2014/main" id="{36DDC062-E7E5-E66E-67A5-5A622B2D5D56}"/>
+              </a:ext>
+            </a:extLst>
+          </p:cNvPr>
+          <p:cNvGrpSpPr/>
+          <p:nvPr/>
+        </p:nvGrpSpPr>
+        <p:grpSpPr>
+          <a:xfrm>
+            <a:off x="822960" y="1948532"/>
+            <a:ext cx="2753109" cy="4058216"/>
+            <a:chOff x="1097280" y="1948532"/>
+            <a:chExt cx="2753109" cy="4058216"/>
+          </a:xfrm>
+        </p:grpSpPr>
+        <p:pic>
+          <p:nvPicPr>
+            <p:cNvPr id="4" name="그림 3">
+              <a:extLst>
+                <a:ext uri="{FF2B5EF4-FFF2-40B4-BE49-F238E27FC236}">
+                  <a16:creationId xmlns:a16="http://schemas.microsoft.com/office/drawing/2014/main" id="{251EE40E-B82B-4D75-3663-C88A36B6D5BF}"/>
+                </a:ext>
+              </a:extLst>
+            </p:cNvPr>
+            <p:cNvPicPr>
+              <a:picLocks noChangeAspect="1"/>
+            </p:cNvPicPr>
+            <p:nvPr/>
+          </p:nvPicPr>
+          <p:blipFill>
+            <a:blip r:embed="rId2"/>
+            <a:stretch>
+              <a:fillRect/>
+            </a:stretch>
+          </p:blipFill>
+          <p:spPr>
+            <a:xfrm>
+              <a:off x="1097280" y="1948532"/>
+              <a:ext cx="2753109" cy="4058216"/>
+            </a:xfrm>
+            <a:prstGeom prst="rect">
+              <a:avLst/>
+            </a:prstGeom>
+          </p:spPr>
+        </p:pic>
+        <p:sp>
+          <p:nvSpPr>
+            <p:cNvPr id="5" name="직사각형 4">
+              <a:extLst>
+                <a:ext uri="{FF2B5EF4-FFF2-40B4-BE49-F238E27FC236}">
+                  <a16:creationId xmlns:a16="http://schemas.microsoft.com/office/drawing/2014/main" id="{38FF0FBD-2B69-A1A7-28AD-CC3D9AFFB4FC}"/>
+                </a:ext>
+              </a:extLst>
+            </p:cNvPr>
+            <p:cNvSpPr/>
+            <p:nvPr/>
+          </p:nvSpPr>
+          <p:spPr>
+            <a:xfrm>
+              <a:off x="1289304" y="4123944"/>
+              <a:ext cx="1207008" cy="228600"/>
+            </a:xfrm>
+            <a:prstGeom prst="rect">
+              <a:avLst/>
+            </a:prstGeom>
+            <a:noFill/>
+            <a:ln>
+              <a:solidFill>
+                <a:srgbClr val="FF0000"/>
+              </a:solidFill>
+            </a:ln>
+          </p:spPr>
+          <p:style>
+            <a:lnRef idx="2">
+              <a:schemeClr val="accent1">
+                <a:shade val="15000"/>
+              </a:schemeClr>
+            </a:lnRef>
+            <a:fillRef idx="1">
+              <a:schemeClr val="accent1"/>
+            </a:fillRef>
+            <a:effectRef idx="0">
+              <a:schemeClr val="accent1"/>
+            </a:effectRef>
+            <a:fontRef idx="minor">
+              <a:schemeClr val="lt1"/>
+            </a:fontRef>
+          </p:style>
+          <p:txBody>
+            <a:bodyPr rtlCol="0" anchor="ctr"/>
+            <a:lstStyle/>
+            <a:p>
+              <a:pPr algn="ctr"/>
+              <a:endParaRPr lang="ko-KR" altLang="en-US"/>
+            </a:p>
+          </p:txBody>
+        </p:sp>
+      </p:grpSp>
+      <p:sp>
+        <p:nvSpPr>
+          <p:cNvPr id="10" name="TextBox 9">
+            <a:extLst>
+              <a:ext uri="{FF2B5EF4-FFF2-40B4-BE49-F238E27FC236}">
+                <a16:creationId xmlns:a16="http://schemas.microsoft.com/office/drawing/2014/main" id="{BB8A2EEC-8B71-645B-E409-C6C000D6F4D3}"/>
+              </a:ext>
+            </a:extLst>
+          </p:cNvPr>
+          <p:cNvSpPr txBox="1"/>
+          <p:nvPr/>
+        </p:nvSpPr>
+        <p:spPr>
+          <a:xfrm>
+            <a:off x="3897630" y="1948532"/>
+            <a:ext cx="6094476" cy="3877087"/>
+          </a:xfrm>
+          <a:prstGeom prst="rect">
+            <a:avLst/>
+          </a:prstGeom>
+          <a:solidFill>
+            <a:schemeClr val="tx1"/>
+          </a:solidFill>
+        </p:spPr>
+        <p:txBody>
+          <a:bodyPr wrap="square">
+            <a:spAutoFit/>
+          </a:bodyPr>
+          <a:lstStyle/>
+          <a:p>
+            <a:pPr>
+              <a:lnSpc>
+                <a:spcPts val="1425"/>
+              </a:lnSpc>
+              <a:buNone/>
+            </a:pPr>
+            <a:r>
+              <a:rPr lang="en-US" altLang="ko-KR" sz="1200" b="0">
+                <a:solidFill>
+                  <a:srgbClr val="7EE787"/>
+                </a:solidFill>
+                <a:effectLst/>
+                <a:latin typeface="Consolas" panose="020B0609020204030204" pitchFamily="49" charset="0"/>
+              </a:rPr>
+              <a:t>server</a:t>
+            </a:r>
+            <a:r>
+              <a:rPr lang="en-US" altLang="ko-KR" sz="1200" b="0">
+                <a:solidFill>
+                  <a:srgbClr val="BBBEBF"/>
+                </a:solidFill>
+                <a:effectLst/>
+                <a:latin typeface="Consolas" panose="020B0609020204030204" pitchFamily="49" charset="0"/>
+              </a:rPr>
+              <a:t>:</a:t>
+            </a:r>
+          </a:p>
+          <a:p>
+            <a:pPr>
+              <a:lnSpc>
+                <a:spcPts val="1425"/>
+              </a:lnSpc>
+              <a:buNone/>
+            </a:pPr>
+            <a:r>
+              <a:rPr lang="en-US" altLang="ko-KR" sz="1200" b="0">
+                <a:solidFill>
+                  <a:srgbClr val="BBBEBF"/>
+                </a:solidFill>
+                <a:effectLst/>
+                <a:latin typeface="Consolas" panose="020B0609020204030204" pitchFamily="49" charset="0"/>
+              </a:rPr>
+              <a:t>    </a:t>
+            </a:r>
+            <a:r>
+              <a:rPr lang="en-US" altLang="ko-KR" sz="1200" b="0">
+                <a:solidFill>
+                  <a:srgbClr val="7EE787"/>
+                </a:solidFill>
+                <a:effectLst/>
+                <a:latin typeface="Consolas" panose="020B0609020204030204" pitchFamily="49" charset="0"/>
+              </a:rPr>
+              <a:t>port</a:t>
+            </a:r>
+            <a:r>
+              <a:rPr lang="en-US" altLang="ko-KR" sz="1200" b="0">
+                <a:solidFill>
+                  <a:srgbClr val="BBBEBF"/>
+                </a:solidFill>
+                <a:effectLst/>
+                <a:latin typeface="Consolas" panose="020B0609020204030204" pitchFamily="49" charset="0"/>
+              </a:rPr>
+              <a:t>: </a:t>
+            </a:r>
+            <a:r>
+              <a:rPr lang="en-US" altLang="ko-KR" sz="1200" b="0">
+                <a:solidFill>
+                  <a:srgbClr val="B5CEA8"/>
+                </a:solidFill>
+                <a:effectLst/>
+                <a:latin typeface="Consolas" panose="020B0609020204030204" pitchFamily="49" charset="0"/>
+              </a:rPr>
+              <a:t>8081</a:t>
+            </a:r>
+            <a:endParaRPr lang="en-US" altLang="ko-KR" sz="1200" b="0">
+              <a:solidFill>
+                <a:srgbClr val="BBBEBF"/>
+              </a:solidFill>
+              <a:effectLst/>
+              <a:latin typeface="Consolas" panose="020B0609020204030204" pitchFamily="49" charset="0"/>
+            </a:endParaRPr>
+          </a:p>
+          <a:p>
+            <a:pPr>
+              <a:lnSpc>
+                <a:spcPts val="1425"/>
+              </a:lnSpc>
+              <a:buNone/>
+            </a:pPr>
+            <a:r>
+              <a:rPr lang="en-US" altLang="ko-KR" sz="1200" b="0">
+                <a:solidFill>
+                  <a:srgbClr val="BBBEBF"/>
+                </a:solidFill>
+                <a:effectLst/>
+                <a:latin typeface="Consolas" panose="020B0609020204030204" pitchFamily="49" charset="0"/>
+              </a:rPr>
+              <a:t>    </a:t>
+            </a:r>
+          </a:p>
+          <a:p>
+            <a:pPr>
+              <a:lnSpc>
+                <a:spcPts val="1425"/>
+              </a:lnSpc>
+              <a:buNone/>
+            </a:pPr>
+            <a:r>
+              <a:rPr lang="en-US" altLang="ko-KR" sz="1200" b="0">
+                <a:solidFill>
+                  <a:srgbClr val="7EE787"/>
+                </a:solidFill>
+                <a:effectLst/>
+                <a:latin typeface="Consolas" panose="020B0609020204030204" pitchFamily="49" charset="0"/>
+              </a:rPr>
+              <a:t>spring</a:t>
+            </a:r>
+            <a:r>
+              <a:rPr lang="en-US" altLang="ko-KR" sz="1200" b="0">
+                <a:solidFill>
+                  <a:srgbClr val="BBBEBF"/>
+                </a:solidFill>
+                <a:effectLst/>
+                <a:latin typeface="Consolas" panose="020B0609020204030204" pitchFamily="49" charset="0"/>
+              </a:rPr>
+              <a:t>:</a:t>
+            </a:r>
+          </a:p>
+          <a:p>
+            <a:pPr>
+              <a:lnSpc>
+                <a:spcPts val="1425"/>
+              </a:lnSpc>
+              <a:buNone/>
+            </a:pPr>
+            <a:r>
+              <a:rPr lang="en-US" altLang="ko-KR" sz="1200" b="0">
+                <a:solidFill>
+                  <a:srgbClr val="BBBEBF"/>
+                </a:solidFill>
+                <a:effectLst/>
+                <a:latin typeface="Consolas" panose="020B0609020204030204" pitchFamily="49" charset="0"/>
+              </a:rPr>
+              <a:t>    </a:t>
+            </a:r>
+            <a:r>
+              <a:rPr lang="en-US" altLang="ko-KR" sz="1200" b="0">
+                <a:solidFill>
+                  <a:srgbClr val="7EE787"/>
+                </a:solidFill>
+                <a:effectLst/>
+                <a:latin typeface="Consolas" panose="020B0609020204030204" pitchFamily="49" charset="0"/>
+              </a:rPr>
+              <a:t>datasource</a:t>
+            </a:r>
+            <a:r>
+              <a:rPr lang="en-US" altLang="ko-KR" sz="1200" b="0">
+                <a:solidFill>
+                  <a:srgbClr val="BBBEBF"/>
+                </a:solidFill>
+                <a:effectLst/>
+                <a:latin typeface="Consolas" panose="020B0609020204030204" pitchFamily="49" charset="0"/>
+              </a:rPr>
+              <a:t>:</a:t>
+            </a:r>
+          </a:p>
+          <a:p>
+            <a:pPr>
+              <a:lnSpc>
+                <a:spcPts val="1425"/>
+              </a:lnSpc>
+              <a:buNone/>
+            </a:pPr>
+            <a:r>
+              <a:rPr lang="en-US" altLang="ko-KR" sz="1200" b="0">
+                <a:solidFill>
+                  <a:srgbClr val="BBBEBF"/>
+                </a:solidFill>
+                <a:effectLst/>
+                <a:latin typeface="Consolas" panose="020B0609020204030204" pitchFamily="49" charset="0"/>
+              </a:rPr>
+              <a:t>        </a:t>
+            </a:r>
+            <a:r>
+              <a:rPr lang="en-US" altLang="ko-KR" sz="1200" b="0">
+                <a:solidFill>
+                  <a:srgbClr val="7EE787"/>
+                </a:solidFill>
+                <a:effectLst/>
+                <a:latin typeface="Consolas" panose="020B0609020204030204" pitchFamily="49" charset="0"/>
+              </a:rPr>
+              <a:t>url</a:t>
+            </a:r>
+            <a:r>
+              <a:rPr lang="en-US" altLang="ko-KR" sz="1200" b="0">
+                <a:solidFill>
+                  <a:srgbClr val="BBBEBF"/>
+                </a:solidFill>
+                <a:effectLst/>
+                <a:latin typeface="Consolas" panose="020B0609020204030204" pitchFamily="49" charset="0"/>
+              </a:rPr>
+              <a:t>: </a:t>
+            </a:r>
+            <a:r>
+              <a:rPr lang="en-US" altLang="ko-KR" sz="1200" b="0">
+                <a:solidFill>
+                  <a:srgbClr val="A5D6FF"/>
+                </a:solidFill>
+                <a:effectLst/>
+                <a:latin typeface="Consolas" panose="020B0609020204030204" pitchFamily="49" charset="0"/>
+              </a:rPr>
+              <a:t>jdbc:mysql://localhost:3321/board-db</a:t>
+            </a:r>
+            <a:endParaRPr lang="en-US" altLang="ko-KR" sz="1200" b="0">
+              <a:solidFill>
+                <a:srgbClr val="BBBEBF"/>
+              </a:solidFill>
+              <a:effectLst/>
+              <a:latin typeface="Consolas" panose="020B0609020204030204" pitchFamily="49" charset="0"/>
+            </a:endParaRPr>
+          </a:p>
+          <a:p>
+            <a:pPr>
+              <a:lnSpc>
+                <a:spcPts val="1425"/>
+              </a:lnSpc>
+              <a:buNone/>
+            </a:pPr>
+            <a:r>
+              <a:rPr lang="en-US" altLang="ko-KR" sz="1200" b="0">
+                <a:solidFill>
+                  <a:srgbClr val="BBBEBF"/>
+                </a:solidFill>
+                <a:effectLst/>
+                <a:latin typeface="Consolas" panose="020B0609020204030204" pitchFamily="49" charset="0"/>
+              </a:rPr>
+              <a:t>        </a:t>
+            </a:r>
+            <a:r>
+              <a:rPr lang="en-US" altLang="ko-KR" sz="1200" b="0">
+                <a:solidFill>
+                  <a:srgbClr val="7EE787"/>
+                </a:solidFill>
+                <a:effectLst/>
+                <a:latin typeface="Consolas" panose="020B0609020204030204" pitchFamily="49" charset="0"/>
+              </a:rPr>
+              <a:t>username</a:t>
+            </a:r>
+            <a:r>
+              <a:rPr lang="en-US" altLang="ko-KR" sz="1200" b="0">
+                <a:solidFill>
+                  <a:srgbClr val="BBBEBF"/>
+                </a:solidFill>
+                <a:effectLst/>
+                <a:latin typeface="Consolas" panose="020B0609020204030204" pitchFamily="49" charset="0"/>
+              </a:rPr>
+              <a:t>: </a:t>
+            </a:r>
+            <a:r>
+              <a:rPr lang="en-US" altLang="ko-KR" sz="1200" b="0">
+                <a:solidFill>
+                  <a:srgbClr val="A5D6FF"/>
+                </a:solidFill>
+                <a:effectLst/>
+                <a:latin typeface="Consolas" panose="020B0609020204030204" pitchFamily="49" charset="0"/>
+              </a:rPr>
+              <a:t>root</a:t>
+            </a:r>
+            <a:endParaRPr lang="en-US" altLang="ko-KR" sz="1200" b="0">
+              <a:solidFill>
+                <a:srgbClr val="BBBEBF"/>
+              </a:solidFill>
+              <a:effectLst/>
+              <a:latin typeface="Consolas" panose="020B0609020204030204" pitchFamily="49" charset="0"/>
+            </a:endParaRPr>
+          </a:p>
+          <a:p>
+            <a:pPr>
+              <a:lnSpc>
+                <a:spcPts val="1425"/>
+              </a:lnSpc>
+              <a:buNone/>
+            </a:pPr>
+            <a:r>
+              <a:rPr lang="en-US" altLang="ko-KR" sz="1200" b="0">
+                <a:solidFill>
+                  <a:srgbClr val="BBBEBF"/>
+                </a:solidFill>
+                <a:effectLst/>
+                <a:latin typeface="Consolas" panose="020B0609020204030204" pitchFamily="49" charset="0"/>
+              </a:rPr>
+              <a:t>        </a:t>
+            </a:r>
+            <a:r>
+              <a:rPr lang="en-US" altLang="ko-KR" sz="1200" b="0">
+                <a:solidFill>
+                  <a:srgbClr val="7EE787"/>
+                </a:solidFill>
+                <a:effectLst/>
+                <a:latin typeface="Consolas" panose="020B0609020204030204" pitchFamily="49" charset="0"/>
+              </a:rPr>
+              <a:t>password</a:t>
+            </a:r>
+            <a:r>
+              <a:rPr lang="en-US" altLang="ko-KR" sz="1200" b="0">
+                <a:solidFill>
+                  <a:srgbClr val="BBBEBF"/>
+                </a:solidFill>
+                <a:effectLst/>
+                <a:latin typeface="Consolas" panose="020B0609020204030204" pitchFamily="49" charset="0"/>
+              </a:rPr>
+              <a:t>: </a:t>
+            </a:r>
+            <a:r>
+              <a:rPr lang="en-US" altLang="ko-KR" sz="1200" b="0">
+                <a:solidFill>
+                  <a:srgbClr val="A5D6FF"/>
+                </a:solidFill>
+                <a:effectLst/>
+                <a:latin typeface="Consolas" panose="020B0609020204030204" pitchFamily="49" charset="0"/>
+              </a:rPr>
+              <a:t>password</a:t>
+            </a:r>
+            <a:endParaRPr lang="en-US" altLang="ko-KR" sz="1200" b="0">
+              <a:solidFill>
+                <a:srgbClr val="BBBEBF"/>
+              </a:solidFill>
+              <a:effectLst/>
+              <a:latin typeface="Consolas" panose="020B0609020204030204" pitchFamily="49" charset="0"/>
+            </a:endParaRPr>
+          </a:p>
+          <a:p>
+            <a:pPr>
+              <a:lnSpc>
+                <a:spcPts val="1425"/>
+              </a:lnSpc>
+              <a:buNone/>
+            </a:pPr>
+            <a:r>
+              <a:rPr lang="en-US" altLang="ko-KR" sz="1200" b="0">
+                <a:solidFill>
+                  <a:srgbClr val="BBBEBF"/>
+                </a:solidFill>
+                <a:effectLst/>
+                <a:latin typeface="Consolas" panose="020B0609020204030204" pitchFamily="49" charset="0"/>
+              </a:rPr>
+              <a:t>        </a:t>
+            </a:r>
+            <a:r>
+              <a:rPr lang="en-US" altLang="ko-KR" sz="1200" b="0">
+                <a:solidFill>
+                  <a:srgbClr val="7EE787"/>
+                </a:solidFill>
+                <a:effectLst/>
+                <a:latin typeface="Consolas" panose="020B0609020204030204" pitchFamily="49" charset="0"/>
+              </a:rPr>
+              <a:t>driver-class-name</a:t>
+            </a:r>
+            <a:r>
+              <a:rPr lang="en-US" altLang="ko-KR" sz="1200" b="0">
+                <a:solidFill>
+                  <a:srgbClr val="BBBEBF"/>
+                </a:solidFill>
+                <a:effectLst/>
+                <a:latin typeface="Consolas" panose="020B0609020204030204" pitchFamily="49" charset="0"/>
+              </a:rPr>
+              <a:t>: </a:t>
+            </a:r>
+            <a:r>
+              <a:rPr lang="en-US" altLang="ko-KR" sz="1200" b="0">
+                <a:solidFill>
+                  <a:srgbClr val="A5D6FF"/>
+                </a:solidFill>
+                <a:effectLst/>
+                <a:latin typeface="Consolas" panose="020B0609020204030204" pitchFamily="49" charset="0"/>
+              </a:rPr>
+              <a:t>com.mysql.cj.jdbc.Driver</a:t>
+            </a:r>
+            <a:endParaRPr lang="en-US" altLang="ko-KR" sz="1200" b="0">
+              <a:solidFill>
+                <a:srgbClr val="BBBEBF"/>
+              </a:solidFill>
+              <a:effectLst/>
+              <a:latin typeface="Consolas" panose="020B0609020204030204" pitchFamily="49" charset="0"/>
+            </a:endParaRPr>
+          </a:p>
+          <a:p>
+            <a:pPr>
+              <a:lnSpc>
+                <a:spcPts val="1425"/>
+              </a:lnSpc>
+              <a:buNone/>
+            </a:pPr>
+            <a:br>
+              <a:rPr lang="en-US" altLang="ko-KR" sz="1200" b="0">
+                <a:solidFill>
+                  <a:srgbClr val="BBBEBF"/>
+                </a:solidFill>
+                <a:effectLst/>
+                <a:latin typeface="Consolas" panose="020B0609020204030204" pitchFamily="49" charset="0"/>
+              </a:rPr>
+            </a:br>
+            <a:endParaRPr lang="en-US" altLang="ko-KR" sz="1200" b="0">
+              <a:solidFill>
+                <a:srgbClr val="BBBEBF"/>
+              </a:solidFill>
+              <a:effectLst/>
+              <a:latin typeface="Consolas" panose="020B0609020204030204" pitchFamily="49" charset="0"/>
+            </a:endParaRPr>
+          </a:p>
+          <a:p>
+            <a:pPr>
+              <a:lnSpc>
+                <a:spcPts val="1425"/>
+              </a:lnSpc>
+              <a:buNone/>
+            </a:pPr>
+            <a:r>
+              <a:rPr lang="en-US" altLang="ko-KR" sz="1200" b="0">
+                <a:solidFill>
+                  <a:srgbClr val="BBBEBF"/>
+                </a:solidFill>
+                <a:effectLst/>
+                <a:latin typeface="Consolas" panose="020B0609020204030204" pitchFamily="49" charset="0"/>
+              </a:rPr>
+              <a:t>    </a:t>
+            </a:r>
+            <a:r>
+              <a:rPr lang="en-US" altLang="ko-KR" sz="1200" b="0">
+                <a:solidFill>
+                  <a:srgbClr val="7EE787"/>
+                </a:solidFill>
+                <a:effectLst/>
+                <a:latin typeface="Consolas" panose="020B0609020204030204" pitchFamily="49" charset="0"/>
+              </a:rPr>
+              <a:t>jpa</a:t>
+            </a:r>
+            <a:r>
+              <a:rPr lang="en-US" altLang="ko-KR" sz="1200" b="0">
+                <a:solidFill>
+                  <a:srgbClr val="BBBEBF"/>
+                </a:solidFill>
+                <a:effectLst/>
+                <a:latin typeface="Consolas" panose="020B0609020204030204" pitchFamily="49" charset="0"/>
+              </a:rPr>
+              <a:t>:</a:t>
+            </a:r>
+          </a:p>
+          <a:p>
+            <a:pPr>
+              <a:lnSpc>
+                <a:spcPts val="1425"/>
+              </a:lnSpc>
+              <a:buNone/>
+            </a:pPr>
+            <a:r>
+              <a:rPr lang="en-US" altLang="ko-KR" sz="1200" b="0">
+                <a:solidFill>
+                  <a:srgbClr val="BBBEBF"/>
+                </a:solidFill>
+                <a:effectLst/>
+                <a:latin typeface="Consolas" panose="020B0609020204030204" pitchFamily="49" charset="0"/>
+              </a:rPr>
+              <a:t>        </a:t>
+            </a:r>
+            <a:r>
+              <a:rPr lang="en-US" altLang="ko-KR" sz="1200" b="0">
+                <a:solidFill>
+                  <a:srgbClr val="7EE787"/>
+                </a:solidFill>
+                <a:effectLst/>
+                <a:latin typeface="Consolas" panose="020B0609020204030204" pitchFamily="49" charset="0"/>
+              </a:rPr>
+              <a:t>hibernate</a:t>
+            </a:r>
+            <a:r>
+              <a:rPr lang="en-US" altLang="ko-KR" sz="1200" b="0">
+                <a:solidFill>
+                  <a:srgbClr val="BBBEBF"/>
+                </a:solidFill>
+                <a:effectLst/>
+                <a:latin typeface="Consolas" panose="020B0609020204030204" pitchFamily="49" charset="0"/>
+              </a:rPr>
+              <a:t>:</a:t>
+            </a:r>
+          </a:p>
+          <a:p>
+            <a:pPr>
+              <a:lnSpc>
+                <a:spcPts val="1425"/>
+              </a:lnSpc>
+              <a:buNone/>
+            </a:pPr>
+            <a:r>
+              <a:rPr lang="en-US" altLang="ko-KR" sz="1200" b="0">
+                <a:solidFill>
+                  <a:srgbClr val="BBBEBF"/>
+                </a:solidFill>
+                <a:effectLst/>
+                <a:latin typeface="Consolas" panose="020B0609020204030204" pitchFamily="49" charset="0"/>
+              </a:rPr>
+              <a:t>            </a:t>
+            </a:r>
+            <a:r>
+              <a:rPr lang="en-US" altLang="ko-KR" sz="1200" b="0">
+                <a:solidFill>
+                  <a:srgbClr val="7EE787"/>
+                </a:solidFill>
+                <a:effectLst/>
+                <a:latin typeface="Consolas" panose="020B0609020204030204" pitchFamily="49" charset="0"/>
+              </a:rPr>
+              <a:t>ddl-auto</a:t>
+            </a:r>
+            <a:r>
+              <a:rPr lang="en-US" altLang="ko-KR" sz="1200" b="0">
+                <a:solidFill>
+                  <a:srgbClr val="BBBEBF"/>
+                </a:solidFill>
+                <a:effectLst/>
+                <a:latin typeface="Consolas" panose="020B0609020204030204" pitchFamily="49" charset="0"/>
+              </a:rPr>
+              <a:t>: </a:t>
+            </a:r>
+            <a:r>
+              <a:rPr lang="en-US" altLang="ko-KR" sz="1200" b="0">
+                <a:solidFill>
+                  <a:srgbClr val="A5D6FF"/>
+                </a:solidFill>
+                <a:effectLst/>
+                <a:latin typeface="Consolas" panose="020B0609020204030204" pitchFamily="49" charset="0"/>
+              </a:rPr>
+              <a:t>update</a:t>
+            </a:r>
+            <a:endParaRPr lang="en-US" altLang="ko-KR" sz="1200" b="0">
+              <a:solidFill>
+                <a:srgbClr val="BBBEBF"/>
+              </a:solidFill>
+              <a:effectLst/>
+              <a:latin typeface="Consolas" panose="020B0609020204030204" pitchFamily="49" charset="0"/>
+            </a:endParaRPr>
+          </a:p>
+          <a:p>
+            <a:pPr>
+              <a:lnSpc>
+                <a:spcPts val="1425"/>
+              </a:lnSpc>
+              <a:buNone/>
+            </a:pPr>
+            <a:r>
+              <a:rPr lang="en-US" altLang="ko-KR" sz="1200" b="0">
+                <a:solidFill>
+                  <a:srgbClr val="BBBEBF"/>
+                </a:solidFill>
+                <a:effectLst/>
+                <a:latin typeface="Consolas" panose="020B0609020204030204" pitchFamily="49" charset="0"/>
+              </a:rPr>
+              <a:t>        </a:t>
+            </a:r>
+            <a:r>
+              <a:rPr lang="en-US" altLang="ko-KR" sz="1200" b="0">
+                <a:solidFill>
+                  <a:srgbClr val="7EE787"/>
+                </a:solidFill>
+                <a:effectLst/>
+                <a:latin typeface="Consolas" panose="020B0609020204030204" pitchFamily="49" charset="0"/>
+              </a:rPr>
+              <a:t>show-sql</a:t>
+            </a:r>
+            <a:r>
+              <a:rPr lang="en-US" altLang="ko-KR" sz="1200" b="0">
+                <a:solidFill>
+                  <a:srgbClr val="BBBEBF"/>
+                </a:solidFill>
+                <a:effectLst/>
+                <a:latin typeface="Consolas" panose="020B0609020204030204" pitchFamily="49" charset="0"/>
+              </a:rPr>
+              <a:t>: </a:t>
+            </a:r>
+            <a:r>
+              <a:rPr lang="en-US" altLang="ko-KR" sz="1200" b="0">
+                <a:solidFill>
+                  <a:srgbClr val="569CD6"/>
+                </a:solidFill>
+                <a:effectLst/>
+                <a:latin typeface="Consolas" panose="020B0609020204030204" pitchFamily="49" charset="0"/>
+              </a:rPr>
+              <a:t>true</a:t>
+            </a:r>
+            <a:endParaRPr lang="en-US" altLang="ko-KR" sz="1200" b="0">
+              <a:solidFill>
+                <a:srgbClr val="BBBEBF"/>
+              </a:solidFill>
+              <a:effectLst/>
+              <a:latin typeface="Consolas" panose="020B0609020204030204" pitchFamily="49" charset="0"/>
+            </a:endParaRPr>
+          </a:p>
+          <a:p>
+            <a:pPr>
+              <a:lnSpc>
+                <a:spcPts val="1425"/>
+              </a:lnSpc>
+              <a:buNone/>
+            </a:pPr>
+            <a:br>
+              <a:rPr lang="en-US" altLang="ko-KR" sz="1200" b="0">
+                <a:solidFill>
+                  <a:srgbClr val="BBBEBF"/>
+                </a:solidFill>
+                <a:effectLst/>
+                <a:latin typeface="Consolas" panose="020B0609020204030204" pitchFamily="49" charset="0"/>
+              </a:rPr>
+            </a:br>
+            <a:endParaRPr lang="en-US" altLang="ko-KR" sz="1200" b="0">
+              <a:solidFill>
+                <a:srgbClr val="BBBEBF"/>
+              </a:solidFill>
+              <a:effectLst/>
+              <a:latin typeface="Consolas" panose="020B0609020204030204" pitchFamily="49" charset="0"/>
+            </a:endParaRPr>
+          </a:p>
+          <a:p>
+            <a:pPr>
+              <a:lnSpc>
+                <a:spcPts val="1425"/>
+              </a:lnSpc>
+              <a:buNone/>
+            </a:pPr>
+            <a:r>
+              <a:rPr lang="en-US" altLang="ko-KR" sz="1200" b="0">
+                <a:solidFill>
+                  <a:srgbClr val="BBBEBF"/>
+                </a:solidFill>
+                <a:effectLst/>
+                <a:latin typeface="Consolas" panose="020B0609020204030204" pitchFamily="49" charset="0"/>
+              </a:rPr>
+              <a:t>    </a:t>
+            </a:r>
+            <a:r>
+              <a:rPr lang="en-US" altLang="ko-KR" sz="1200" b="0">
+                <a:solidFill>
+                  <a:srgbClr val="7EE787"/>
+                </a:solidFill>
+                <a:effectLst/>
+                <a:latin typeface="Consolas" panose="020B0609020204030204" pitchFamily="49" charset="0"/>
+              </a:rPr>
+              <a:t>application</a:t>
+            </a:r>
+            <a:r>
+              <a:rPr lang="en-US" altLang="ko-KR" sz="1200" b="0">
+                <a:solidFill>
+                  <a:srgbClr val="BBBEBF"/>
+                </a:solidFill>
+                <a:effectLst/>
+                <a:latin typeface="Consolas" panose="020B0609020204030204" pitchFamily="49" charset="0"/>
+              </a:rPr>
+              <a:t>:</a:t>
+            </a:r>
+          </a:p>
+          <a:p>
+            <a:pPr>
+              <a:lnSpc>
+                <a:spcPts val="1425"/>
+              </a:lnSpc>
+              <a:buNone/>
+            </a:pPr>
+            <a:r>
+              <a:rPr lang="en-US" altLang="ko-KR" sz="1200" b="0">
+                <a:solidFill>
+                  <a:srgbClr val="BBBEBF"/>
+                </a:solidFill>
+                <a:effectLst/>
+                <a:latin typeface="Consolas" panose="020B0609020204030204" pitchFamily="49" charset="0"/>
+              </a:rPr>
+              <a:t>        </a:t>
+            </a:r>
+            <a:r>
+              <a:rPr lang="en-US" altLang="ko-KR" sz="1200" b="0">
+                <a:solidFill>
+                  <a:srgbClr val="7EE787"/>
+                </a:solidFill>
+                <a:effectLst/>
+                <a:latin typeface="Consolas" panose="020B0609020204030204" pitchFamily="49" charset="0"/>
+              </a:rPr>
+              <a:t>name</a:t>
+            </a:r>
+            <a:r>
+              <a:rPr lang="en-US" altLang="ko-KR" sz="1200" b="0">
+                <a:solidFill>
+                  <a:srgbClr val="BBBEBF"/>
+                </a:solidFill>
+                <a:effectLst/>
+                <a:latin typeface="Consolas" panose="020B0609020204030204" pitchFamily="49" charset="0"/>
+              </a:rPr>
+              <a:t>: </a:t>
+            </a:r>
+            <a:r>
+              <a:rPr lang="en-US" altLang="ko-KR" sz="1200" b="0">
+                <a:solidFill>
+                  <a:srgbClr val="A5D6FF"/>
+                </a:solidFill>
+                <a:effectLst/>
+                <a:latin typeface="Consolas" panose="020B0609020204030204" pitchFamily="49" charset="0"/>
+              </a:rPr>
+              <a:t>board-service</a:t>
+            </a:r>
+            <a:endParaRPr lang="en-US" altLang="ko-KR" sz="1200" b="0">
+              <a:solidFill>
+                <a:srgbClr val="BBBEBF"/>
+              </a:solidFill>
+              <a:effectLst/>
+              <a:latin typeface="Consolas" panose="020B0609020204030204" pitchFamily="49" charset="0"/>
+            </a:endParaRPr>
+          </a:p>
+          <a:p>
+            <a:pPr>
+              <a:lnSpc>
+                <a:spcPts val="1425"/>
+              </a:lnSpc>
+              <a:buNone/>
+            </a:pPr>
+            <a:br>
+              <a:rPr lang="en-US" altLang="ko-KR" sz="1200" b="0">
+                <a:solidFill>
+                  <a:srgbClr val="BBBEBF"/>
+                </a:solidFill>
+                <a:effectLst/>
+                <a:latin typeface="Consolas" panose="020B0609020204030204" pitchFamily="49" charset="0"/>
+              </a:rPr>
+            </a:br>
+            <a:endParaRPr lang="en-US" altLang="ko-KR" sz="1200" b="0">
+              <a:solidFill>
+                <a:srgbClr val="BBBEBF"/>
+              </a:solidFill>
+              <a:effectLst/>
+              <a:latin typeface="Consolas" panose="020B0609020204030204" pitchFamily="49" charset="0"/>
+            </a:endParaRPr>
+          </a:p>
+        </p:txBody>
+      </p:sp>
+    </p:spTree>
+    <p:extLst>
+      <p:ext uri="{BB962C8B-B14F-4D97-AF65-F5344CB8AC3E}">
+        <p14:creationId xmlns:p14="http://schemas.microsoft.com/office/powerpoint/2010/main" val="1186550613"/>
+      </p:ext>
+    </p:extLst>
+  </p:cSld>
+  <p:clrMapOvr>
+    <a:masterClrMapping/>
+  </p:clrMapOvr>
+</p:sld>
+</file>
+
+<file path=ppt/slides/slide23.xml><?xml version="1.0" encoding="utf-8"?>
+<p:sld xmlns:a="http://schemas.openxmlformats.org/drawingml/2006/main" xmlns:r="http://schemas.openxmlformats.org/officeDocument/2006/relationships" xmlns:p="http://schemas.openxmlformats.org/presentationml/2006/main">
+  <p:cSld>
+    <p:spTree>
+      <p:nvGrpSpPr>
+        <p:cNvPr id="1" name="">
+          <a:extLst>
+            <a:ext uri="{FF2B5EF4-FFF2-40B4-BE49-F238E27FC236}">
+              <a16:creationId xmlns:a16="http://schemas.microsoft.com/office/drawing/2014/main" id="{100A06A2-FEB0-F239-C2FF-945208C81F43}"/>
+            </a:ext>
+          </a:extLst>
+        </p:cNvPr>
+        <p:cNvGrpSpPr/>
+        <p:nvPr/>
+      </p:nvGrpSpPr>
+      <p:grpSpPr>
+        <a:xfrm>
+          <a:off x="0" y="0"/>
+          <a:ext cx="0" cy="0"/>
+          <a:chOff x="0" y="0"/>
+          <a:chExt cx="0" cy="0"/>
+        </a:xfrm>
+      </p:grpSpPr>
+      <p:sp>
+        <p:nvSpPr>
+          <p:cNvPr id="2" name="제목 1">
+            <a:extLst>
+              <a:ext uri="{FF2B5EF4-FFF2-40B4-BE49-F238E27FC236}">
+                <a16:creationId xmlns:a16="http://schemas.microsoft.com/office/drawing/2014/main" id="{A9EC96E1-30AD-9E36-2387-5DDDA53C3630}"/>
+              </a:ext>
+            </a:extLst>
+          </p:cNvPr>
+          <p:cNvSpPr>
+            <a:spLocks noGrp="1"/>
+          </p:cNvSpPr>
+          <p:nvPr>
+            <p:ph type="title"/>
+          </p:nvPr>
+        </p:nvSpPr>
+        <p:spPr/>
+        <p:txBody>
+          <a:bodyPr/>
+          <a:lstStyle/>
+          <a:p>
+            <a:r>
+              <a:rPr lang="en-US" altLang="ko-KR"/>
+              <a:t>BoardService </a:t>
+            </a:r>
+            <a:r>
+              <a:rPr lang="ko-KR" altLang="en-US"/>
+              <a:t>작성하기</a:t>
+            </a:r>
+            <a:r>
+              <a:rPr lang="en-US" altLang="ko-KR"/>
+              <a:t>[Entity] </a:t>
+            </a:r>
+            <a:endParaRPr lang="ko-KR" altLang="en-US"/>
+          </a:p>
+        </p:txBody>
+      </p:sp>
+      <p:grpSp>
+        <p:nvGrpSpPr>
+          <p:cNvPr id="6" name="그룹 5">
+            <a:extLst>
+              <a:ext uri="{FF2B5EF4-FFF2-40B4-BE49-F238E27FC236}">
+                <a16:creationId xmlns:a16="http://schemas.microsoft.com/office/drawing/2014/main" id="{B50E29B0-2680-3246-61CF-BAAE89A34BDE}"/>
+              </a:ext>
+            </a:extLst>
+          </p:cNvPr>
+          <p:cNvGrpSpPr/>
+          <p:nvPr/>
+        </p:nvGrpSpPr>
+        <p:grpSpPr>
+          <a:xfrm>
+            <a:off x="892108" y="1847088"/>
+            <a:ext cx="2068891" cy="4938414"/>
+            <a:chOff x="892108" y="1847088"/>
+            <a:chExt cx="2068891" cy="4938414"/>
+          </a:xfrm>
+        </p:grpSpPr>
+        <p:pic>
+          <p:nvPicPr>
+            <p:cNvPr id="4" name="그림 3">
+              <a:extLst>
+                <a:ext uri="{FF2B5EF4-FFF2-40B4-BE49-F238E27FC236}">
+                  <a16:creationId xmlns:a16="http://schemas.microsoft.com/office/drawing/2014/main" id="{C00861E6-99F2-BA19-98D2-210AA9DE380D}"/>
+                </a:ext>
+              </a:extLst>
+            </p:cNvPr>
+            <p:cNvPicPr>
+              <a:picLocks noChangeAspect="1"/>
+            </p:cNvPicPr>
+            <p:nvPr/>
+          </p:nvPicPr>
+          <p:blipFill>
+            <a:blip r:embed="rId2"/>
+            <a:stretch>
+              <a:fillRect/>
+            </a:stretch>
+          </p:blipFill>
+          <p:spPr>
+            <a:xfrm>
+              <a:off x="892108" y="1847088"/>
+              <a:ext cx="2068891" cy="4938414"/>
+            </a:xfrm>
+            <a:prstGeom prst="rect">
+              <a:avLst/>
+            </a:prstGeom>
+          </p:spPr>
+        </p:pic>
+        <p:sp>
+          <p:nvSpPr>
+            <p:cNvPr id="5" name="직사각형 4">
+              <a:extLst>
+                <a:ext uri="{FF2B5EF4-FFF2-40B4-BE49-F238E27FC236}">
+                  <a16:creationId xmlns:a16="http://schemas.microsoft.com/office/drawing/2014/main" id="{4FBA73A9-5578-2994-6225-1F59CBE1E465}"/>
+                </a:ext>
+              </a:extLst>
+            </p:cNvPr>
+            <p:cNvSpPr/>
+            <p:nvPr/>
+          </p:nvSpPr>
+          <p:spPr>
+            <a:xfrm>
+              <a:off x="1097280" y="3630166"/>
+              <a:ext cx="832104" cy="320041"/>
+            </a:xfrm>
+            <a:prstGeom prst="rect">
+              <a:avLst/>
+            </a:prstGeom>
+            <a:noFill/>
+            <a:ln>
+              <a:solidFill>
+                <a:srgbClr val="FF0000"/>
+              </a:solidFill>
+            </a:ln>
+          </p:spPr>
+          <p:style>
+            <a:lnRef idx="2">
+              <a:schemeClr val="accent1">
+                <a:shade val="15000"/>
+              </a:schemeClr>
+            </a:lnRef>
+            <a:fillRef idx="1">
+              <a:schemeClr val="accent1"/>
+            </a:fillRef>
+            <a:effectRef idx="0">
+              <a:schemeClr val="accent1"/>
+            </a:effectRef>
+            <a:fontRef idx="minor">
+              <a:schemeClr val="lt1"/>
+            </a:fontRef>
+          </p:style>
+          <p:txBody>
+            <a:bodyPr rtlCol="0" anchor="ctr"/>
+            <a:lstStyle/>
+            <a:p>
+              <a:pPr algn="ctr"/>
+              <a:endParaRPr lang="ko-KR" altLang="en-US"/>
+            </a:p>
+          </p:txBody>
+        </p:sp>
+      </p:grpSp>
+      <p:sp>
+        <p:nvSpPr>
+          <p:cNvPr id="7" name="TextBox 6">
+            <a:extLst>
+              <a:ext uri="{FF2B5EF4-FFF2-40B4-BE49-F238E27FC236}">
+                <a16:creationId xmlns:a16="http://schemas.microsoft.com/office/drawing/2014/main" id="{7E5A322B-2CCB-61F0-AFEB-DED9A5338048}"/>
+              </a:ext>
+            </a:extLst>
+          </p:cNvPr>
+          <p:cNvSpPr txBox="1"/>
+          <p:nvPr/>
+        </p:nvSpPr>
+        <p:spPr>
+          <a:xfrm>
+            <a:off x="3048001" y="1750576"/>
+            <a:ext cx="5172455" cy="5107424"/>
+          </a:xfrm>
+          <a:prstGeom prst="rect">
+            <a:avLst/>
+          </a:prstGeom>
+          <a:solidFill>
+            <a:schemeClr val="tx1"/>
+          </a:solidFill>
+        </p:spPr>
+        <p:txBody>
+          <a:bodyPr wrap="square">
+            <a:spAutoFit/>
+          </a:bodyPr>
+          <a:lstStyle/>
+          <a:p>
+            <a:pPr>
+              <a:lnSpc>
+                <a:spcPts val="1425"/>
+              </a:lnSpc>
+              <a:buNone/>
+            </a:pPr>
+            <a:r>
+              <a:rPr lang="en-US" altLang="ko-KR" sz="1000" b="0">
+                <a:solidFill>
+                  <a:srgbClr val="BBBEBF"/>
+                </a:solidFill>
+                <a:effectLst/>
+                <a:latin typeface="Consolas" panose="020B0609020204030204" pitchFamily="49" charset="0"/>
+              </a:rPr>
+              <a:t>@</a:t>
+            </a:r>
+            <a:r>
+              <a:rPr lang="en-US" altLang="ko-KR" sz="1000" b="0">
+                <a:solidFill>
+                  <a:srgbClr val="4EC9B0"/>
+                </a:solidFill>
+                <a:effectLst/>
+                <a:latin typeface="Consolas" panose="020B0609020204030204" pitchFamily="49" charset="0"/>
+              </a:rPr>
+              <a:t>Entity</a:t>
+            </a:r>
+            <a:endParaRPr lang="en-US" altLang="ko-KR" sz="1000" b="0">
+              <a:solidFill>
+                <a:srgbClr val="BBBEBF"/>
+              </a:solidFill>
+              <a:effectLst/>
+              <a:latin typeface="Consolas" panose="020B0609020204030204" pitchFamily="49" charset="0"/>
+            </a:endParaRPr>
+          </a:p>
+          <a:p>
+            <a:pPr>
+              <a:lnSpc>
+                <a:spcPts val="1425"/>
+              </a:lnSpc>
+              <a:buNone/>
+            </a:pPr>
+            <a:r>
+              <a:rPr lang="en-US" altLang="ko-KR" sz="1000" b="0">
+                <a:solidFill>
+                  <a:srgbClr val="569CD6"/>
+                </a:solidFill>
+                <a:effectLst/>
+                <a:latin typeface="Consolas" panose="020B0609020204030204" pitchFamily="49" charset="0"/>
+              </a:rPr>
+              <a:t>public</a:t>
+            </a:r>
+            <a:r>
+              <a:rPr lang="en-US" altLang="ko-KR" sz="1000" b="0">
+                <a:solidFill>
+                  <a:srgbClr val="BBBEBF"/>
+                </a:solidFill>
+                <a:effectLst/>
+                <a:latin typeface="Consolas" panose="020B0609020204030204" pitchFamily="49" charset="0"/>
+              </a:rPr>
+              <a:t> </a:t>
+            </a:r>
+            <a:r>
+              <a:rPr lang="en-US" altLang="ko-KR" sz="1000" b="0">
+                <a:solidFill>
+                  <a:srgbClr val="569CD6"/>
+                </a:solidFill>
+                <a:effectLst/>
+                <a:latin typeface="Consolas" panose="020B0609020204030204" pitchFamily="49" charset="0"/>
+              </a:rPr>
+              <a:t>class</a:t>
+            </a:r>
+            <a:r>
+              <a:rPr lang="en-US" altLang="ko-KR" sz="1000" b="0">
+                <a:solidFill>
+                  <a:srgbClr val="BBBEBF"/>
+                </a:solidFill>
+                <a:effectLst/>
+                <a:latin typeface="Consolas" panose="020B0609020204030204" pitchFamily="49" charset="0"/>
+              </a:rPr>
+              <a:t> </a:t>
+            </a:r>
+            <a:r>
+              <a:rPr lang="en-US" altLang="ko-KR" sz="1000" b="0">
+                <a:solidFill>
+                  <a:srgbClr val="4EC9B0"/>
+                </a:solidFill>
+                <a:effectLst/>
+                <a:latin typeface="Consolas" panose="020B0609020204030204" pitchFamily="49" charset="0"/>
+              </a:rPr>
+              <a:t>Board</a:t>
+            </a:r>
+            <a:r>
+              <a:rPr lang="en-US" altLang="ko-KR" sz="1000" b="0">
+                <a:solidFill>
+                  <a:srgbClr val="BBBEBF"/>
+                </a:solidFill>
+                <a:effectLst/>
+                <a:latin typeface="Consolas" panose="020B0609020204030204" pitchFamily="49" charset="0"/>
+              </a:rPr>
+              <a:t> {</a:t>
+            </a:r>
+          </a:p>
+          <a:p>
+            <a:pPr>
+              <a:lnSpc>
+                <a:spcPts val="1425"/>
+              </a:lnSpc>
+              <a:buNone/>
+            </a:pPr>
+            <a:r>
+              <a:rPr lang="en-US" altLang="ko-KR" sz="1000" b="0">
+                <a:solidFill>
+                  <a:srgbClr val="BBBEBF"/>
+                </a:solidFill>
+                <a:effectLst/>
+                <a:latin typeface="Consolas" panose="020B0609020204030204" pitchFamily="49" charset="0"/>
+              </a:rPr>
+              <a:t>    @</a:t>
+            </a:r>
+            <a:r>
+              <a:rPr lang="en-US" altLang="ko-KR" sz="1000" b="0">
+                <a:solidFill>
+                  <a:srgbClr val="4EC9B0"/>
+                </a:solidFill>
+                <a:effectLst/>
+                <a:latin typeface="Consolas" panose="020B0609020204030204" pitchFamily="49" charset="0"/>
+              </a:rPr>
+              <a:t>Id</a:t>
+            </a:r>
+            <a:r>
+              <a:rPr lang="en-US" altLang="ko-KR" sz="1000">
+                <a:solidFill>
+                  <a:srgbClr val="BBBEBF"/>
+                </a:solidFill>
+                <a:latin typeface="Consolas" panose="020B0609020204030204" pitchFamily="49" charset="0"/>
+              </a:rPr>
+              <a:t> </a:t>
+            </a:r>
+            <a:r>
+              <a:rPr lang="en-US" altLang="ko-KR" sz="1000" b="0">
+                <a:solidFill>
+                  <a:srgbClr val="BBBEBF"/>
+                </a:solidFill>
+                <a:effectLst/>
+                <a:latin typeface="Consolas" panose="020B0609020204030204" pitchFamily="49" charset="0"/>
+              </a:rPr>
+              <a:t>@</a:t>
+            </a:r>
+            <a:r>
+              <a:rPr lang="en-US" altLang="ko-KR" sz="1000" b="0">
+                <a:solidFill>
+                  <a:srgbClr val="4EC9B0"/>
+                </a:solidFill>
+                <a:effectLst/>
+                <a:latin typeface="Consolas" panose="020B0609020204030204" pitchFamily="49" charset="0"/>
+              </a:rPr>
+              <a:t>GeneratedValue</a:t>
+            </a:r>
+            <a:r>
+              <a:rPr lang="en-US" altLang="ko-KR" sz="1000" b="0">
+                <a:solidFill>
+                  <a:srgbClr val="BBBEBF"/>
+                </a:solidFill>
+                <a:effectLst/>
+                <a:latin typeface="Consolas" panose="020B0609020204030204" pitchFamily="49" charset="0"/>
+              </a:rPr>
+              <a:t>(</a:t>
+            </a:r>
+            <a:r>
+              <a:rPr lang="en-US" altLang="ko-KR" sz="1000" b="0">
+                <a:solidFill>
+                  <a:srgbClr val="FFA657"/>
+                </a:solidFill>
+                <a:effectLst/>
+                <a:latin typeface="Consolas" panose="020B0609020204030204" pitchFamily="49" charset="0"/>
+              </a:rPr>
+              <a:t>strategy</a:t>
+            </a:r>
+            <a:r>
+              <a:rPr lang="en-US" altLang="ko-KR" sz="1000" b="0">
+                <a:solidFill>
+                  <a:srgbClr val="BBBEBF"/>
+                </a:solidFill>
+                <a:effectLst/>
+                <a:latin typeface="Consolas" panose="020B0609020204030204" pitchFamily="49" charset="0"/>
+              </a:rPr>
+              <a:t> </a:t>
+            </a:r>
+            <a:r>
+              <a:rPr lang="en-US" altLang="ko-KR" sz="1000" b="0">
+                <a:solidFill>
+                  <a:srgbClr val="D4D4D4"/>
+                </a:solidFill>
+                <a:effectLst/>
+                <a:latin typeface="Consolas" panose="020B0609020204030204" pitchFamily="49" charset="0"/>
+              </a:rPr>
+              <a:t>=</a:t>
+            </a:r>
+            <a:r>
+              <a:rPr lang="en-US" altLang="ko-KR" sz="1000" b="0">
+                <a:solidFill>
+                  <a:srgbClr val="BBBEBF"/>
+                </a:solidFill>
+                <a:effectLst/>
+                <a:latin typeface="Consolas" panose="020B0609020204030204" pitchFamily="49" charset="0"/>
+              </a:rPr>
+              <a:t> </a:t>
+            </a:r>
+            <a:r>
+              <a:rPr lang="en-US" altLang="ko-KR" sz="1000" b="0">
+                <a:solidFill>
+                  <a:srgbClr val="4EC9B0"/>
+                </a:solidFill>
+                <a:effectLst/>
+                <a:latin typeface="Consolas" panose="020B0609020204030204" pitchFamily="49" charset="0"/>
+              </a:rPr>
+              <a:t>GenerationType</a:t>
+            </a:r>
+            <a:r>
+              <a:rPr lang="en-US" altLang="ko-KR" sz="1000" b="0">
+                <a:solidFill>
+                  <a:srgbClr val="BBBEBF"/>
+                </a:solidFill>
+                <a:effectLst/>
+                <a:latin typeface="Consolas" panose="020B0609020204030204" pitchFamily="49" charset="0"/>
+              </a:rPr>
+              <a:t>.</a:t>
+            </a:r>
+            <a:r>
+              <a:rPr lang="en-US" altLang="ko-KR" sz="1000" b="0">
+                <a:solidFill>
+                  <a:srgbClr val="79C0FF"/>
+                </a:solidFill>
+                <a:effectLst/>
+                <a:latin typeface="Consolas" panose="020B0609020204030204" pitchFamily="49" charset="0"/>
+              </a:rPr>
+              <a:t>IDENTITY</a:t>
+            </a:r>
+            <a:r>
+              <a:rPr lang="en-US" altLang="ko-KR" sz="1000" b="0">
+                <a:solidFill>
+                  <a:srgbClr val="BBBEBF"/>
+                </a:solidFill>
+                <a:effectLst/>
+                <a:latin typeface="Consolas" panose="020B0609020204030204" pitchFamily="49" charset="0"/>
+              </a:rPr>
+              <a:t>)</a:t>
+            </a:r>
+          </a:p>
+          <a:p>
+            <a:pPr>
+              <a:lnSpc>
+                <a:spcPts val="1425"/>
+              </a:lnSpc>
+              <a:buNone/>
+            </a:pPr>
+            <a:r>
+              <a:rPr lang="en-US" altLang="ko-KR" sz="1000" b="0">
+                <a:solidFill>
+                  <a:srgbClr val="BBBEBF"/>
+                </a:solidFill>
+                <a:effectLst/>
+                <a:latin typeface="Consolas" panose="020B0609020204030204" pitchFamily="49" charset="0"/>
+              </a:rPr>
+              <a:t>    </a:t>
+            </a:r>
+            <a:r>
+              <a:rPr lang="en-US" altLang="ko-KR" sz="1000" b="0">
+                <a:solidFill>
+                  <a:srgbClr val="569CD6"/>
+                </a:solidFill>
+                <a:effectLst/>
+                <a:latin typeface="Consolas" panose="020B0609020204030204" pitchFamily="49" charset="0"/>
+              </a:rPr>
+              <a:t>private</a:t>
+            </a:r>
+            <a:r>
+              <a:rPr lang="en-US" altLang="ko-KR" sz="1000" b="0">
+                <a:solidFill>
+                  <a:srgbClr val="BBBEBF"/>
+                </a:solidFill>
+                <a:effectLst/>
+                <a:latin typeface="Consolas" panose="020B0609020204030204" pitchFamily="49" charset="0"/>
+              </a:rPr>
+              <a:t> </a:t>
+            </a:r>
+            <a:r>
+              <a:rPr lang="en-US" altLang="ko-KR" sz="1000" b="0">
+                <a:solidFill>
+                  <a:srgbClr val="4EC9B0"/>
+                </a:solidFill>
+                <a:effectLst/>
+                <a:latin typeface="Consolas" panose="020B0609020204030204" pitchFamily="49" charset="0"/>
+              </a:rPr>
+              <a:t>Long</a:t>
+            </a:r>
+            <a:r>
+              <a:rPr lang="en-US" altLang="ko-KR" sz="1000" b="0">
+                <a:solidFill>
+                  <a:srgbClr val="FFA657"/>
+                </a:solidFill>
+                <a:effectLst/>
+                <a:latin typeface="Consolas" panose="020B0609020204030204" pitchFamily="49" charset="0"/>
+              </a:rPr>
+              <a:t> </a:t>
+            </a:r>
+            <a:r>
+              <a:rPr lang="en-US" altLang="ko-KR" sz="1000" b="0">
+                <a:solidFill>
+                  <a:srgbClr val="C9D1D9"/>
+                </a:solidFill>
+                <a:effectLst/>
+                <a:latin typeface="Consolas" panose="020B0609020204030204" pitchFamily="49" charset="0"/>
+              </a:rPr>
+              <a:t>boardId</a:t>
+            </a:r>
+            <a:r>
+              <a:rPr lang="en-US" altLang="ko-KR" sz="1000" b="0">
+                <a:solidFill>
+                  <a:srgbClr val="BBBEBF"/>
+                </a:solidFill>
+                <a:effectLst/>
+                <a:latin typeface="Consolas" panose="020B0609020204030204" pitchFamily="49" charset="0"/>
+              </a:rPr>
+              <a:t>;</a:t>
+            </a:r>
+          </a:p>
+          <a:p>
+            <a:pPr>
+              <a:lnSpc>
+                <a:spcPts val="1425"/>
+              </a:lnSpc>
+              <a:buNone/>
+            </a:pPr>
+            <a:r>
+              <a:rPr lang="en-US" altLang="ko-KR" sz="1000" b="0">
+                <a:solidFill>
+                  <a:srgbClr val="BBBEBF"/>
+                </a:solidFill>
+                <a:effectLst/>
+                <a:latin typeface="Consolas" panose="020B0609020204030204" pitchFamily="49" charset="0"/>
+              </a:rPr>
+              <a:t>    </a:t>
+            </a:r>
+            <a:r>
+              <a:rPr lang="en-US" altLang="ko-KR" sz="1000" b="0">
+                <a:solidFill>
+                  <a:srgbClr val="569CD6"/>
+                </a:solidFill>
+                <a:effectLst/>
+                <a:latin typeface="Consolas" panose="020B0609020204030204" pitchFamily="49" charset="0"/>
+              </a:rPr>
+              <a:t>private</a:t>
+            </a:r>
+            <a:r>
+              <a:rPr lang="en-US" altLang="ko-KR" sz="1000" b="0">
+                <a:solidFill>
+                  <a:srgbClr val="BBBEBF"/>
+                </a:solidFill>
+                <a:effectLst/>
+                <a:latin typeface="Consolas" panose="020B0609020204030204" pitchFamily="49" charset="0"/>
+              </a:rPr>
+              <a:t> </a:t>
+            </a:r>
+            <a:r>
+              <a:rPr lang="en-US" altLang="ko-KR" sz="1000" b="0">
+                <a:solidFill>
+                  <a:srgbClr val="4EC9B0"/>
+                </a:solidFill>
+                <a:effectLst/>
+                <a:latin typeface="Consolas" panose="020B0609020204030204" pitchFamily="49" charset="0"/>
+              </a:rPr>
+              <a:t>String</a:t>
+            </a:r>
+            <a:r>
+              <a:rPr lang="en-US" altLang="ko-KR" sz="1000" b="0">
+                <a:solidFill>
+                  <a:srgbClr val="FFA657"/>
+                </a:solidFill>
+                <a:effectLst/>
+                <a:latin typeface="Consolas" panose="020B0609020204030204" pitchFamily="49" charset="0"/>
+              </a:rPr>
+              <a:t> </a:t>
+            </a:r>
+            <a:r>
+              <a:rPr lang="en-US" altLang="ko-KR" sz="1000" b="0">
+                <a:solidFill>
+                  <a:srgbClr val="C9D1D9"/>
+                </a:solidFill>
+                <a:effectLst/>
+                <a:latin typeface="Consolas" panose="020B0609020204030204" pitchFamily="49" charset="0"/>
+              </a:rPr>
+              <a:t>title</a:t>
+            </a:r>
+            <a:r>
+              <a:rPr lang="en-US" altLang="ko-KR" sz="1000" b="0">
+                <a:solidFill>
+                  <a:srgbClr val="BBBEBF"/>
+                </a:solidFill>
+                <a:effectLst/>
+                <a:latin typeface="Consolas" panose="020B0609020204030204" pitchFamily="49" charset="0"/>
+              </a:rPr>
+              <a:t>;</a:t>
+            </a:r>
+          </a:p>
+          <a:p>
+            <a:pPr>
+              <a:lnSpc>
+                <a:spcPts val="1425"/>
+              </a:lnSpc>
+              <a:buNone/>
+            </a:pPr>
+            <a:r>
+              <a:rPr lang="en-US" altLang="ko-KR" sz="1000" b="0">
+                <a:solidFill>
+                  <a:srgbClr val="BBBEBF"/>
+                </a:solidFill>
+                <a:effectLst/>
+                <a:latin typeface="Consolas" panose="020B0609020204030204" pitchFamily="49" charset="0"/>
+              </a:rPr>
+              <a:t>    </a:t>
+            </a:r>
+            <a:r>
+              <a:rPr lang="en-US" altLang="ko-KR" sz="1000" b="0">
+                <a:solidFill>
+                  <a:srgbClr val="569CD6"/>
+                </a:solidFill>
+                <a:effectLst/>
+                <a:latin typeface="Consolas" panose="020B0609020204030204" pitchFamily="49" charset="0"/>
+              </a:rPr>
+              <a:t>private</a:t>
+            </a:r>
+            <a:r>
+              <a:rPr lang="en-US" altLang="ko-KR" sz="1000" b="0">
+                <a:solidFill>
+                  <a:srgbClr val="BBBEBF"/>
+                </a:solidFill>
+                <a:effectLst/>
+                <a:latin typeface="Consolas" panose="020B0609020204030204" pitchFamily="49" charset="0"/>
+              </a:rPr>
+              <a:t> </a:t>
+            </a:r>
+            <a:r>
+              <a:rPr lang="en-US" altLang="ko-KR" sz="1000" b="0">
+                <a:solidFill>
+                  <a:srgbClr val="4EC9B0"/>
+                </a:solidFill>
+                <a:effectLst/>
+                <a:latin typeface="Consolas" panose="020B0609020204030204" pitchFamily="49" charset="0"/>
+              </a:rPr>
+              <a:t>String</a:t>
+            </a:r>
+            <a:r>
+              <a:rPr lang="en-US" altLang="ko-KR" sz="1000" b="0">
+                <a:solidFill>
+                  <a:srgbClr val="FFA657"/>
+                </a:solidFill>
+                <a:effectLst/>
+                <a:latin typeface="Consolas" panose="020B0609020204030204" pitchFamily="49" charset="0"/>
+              </a:rPr>
+              <a:t> </a:t>
+            </a:r>
+            <a:r>
+              <a:rPr lang="en-US" altLang="ko-KR" sz="1000" b="0">
+                <a:solidFill>
+                  <a:srgbClr val="C9D1D9"/>
+                </a:solidFill>
+                <a:effectLst/>
+                <a:latin typeface="Consolas" panose="020B0609020204030204" pitchFamily="49" charset="0"/>
+              </a:rPr>
+              <a:t>content</a:t>
+            </a:r>
+            <a:r>
+              <a:rPr lang="en-US" altLang="ko-KR" sz="1000" b="0">
+                <a:solidFill>
+                  <a:srgbClr val="BBBEBF"/>
+                </a:solidFill>
+                <a:effectLst/>
+                <a:latin typeface="Consolas" panose="020B0609020204030204" pitchFamily="49" charset="0"/>
+              </a:rPr>
+              <a:t>;</a:t>
+            </a:r>
+          </a:p>
+          <a:p>
+            <a:pPr>
+              <a:lnSpc>
+                <a:spcPts val="1425"/>
+              </a:lnSpc>
+              <a:buNone/>
+            </a:pPr>
+            <a:r>
+              <a:rPr lang="en-US" altLang="ko-KR" sz="1000" b="0">
+                <a:solidFill>
+                  <a:srgbClr val="BBBEBF"/>
+                </a:solidFill>
+                <a:effectLst/>
+                <a:latin typeface="Consolas" panose="020B0609020204030204" pitchFamily="49" charset="0"/>
+              </a:rPr>
+              <a:t>    </a:t>
+            </a:r>
+            <a:r>
+              <a:rPr lang="en-US" altLang="ko-KR" sz="1000" b="0">
+                <a:solidFill>
+                  <a:srgbClr val="569CD6"/>
+                </a:solidFill>
+                <a:effectLst/>
+                <a:latin typeface="Consolas" panose="020B0609020204030204" pitchFamily="49" charset="0"/>
+              </a:rPr>
+              <a:t>private</a:t>
+            </a:r>
+            <a:r>
+              <a:rPr lang="en-US" altLang="ko-KR" sz="1000" b="0">
+                <a:solidFill>
+                  <a:srgbClr val="BBBEBF"/>
+                </a:solidFill>
+                <a:effectLst/>
+                <a:latin typeface="Consolas" panose="020B0609020204030204" pitchFamily="49" charset="0"/>
+              </a:rPr>
+              <a:t> </a:t>
+            </a:r>
+            <a:r>
+              <a:rPr lang="en-US" altLang="ko-KR" sz="1000" b="0">
+                <a:solidFill>
+                  <a:srgbClr val="4EC9B0"/>
+                </a:solidFill>
+                <a:effectLst/>
+                <a:latin typeface="Consolas" panose="020B0609020204030204" pitchFamily="49" charset="0"/>
+              </a:rPr>
+              <a:t>Long</a:t>
+            </a:r>
+            <a:r>
+              <a:rPr lang="en-US" altLang="ko-KR" sz="1000" b="0">
+                <a:solidFill>
+                  <a:srgbClr val="FFA657"/>
+                </a:solidFill>
+                <a:effectLst/>
+                <a:latin typeface="Consolas" panose="020B0609020204030204" pitchFamily="49" charset="0"/>
+              </a:rPr>
+              <a:t> </a:t>
+            </a:r>
+            <a:r>
+              <a:rPr lang="en-US" altLang="ko-KR" sz="1000" b="0">
+                <a:solidFill>
+                  <a:srgbClr val="C9D1D9"/>
+                </a:solidFill>
+                <a:effectLst/>
+                <a:latin typeface="Consolas" panose="020B0609020204030204" pitchFamily="49" charset="0"/>
+              </a:rPr>
+              <a:t>userId</a:t>
+            </a:r>
+            <a:r>
+              <a:rPr lang="en-US" altLang="ko-KR" sz="1000" b="0">
+                <a:solidFill>
+                  <a:srgbClr val="BBBEBF"/>
+                </a:solidFill>
+                <a:effectLst/>
+                <a:latin typeface="Consolas" panose="020B0609020204030204" pitchFamily="49" charset="0"/>
+              </a:rPr>
+              <a:t>; </a:t>
+            </a:r>
+            <a:r>
+              <a:rPr lang="en-US" altLang="ko-KR" sz="1000" b="0">
+                <a:solidFill>
+                  <a:srgbClr val="8B949E"/>
+                </a:solidFill>
+                <a:effectLst/>
+                <a:latin typeface="Consolas" panose="020B0609020204030204" pitchFamily="49" charset="0"/>
+              </a:rPr>
+              <a:t>// MSA </a:t>
+            </a:r>
+            <a:r>
+              <a:rPr lang="ko-KR" altLang="en-US" sz="1000" b="0">
+                <a:solidFill>
+                  <a:srgbClr val="8B949E"/>
+                </a:solidFill>
+                <a:effectLst/>
+                <a:latin typeface="Consolas" panose="020B0609020204030204" pitchFamily="49" charset="0"/>
+              </a:rPr>
+              <a:t>환경에서는 </a:t>
+            </a:r>
+            <a:r>
+              <a:rPr lang="en-US" altLang="ko-KR" sz="1000" b="0">
+                <a:solidFill>
+                  <a:srgbClr val="8B949E"/>
+                </a:solidFill>
+                <a:effectLst/>
+                <a:latin typeface="Consolas" panose="020B0609020204030204" pitchFamily="49" charset="0"/>
+              </a:rPr>
+              <a:t>FK</a:t>
+            </a:r>
+            <a:r>
+              <a:rPr lang="ko-KR" altLang="en-US" sz="1000" b="0">
+                <a:solidFill>
+                  <a:srgbClr val="8B949E"/>
+                </a:solidFill>
+                <a:effectLst/>
+                <a:latin typeface="Consolas" panose="020B0609020204030204" pitchFamily="49" charset="0"/>
+              </a:rPr>
+              <a:t>를 걸수가 없음</a:t>
+            </a:r>
+            <a:r>
+              <a:rPr lang="en-US" altLang="ko-KR" sz="1000" b="0">
+                <a:solidFill>
+                  <a:srgbClr val="8B949E"/>
+                </a:solidFill>
+                <a:effectLst/>
+                <a:latin typeface="Consolas" panose="020B0609020204030204" pitchFamily="49" charset="0"/>
+              </a:rPr>
+              <a:t>.</a:t>
+            </a:r>
+            <a:endParaRPr lang="ko-KR" altLang="en-US" sz="1000" b="0">
+              <a:solidFill>
+                <a:srgbClr val="BBBEBF"/>
+              </a:solidFill>
+              <a:effectLst/>
+              <a:latin typeface="Consolas" panose="020B0609020204030204" pitchFamily="49" charset="0"/>
+            </a:endParaRPr>
+          </a:p>
+          <a:p>
+            <a:pPr>
+              <a:lnSpc>
+                <a:spcPts val="1425"/>
+              </a:lnSpc>
+              <a:buNone/>
+            </a:pPr>
+            <a:r>
+              <a:rPr lang="ko-KR" altLang="en-US" sz="1000" b="0">
+                <a:solidFill>
+                  <a:srgbClr val="BBBEBF"/>
+                </a:solidFill>
+                <a:effectLst/>
+                <a:latin typeface="Consolas" panose="020B0609020204030204" pitchFamily="49" charset="0"/>
+              </a:rPr>
+              <a:t>    </a:t>
+            </a:r>
+            <a:endParaRPr lang="en-US" altLang="ko-KR" sz="1000" b="0">
+              <a:solidFill>
+                <a:srgbClr val="BBBEBF"/>
+              </a:solidFill>
+              <a:effectLst/>
+              <a:latin typeface="Consolas" panose="020B0609020204030204" pitchFamily="49" charset="0"/>
+            </a:endParaRPr>
+          </a:p>
+          <a:p>
+            <a:pPr>
+              <a:lnSpc>
+                <a:spcPts val="1425"/>
+              </a:lnSpc>
+              <a:buNone/>
+            </a:pPr>
+            <a:r>
+              <a:rPr lang="en-US" altLang="ko-KR" sz="1000" b="0">
+                <a:solidFill>
+                  <a:srgbClr val="BBBEBF"/>
+                </a:solidFill>
+                <a:effectLst/>
+                <a:latin typeface="Consolas" panose="020B0609020204030204" pitchFamily="49" charset="0"/>
+              </a:rPr>
+              <a:t>    </a:t>
+            </a:r>
+            <a:r>
+              <a:rPr lang="en-US" altLang="ko-KR" sz="1000" b="0">
+                <a:solidFill>
+                  <a:srgbClr val="569CD6"/>
+                </a:solidFill>
+                <a:effectLst/>
+                <a:latin typeface="Consolas" panose="020B0609020204030204" pitchFamily="49" charset="0"/>
+              </a:rPr>
+              <a:t>public</a:t>
+            </a:r>
+            <a:r>
+              <a:rPr lang="en-US" altLang="ko-KR" sz="1000" b="0">
+                <a:solidFill>
+                  <a:srgbClr val="BBBEBF"/>
+                </a:solidFill>
+                <a:effectLst/>
+                <a:latin typeface="Consolas" panose="020B0609020204030204" pitchFamily="49" charset="0"/>
+              </a:rPr>
+              <a:t> </a:t>
+            </a:r>
+            <a:r>
+              <a:rPr lang="en-US" altLang="ko-KR" sz="1000" b="0">
+                <a:solidFill>
+                  <a:srgbClr val="D2A8FF"/>
+                </a:solidFill>
+                <a:effectLst/>
+                <a:latin typeface="Consolas" panose="020B0609020204030204" pitchFamily="49" charset="0"/>
+              </a:rPr>
+              <a:t>Board</a:t>
+            </a:r>
+            <a:r>
+              <a:rPr lang="en-US" altLang="ko-KR" sz="1000" b="0">
+                <a:solidFill>
+                  <a:srgbClr val="BBBEBF"/>
+                </a:solidFill>
+                <a:effectLst/>
+                <a:latin typeface="Consolas" panose="020B0609020204030204" pitchFamily="49" charset="0"/>
+              </a:rPr>
+              <a:t>() {}</a:t>
+            </a:r>
+          </a:p>
+          <a:p>
+            <a:pPr>
+              <a:lnSpc>
+                <a:spcPts val="1425"/>
+              </a:lnSpc>
+              <a:buNone/>
+            </a:pPr>
+            <a:r>
+              <a:rPr lang="en-US" altLang="ko-KR" sz="1000" b="0">
+                <a:solidFill>
+                  <a:srgbClr val="BBBEBF"/>
+                </a:solidFill>
+                <a:effectLst/>
+                <a:latin typeface="Consolas" panose="020B0609020204030204" pitchFamily="49" charset="0"/>
+              </a:rPr>
+              <a:t>    </a:t>
+            </a:r>
+            <a:r>
+              <a:rPr lang="en-US" altLang="ko-KR" sz="1000" b="0">
+                <a:solidFill>
+                  <a:srgbClr val="569CD6"/>
+                </a:solidFill>
+                <a:effectLst/>
+                <a:latin typeface="Consolas" panose="020B0609020204030204" pitchFamily="49" charset="0"/>
+              </a:rPr>
+              <a:t>public</a:t>
+            </a:r>
+            <a:r>
+              <a:rPr lang="en-US" altLang="ko-KR" sz="1000" b="0">
+                <a:solidFill>
+                  <a:srgbClr val="BBBEBF"/>
+                </a:solidFill>
+                <a:effectLst/>
+                <a:latin typeface="Consolas" panose="020B0609020204030204" pitchFamily="49" charset="0"/>
+              </a:rPr>
+              <a:t> </a:t>
+            </a:r>
+            <a:r>
+              <a:rPr lang="en-US" altLang="ko-KR" sz="1000" b="0">
+                <a:solidFill>
+                  <a:srgbClr val="D2A8FF"/>
+                </a:solidFill>
+                <a:effectLst/>
+                <a:latin typeface="Consolas" panose="020B0609020204030204" pitchFamily="49" charset="0"/>
+              </a:rPr>
+              <a:t>Board</a:t>
+            </a:r>
+            <a:r>
+              <a:rPr lang="en-US" altLang="ko-KR" sz="1000" b="0">
+                <a:solidFill>
+                  <a:srgbClr val="BBBEBF"/>
+                </a:solidFill>
+                <a:effectLst/>
+                <a:latin typeface="Consolas" panose="020B0609020204030204" pitchFamily="49" charset="0"/>
+              </a:rPr>
+              <a:t>(</a:t>
+            </a:r>
+            <a:r>
+              <a:rPr lang="en-US" altLang="ko-KR" sz="1000" b="0">
+                <a:solidFill>
+                  <a:srgbClr val="4EC9B0"/>
+                </a:solidFill>
+                <a:effectLst/>
+                <a:latin typeface="Consolas" panose="020B0609020204030204" pitchFamily="49" charset="0"/>
+              </a:rPr>
+              <a:t>String</a:t>
+            </a:r>
+            <a:r>
+              <a:rPr lang="en-US" altLang="ko-KR" sz="1000" b="0">
+                <a:solidFill>
+                  <a:srgbClr val="BBBEBF"/>
+                </a:solidFill>
+                <a:effectLst/>
+                <a:latin typeface="Consolas" panose="020B0609020204030204" pitchFamily="49" charset="0"/>
+              </a:rPr>
+              <a:t> </a:t>
+            </a:r>
+            <a:r>
+              <a:rPr lang="en-US" altLang="ko-KR" sz="1000" b="0">
+                <a:solidFill>
+                  <a:srgbClr val="FFA657"/>
+                </a:solidFill>
+                <a:effectLst/>
+                <a:latin typeface="Consolas" panose="020B0609020204030204" pitchFamily="49" charset="0"/>
+              </a:rPr>
+              <a:t>title</a:t>
+            </a:r>
+            <a:r>
+              <a:rPr lang="en-US" altLang="ko-KR" sz="1000" b="0">
+                <a:solidFill>
+                  <a:srgbClr val="BBBEBF"/>
+                </a:solidFill>
+                <a:effectLst/>
+                <a:latin typeface="Consolas" panose="020B0609020204030204" pitchFamily="49" charset="0"/>
+              </a:rPr>
+              <a:t>, </a:t>
+            </a:r>
+            <a:r>
+              <a:rPr lang="en-US" altLang="ko-KR" sz="1000" b="0">
+                <a:solidFill>
+                  <a:srgbClr val="4EC9B0"/>
+                </a:solidFill>
+                <a:effectLst/>
+                <a:latin typeface="Consolas" panose="020B0609020204030204" pitchFamily="49" charset="0"/>
+              </a:rPr>
+              <a:t>String</a:t>
+            </a:r>
+            <a:r>
+              <a:rPr lang="en-US" altLang="ko-KR" sz="1000" b="0">
+                <a:solidFill>
+                  <a:srgbClr val="BBBEBF"/>
+                </a:solidFill>
+                <a:effectLst/>
+                <a:latin typeface="Consolas" panose="020B0609020204030204" pitchFamily="49" charset="0"/>
+              </a:rPr>
+              <a:t> </a:t>
+            </a:r>
+            <a:r>
+              <a:rPr lang="en-US" altLang="ko-KR" sz="1000" b="0">
+                <a:solidFill>
+                  <a:srgbClr val="FFA657"/>
+                </a:solidFill>
+                <a:effectLst/>
+                <a:latin typeface="Consolas" panose="020B0609020204030204" pitchFamily="49" charset="0"/>
+              </a:rPr>
+              <a:t>content</a:t>
+            </a:r>
+            <a:r>
+              <a:rPr lang="en-US" altLang="ko-KR" sz="1000" b="0">
+                <a:solidFill>
+                  <a:srgbClr val="BBBEBF"/>
+                </a:solidFill>
+                <a:effectLst/>
+                <a:latin typeface="Consolas" panose="020B0609020204030204" pitchFamily="49" charset="0"/>
+              </a:rPr>
+              <a:t>, </a:t>
+            </a:r>
+            <a:r>
+              <a:rPr lang="en-US" altLang="ko-KR" sz="1000" b="0">
+                <a:solidFill>
+                  <a:srgbClr val="4EC9B0"/>
+                </a:solidFill>
+                <a:effectLst/>
+                <a:latin typeface="Consolas" panose="020B0609020204030204" pitchFamily="49" charset="0"/>
+              </a:rPr>
+              <a:t>Long</a:t>
+            </a:r>
+            <a:r>
+              <a:rPr lang="en-US" altLang="ko-KR" sz="1000" b="0">
+                <a:solidFill>
+                  <a:srgbClr val="BBBEBF"/>
+                </a:solidFill>
+                <a:effectLst/>
+                <a:latin typeface="Consolas" panose="020B0609020204030204" pitchFamily="49" charset="0"/>
+              </a:rPr>
+              <a:t> </a:t>
+            </a:r>
+            <a:r>
+              <a:rPr lang="en-US" altLang="ko-KR" sz="1000" b="0">
+                <a:solidFill>
+                  <a:srgbClr val="FFA657"/>
+                </a:solidFill>
+                <a:effectLst/>
+                <a:latin typeface="Consolas" panose="020B0609020204030204" pitchFamily="49" charset="0"/>
+              </a:rPr>
+              <a:t>userId</a:t>
+            </a:r>
+            <a:r>
+              <a:rPr lang="en-US" altLang="ko-KR" sz="1000" b="0">
+                <a:solidFill>
+                  <a:srgbClr val="BBBEBF"/>
+                </a:solidFill>
+                <a:effectLst/>
+                <a:latin typeface="Consolas" panose="020B0609020204030204" pitchFamily="49" charset="0"/>
+              </a:rPr>
+              <a:t>) {</a:t>
+            </a:r>
+          </a:p>
+          <a:p>
+            <a:pPr>
+              <a:lnSpc>
+                <a:spcPts val="1425"/>
+              </a:lnSpc>
+              <a:buNone/>
+            </a:pPr>
+            <a:r>
+              <a:rPr lang="en-US" altLang="ko-KR" sz="1000" b="0">
+                <a:solidFill>
+                  <a:srgbClr val="BBBEBF"/>
+                </a:solidFill>
+                <a:effectLst/>
+                <a:latin typeface="Consolas" panose="020B0609020204030204" pitchFamily="49" charset="0"/>
+              </a:rPr>
+              <a:t>        </a:t>
+            </a:r>
+            <a:r>
+              <a:rPr lang="en-US" altLang="ko-KR" sz="1000" b="0">
+                <a:solidFill>
+                  <a:srgbClr val="79C0FF"/>
+                </a:solidFill>
+                <a:effectLst/>
+                <a:latin typeface="Consolas" panose="020B0609020204030204" pitchFamily="49" charset="0"/>
+              </a:rPr>
+              <a:t>this</a:t>
+            </a:r>
+            <a:r>
+              <a:rPr lang="en-US" altLang="ko-KR" sz="1000" b="0">
+                <a:solidFill>
+                  <a:srgbClr val="BBBEBF"/>
+                </a:solidFill>
+                <a:effectLst/>
+                <a:latin typeface="Consolas" panose="020B0609020204030204" pitchFamily="49" charset="0"/>
+              </a:rPr>
+              <a:t>.</a:t>
+            </a:r>
+            <a:r>
+              <a:rPr lang="en-US" altLang="ko-KR" sz="1000" b="0">
+                <a:solidFill>
+                  <a:srgbClr val="C9D1D9"/>
+                </a:solidFill>
+                <a:effectLst/>
+                <a:latin typeface="Consolas" panose="020B0609020204030204" pitchFamily="49" charset="0"/>
+              </a:rPr>
+              <a:t>title</a:t>
+            </a:r>
+            <a:r>
+              <a:rPr lang="en-US" altLang="ko-KR" sz="1000" b="0">
+                <a:solidFill>
+                  <a:srgbClr val="BBBEBF"/>
+                </a:solidFill>
+                <a:effectLst/>
+                <a:latin typeface="Consolas" panose="020B0609020204030204" pitchFamily="49" charset="0"/>
+              </a:rPr>
+              <a:t> </a:t>
+            </a:r>
+            <a:r>
+              <a:rPr lang="en-US" altLang="ko-KR" sz="1000" b="0">
+                <a:solidFill>
+                  <a:srgbClr val="D4D4D4"/>
+                </a:solidFill>
+                <a:effectLst/>
+                <a:latin typeface="Consolas" panose="020B0609020204030204" pitchFamily="49" charset="0"/>
+              </a:rPr>
+              <a:t>=</a:t>
+            </a:r>
+            <a:r>
+              <a:rPr lang="en-US" altLang="ko-KR" sz="1000" b="0">
+                <a:solidFill>
+                  <a:srgbClr val="BBBEBF"/>
+                </a:solidFill>
+                <a:effectLst/>
+                <a:latin typeface="Consolas" panose="020B0609020204030204" pitchFamily="49" charset="0"/>
+              </a:rPr>
+              <a:t> </a:t>
+            </a:r>
+            <a:r>
+              <a:rPr lang="en-US" altLang="ko-KR" sz="1000" b="0">
+                <a:solidFill>
+                  <a:srgbClr val="FFA657"/>
+                </a:solidFill>
+                <a:effectLst/>
+                <a:latin typeface="Consolas" panose="020B0609020204030204" pitchFamily="49" charset="0"/>
+              </a:rPr>
+              <a:t>title</a:t>
+            </a:r>
+            <a:r>
+              <a:rPr lang="en-US" altLang="ko-KR" sz="1000" b="0">
+                <a:solidFill>
+                  <a:srgbClr val="BBBEBF"/>
+                </a:solidFill>
+                <a:effectLst/>
+                <a:latin typeface="Consolas" panose="020B0609020204030204" pitchFamily="49" charset="0"/>
+              </a:rPr>
+              <a:t>;</a:t>
+            </a:r>
+          </a:p>
+          <a:p>
+            <a:pPr>
+              <a:lnSpc>
+                <a:spcPts val="1425"/>
+              </a:lnSpc>
+              <a:buNone/>
+            </a:pPr>
+            <a:r>
+              <a:rPr lang="en-US" altLang="ko-KR" sz="1000" b="0">
+                <a:solidFill>
+                  <a:srgbClr val="BBBEBF"/>
+                </a:solidFill>
+                <a:effectLst/>
+                <a:latin typeface="Consolas" panose="020B0609020204030204" pitchFamily="49" charset="0"/>
+              </a:rPr>
+              <a:t>        </a:t>
+            </a:r>
+            <a:r>
+              <a:rPr lang="en-US" altLang="ko-KR" sz="1000" b="0">
+                <a:solidFill>
+                  <a:srgbClr val="79C0FF"/>
+                </a:solidFill>
+                <a:effectLst/>
+                <a:latin typeface="Consolas" panose="020B0609020204030204" pitchFamily="49" charset="0"/>
+              </a:rPr>
+              <a:t>this</a:t>
+            </a:r>
+            <a:r>
+              <a:rPr lang="en-US" altLang="ko-KR" sz="1000" b="0">
+                <a:solidFill>
+                  <a:srgbClr val="BBBEBF"/>
+                </a:solidFill>
+                <a:effectLst/>
+                <a:latin typeface="Consolas" panose="020B0609020204030204" pitchFamily="49" charset="0"/>
+              </a:rPr>
+              <a:t>.</a:t>
+            </a:r>
+            <a:r>
+              <a:rPr lang="en-US" altLang="ko-KR" sz="1000" b="0">
+                <a:solidFill>
+                  <a:srgbClr val="C9D1D9"/>
+                </a:solidFill>
+                <a:effectLst/>
+                <a:latin typeface="Consolas" panose="020B0609020204030204" pitchFamily="49" charset="0"/>
+              </a:rPr>
+              <a:t>content</a:t>
+            </a:r>
+            <a:r>
+              <a:rPr lang="en-US" altLang="ko-KR" sz="1000" b="0">
+                <a:solidFill>
+                  <a:srgbClr val="BBBEBF"/>
+                </a:solidFill>
+                <a:effectLst/>
+                <a:latin typeface="Consolas" panose="020B0609020204030204" pitchFamily="49" charset="0"/>
+              </a:rPr>
+              <a:t> </a:t>
+            </a:r>
+            <a:r>
+              <a:rPr lang="en-US" altLang="ko-KR" sz="1000" b="0">
+                <a:solidFill>
+                  <a:srgbClr val="D4D4D4"/>
+                </a:solidFill>
+                <a:effectLst/>
+                <a:latin typeface="Consolas" panose="020B0609020204030204" pitchFamily="49" charset="0"/>
+              </a:rPr>
+              <a:t>=</a:t>
+            </a:r>
+            <a:r>
+              <a:rPr lang="en-US" altLang="ko-KR" sz="1000" b="0">
+                <a:solidFill>
+                  <a:srgbClr val="BBBEBF"/>
+                </a:solidFill>
+                <a:effectLst/>
+                <a:latin typeface="Consolas" panose="020B0609020204030204" pitchFamily="49" charset="0"/>
+              </a:rPr>
+              <a:t> </a:t>
+            </a:r>
+            <a:r>
+              <a:rPr lang="en-US" altLang="ko-KR" sz="1000" b="0">
+                <a:solidFill>
+                  <a:srgbClr val="FFA657"/>
+                </a:solidFill>
+                <a:effectLst/>
+                <a:latin typeface="Consolas" panose="020B0609020204030204" pitchFamily="49" charset="0"/>
+              </a:rPr>
+              <a:t>content</a:t>
+            </a:r>
+            <a:r>
+              <a:rPr lang="en-US" altLang="ko-KR" sz="1000" b="0">
+                <a:solidFill>
+                  <a:srgbClr val="BBBEBF"/>
+                </a:solidFill>
+                <a:effectLst/>
+                <a:latin typeface="Consolas" panose="020B0609020204030204" pitchFamily="49" charset="0"/>
+              </a:rPr>
+              <a:t>;</a:t>
+            </a:r>
+          </a:p>
+          <a:p>
+            <a:pPr>
+              <a:lnSpc>
+                <a:spcPts val="1425"/>
+              </a:lnSpc>
+              <a:buNone/>
+            </a:pPr>
+            <a:r>
+              <a:rPr lang="en-US" altLang="ko-KR" sz="1000" b="0">
+                <a:solidFill>
+                  <a:srgbClr val="BBBEBF"/>
+                </a:solidFill>
+                <a:effectLst/>
+                <a:latin typeface="Consolas" panose="020B0609020204030204" pitchFamily="49" charset="0"/>
+              </a:rPr>
+              <a:t>        </a:t>
+            </a:r>
+            <a:r>
+              <a:rPr lang="en-US" altLang="ko-KR" sz="1000" b="0">
+                <a:solidFill>
+                  <a:srgbClr val="79C0FF"/>
+                </a:solidFill>
+                <a:effectLst/>
+                <a:latin typeface="Consolas" panose="020B0609020204030204" pitchFamily="49" charset="0"/>
+              </a:rPr>
+              <a:t>this</a:t>
+            </a:r>
+            <a:r>
+              <a:rPr lang="en-US" altLang="ko-KR" sz="1000" b="0">
+                <a:solidFill>
+                  <a:srgbClr val="BBBEBF"/>
+                </a:solidFill>
+                <a:effectLst/>
+                <a:latin typeface="Consolas" panose="020B0609020204030204" pitchFamily="49" charset="0"/>
+              </a:rPr>
+              <a:t>.</a:t>
+            </a:r>
+            <a:r>
+              <a:rPr lang="en-US" altLang="ko-KR" sz="1000" b="0">
+                <a:solidFill>
+                  <a:srgbClr val="C9D1D9"/>
+                </a:solidFill>
+                <a:effectLst/>
+                <a:latin typeface="Consolas" panose="020B0609020204030204" pitchFamily="49" charset="0"/>
+              </a:rPr>
+              <a:t>userId</a:t>
+            </a:r>
+            <a:r>
+              <a:rPr lang="en-US" altLang="ko-KR" sz="1000" b="0">
+                <a:solidFill>
+                  <a:srgbClr val="BBBEBF"/>
+                </a:solidFill>
+                <a:effectLst/>
+                <a:latin typeface="Consolas" panose="020B0609020204030204" pitchFamily="49" charset="0"/>
+              </a:rPr>
+              <a:t> </a:t>
+            </a:r>
+            <a:r>
+              <a:rPr lang="en-US" altLang="ko-KR" sz="1000" b="0">
+                <a:solidFill>
+                  <a:srgbClr val="D4D4D4"/>
+                </a:solidFill>
+                <a:effectLst/>
+                <a:latin typeface="Consolas" panose="020B0609020204030204" pitchFamily="49" charset="0"/>
+              </a:rPr>
+              <a:t>=</a:t>
+            </a:r>
+            <a:r>
+              <a:rPr lang="en-US" altLang="ko-KR" sz="1000" b="0">
+                <a:solidFill>
+                  <a:srgbClr val="BBBEBF"/>
+                </a:solidFill>
+                <a:effectLst/>
+                <a:latin typeface="Consolas" panose="020B0609020204030204" pitchFamily="49" charset="0"/>
+              </a:rPr>
+              <a:t> </a:t>
+            </a:r>
+            <a:r>
+              <a:rPr lang="en-US" altLang="ko-KR" sz="1000" b="0">
+                <a:solidFill>
+                  <a:srgbClr val="FFA657"/>
+                </a:solidFill>
+                <a:effectLst/>
+                <a:latin typeface="Consolas" panose="020B0609020204030204" pitchFamily="49" charset="0"/>
+              </a:rPr>
+              <a:t>userId</a:t>
+            </a:r>
+            <a:r>
+              <a:rPr lang="en-US" altLang="ko-KR" sz="1000" b="0">
+                <a:solidFill>
+                  <a:srgbClr val="BBBEBF"/>
+                </a:solidFill>
+                <a:effectLst/>
+                <a:latin typeface="Consolas" panose="020B0609020204030204" pitchFamily="49" charset="0"/>
+              </a:rPr>
+              <a:t>;</a:t>
+            </a:r>
+          </a:p>
+          <a:p>
+            <a:pPr>
+              <a:lnSpc>
+                <a:spcPts val="1425"/>
+              </a:lnSpc>
+              <a:buNone/>
+            </a:pPr>
+            <a:r>
+              <a:rPr lang="en-US" altLang="ko-KR" sz="1000" b="0">
+                <a:solidFill>
+                  <a:srgbClr val="BBBEBF"/>
+                </a:solidFill>
+                <a:effectLst/>
+                <a:latin typeface="Consolas" panose="020B0609020204030204" pitchFamily="49" charset="0"/>
+              </a:rPr>
+              <a:t>    }</a:t>
+            </a:r>
+          </a:p>
+          <a:p>
+            <a:pPr>
+              <a:lnSpc>
+                <a:spcPts val="1425"/>
+              </a:lnSpc>
+              <a:buNone/>
+            </a:pPr>
+            <a:r>
+              <a:rPr lang="en-US" altLang="ko-KR" sz="1000" b="0">
+                <a:solidFill>
+                  <a:srgbClr val="BBBEBF"/>
+                </a:solidFill>
+                <a:effectLst/>
+                <a:latin typeface="Consolas" panose="020B0609020204030204" pitchFamily="49" charset="0"/>
+              </a:rPr>
+              <a:t>    </a:t>
+            </a:r>
+            <a:r>
+              <a:rPr lang="en-US" altLang="ko-KR" sz="1000" b="0">
+                <a:solidFill>
+                  <a:srgbClr val="569CD6"/>
+                </a:solidFill>
+                <a:effectLst/>
+                <a:latin typeface="Consolas" panose="020B0609020204030204" pitchFamily="49" charset="0"/>
+              </a:rPr>
+              <a:t>public</a:t>
+            </a:r>
+            <a:r>
+              <a:rPr lang="en-US" altLang="ko-KR" sz="1000" b="0">
+                <a:solidFill>
+                  <a:srgbClr val="BBBEBF"/>
+                </a:solidFill>
+                <a:effectLst/>
+                <a:latin typeface="Consolas" panose="020B0609020204030204" pitchFamily="49" charset="0"/>
+              </a:rPr>
+              <a:t> </a:t>
+            </a:r>
+            <a:r>
+              <a:rPr lang="en-US" altLang="ko-KR" sz="1000" b="0">
+                <a:solidFill>
+                  <a:srgbClr val="4EC9B0"/>
+                </a:solidFill>
+                <a:effectLst/>
+                <a:latin typeface="Consolas" panose="020B0609020204030204" pitchFamily="49" charset="0"/>
+              </a:rPr>
+              <a:t>Long</a:t>
+            </a:r>
+            <a:r>
+              <a:rPr lang="en-US" altLang="ko-KR" sz="1000" b="0">
+                <a:solidFill>
+                  <a:srgbClr val="BBBEBF"/>
+                </a:solidFill>
+                <a:effectLst/>
+                <a:latin typeface="Consolas" panose="020B0609020204030204" pitchFamily="49" charset="0"/>
+              </a:rPr>
+              <a:t> </a:t>
+            </a:r>
+            <a:r>
+              <a:rPr lang="en-US" altLang="ko-KR" sz="1000" b="0">
+                <a:solidFill>
+                  <a:srgbClr val="D2A8FF"/>
+                </a:solidFill>
+                <a:effectLst/>
+                <a:latin typeface="Consolas" panose="020B0609020204030204" pitchFamily="49" charset="0"/>
+              </a:rPr>
+              <a:t>getBoardId</a:t>
+            </a:r>
+            <a:r>
+              <a:rPr lang="en-US" altLang="ko-KR" sz="1000" b="0">
+                <a:solidFill>
+                  <a:srgbClr val="BBBEBF"/>
+                </a:solidFill>
+                <a:effectLst/>
+                <a:latin typeface="Consolas" panose="020B0609020204030204" pitchFamily="49" charset="0"/>
+              </a:rPr>
+              <a:t>() {</a:t>
+            </a:r>
+          </a:p>
+          <a:p>
+            <a:pPr>
+              <a:lnSpc>
+                <a:spcPts val="1425"/>
+              </a:lnSpc>
+              <a:buNone/>
+            </a:pPr>
+            <a:r>
+              <a:rPr lang="en-US" altLang="ko-KR" sz="1000" b="0">
+                <a:solidFill>
+                  <a:srgbClr val="BBBEBF"/>
+                </a:solidFill>
+                <a:effectLst/>
+                <a:latin typeface="Consolas" panose="020B0609020204030204" pitchFamily="49" charset="0"/>
+              </a:rPr>
+              <a:t>        </a:t>
+            </a:r>
+            <a:r>
+              <a:rPr lang="en-US" altLang="ko-KR" sz="1000" b="0">
+                <a:solidFill>
+                  <a:srgbClr val="C586C0"/>
+                </a:solidFill>
+                <a:effectLst/>
+                <a:latin typeface="Consolas" panose="020B0609020204030204" pitchFamily="49" charset="0"/>
+              </a:rPr>
+              <a:t>return</a:t>
+            </a:r>
+            <a:r>
+              <a:rPr lang="en-US" altLang="ko-KR" sz="1000" b="0">
+                <a:solidFill>
+                  <a:srgbClr val="BBBEBF"/>
+                </a:solidFill>
+                <a:effectLst/>
+                <a:latin typeface="Consolas" panose="020B0609020204030204" pitchFamily="49" charset="0"/>
+              </a:rPr>
+              <a:t> </a:t>
+            </a:r>
+            <a:r>
+              <a:rPr lang="en-US" altLang="ko-KR" sz="1000" b="0">
+                <a:solidFill>
+                  <a:srgbClr val="C9D1D9"/>
+                </a:solidFill>
+                <a:effectLst/>
+                <a:latin typeface="Consolas" panose="020B0609020204030204" pitchFamily="49" charset="0"/>
+              </a:rPr>
+              <a:t>boardId</a:t>
+            </a:r>
+            <a:r>
+              <a:rPr lang="en-US" altLang="ko-KR" sz="1000" b="0">
+                <a:solidFill>
+                  <a:srgbClr val="BBBEBF"/>
+                </a:solidFill>
+                <a:effectLst/>
+                <a:latin typeface="Consolas" panose="020B0609020204030204" pitchFamily="49" charset="0"/>
+              </a:rPr>
+              <a:t>;</a:t>
+            </a:r>
+          </a:p>
+          <a:p>
+            <a:pPr>
+              <a:lnSpc>
+                <a:spcPts val="1425"/>
+              </a:lnSpc>
+              <a:buNone/>
+            </a:pPr>
+            <a:r>
+              <a:rPr lang="en-US" altLang="ko-KR" sz="1000" b="0">
+                <a:solidFill>
+                  <a:srgbClr val="BBBEBF"/>
+                </a:solidFill>
+                <a:effectLst/>
+                <a:latin typeface="Consolas" panose="020B0609020204030204" pitchFamily="49" charset="0"/>
+              </a:rPr>
+              <a:t>    }</a:t>
+            </a:r>
+          </a:p>
+          <a:p>
+            <a:pPr>
+              <a:lnSpc>
+                <a:spcPts val="1425"/>
+              </a:lnSpc>
+              <a:buNone/>
+            </a:pPr>
+            <a:r>
+              <a:rPr lang="en-US" altLang="ko-KR" sz="1000" b="0">
+                <a:solidFill>
+                  <a:srgbClr val="BBBEBF"/>
+                </a:solidFill>
+                <a:effectLst/>
+                <a:latin typeface="Consolas" panose="020B0609020204030204" pitchFamily="49" charset="0"/>
+              </a:rPr>
+              <a:t>    </a:t>
+            </a:r>
+            <a:r>
+              <a:rPr lang="en-US" altLang="ko-KR" sz="1000" b="0">
+                <a:solidFill>
+                  <a:srgbClr val="569CD6"/>
+                </a:solidFill>
+                <a:effectLst/>
+                <a:latin typeface="Consolas" panose="020B0609020204030204" pitchFamily="49" charset="0"/>
+              </a:rPr>
+              <a:t>public</a:t>
+            </a:r>
+            <a:r>
+              <a:rPr lang="en-US" altLang="ko-KR" sz="1000" b="0">
+                <a:solidFill>
+                  <a:srgbClr val="BBBEBF"/>
+                </a:solidFill>
+                <a:effectLst/>
+                <a:latin typeface="Consolas" panose="020B0609020204030204" pitchFamily="49" charset="0"/>
+              </a:rPr>
+              <a:t> </a:t>
+            </a:r>
+            <a:r>
+              <a:rPr lang="en-US" altLang="ko-KR" sz="1000" b="0">
+                <a:solidFill>
+                  <a:srgbClr val="4EC9B0"/>
+                </a:solidFill>
+                <a:effectLst/>
+                <a:latin typeface="Consolas" panose="020B0609020204030204" pitchFamily="49" charset="0"/>
+              </a:rPr>
+              <a:t>String</a:t>
+            </a:r>
+            <a:r>
+              <a:rPr lang="en-US" altLang="ko-KR" sz="1000" b="0">
+                <a:solidFill>
+                  <a:srgbClr val="BBBEBF"/>
+                </a:solidFill>
+                <a:effectLst/>
+                <a:latin typeface="Consolas" panose="020B0609020204030204" pitchFamily="49" charset="0"/>
+              </a:rPr>
+              <a:t> </a:t>
+            </a:r>
+            <a:r>
+              <a:rPr lang="en-US" altLang="ko-KR" sz="1000" b="0">
+                <a:solidFill>
+                  <a:srgbClr val="D2A8FF"/>
+                </a:solidFill>
+                <a:effectLst/>
+                <a:latin typeface="Consolas" panose="020B0609020204030204" pitchFamily="49" charset="0"/>
+              </a:rPr>
+              <a:t>getTitle</a:t>
+            </a:r>
+            <a:r>
+              <a:rPr lang="en-US" altLang="ko-KR" sz="1000" b="0">
+                <a:solidFill>
+                  <a:srgbClr val="BBBEBF"/>
+                </a:solidFill>
+                <a:effectLst/>
+                <a:latin typeface="Consolas" panose="020B0609020204030204" pitchFamily="49" charset="0"/>
+              </a:rPr>
+              <a:t>() {</a:t>
+            </a:r>
+          </a:p>
+          <a:p>
+            <a:pPr>
+              <a:lnSpc>
+                <a:spcPts val="1425"/>
+              </a:lnSpc>
+              <a:buNone/>
+            </a:pPr>
+            <a:r>
+              <a:rPr lang="en-US" altLang="ko-KR" sz="1000" b="0">
+                <a:solidFill>
+                  <a:srgbClr val="BBBEBF"/>
+                </a:solidFill>
+                <a:effectLst/>
+                <a:latin typeface="Consolas" panose="020B0609020204030204" pitchFamily="49" charset="0"/>
+              </a:rPr>
+              <a:t>        </a:t>
+            </a:r>
+            <a:r>
+              <a:rPr lang="en-US" altLang="ko-KR" sz="1000" b="0">
+                <a:solidFill>
+                  <a:srgbClr val="C586C0"/>
+                </a:solidFill>
+                <a:effectLst/>
+                <a:latin typeface="Consolas" panose="020B0609020204030204" pitchFamily="49" charset="0"/>
+              </a:rPr>
+              <a:t>return</a:t>
+            </a:r>
+            <a:r>
+              <a:rPr lang="en-US" altLang="ko-KR" sz="1000" b="0">
+                <a:solidFill>
+                  <a:srgbClr val="BBBEBF"/>
+                </a:solidFill>
+                <a:effectLst/>
+                <a:latin typeface="Consolas" panose="020B0609020204030204" pitchFamily="49" charset="0"/>
+              </a:rPr>
+              <a:t> </a:t>
+            </a:r>
+            <a:r>
+              <a:rPr lang="en-US" altLang="ko-KR" sz="1000" b="0">
+                <a:solidFill>
+                  <a:srgbClr val="C9D1D9"/>
+                </a:solidFill>
+                <a:effectLst/>
+                <a:latin typeface="Consolas" panose="020B0609020204030204" pitchFamily="49" charset="0"/>
+              </a:rPr>
+              <a:t>title</a:t>
+            </a:r>
+            <a:r>
+              <a:rPr lang="en-US" altLang="ko-KR" sz="1000" b="0">
+                <a:solidFill>
+                  <a:srgbClr val="BBBEBF"/>
+                </a:solidFill>
+                <a:effectLst/>
+                <a:latin typeface="Consolas" panose="020B0609020204030204" pitchFamily="49" charset="0"/>
+              </a:rPr>
+              <a:t>;</a:t>
+            </a:r>
+          </a:p>
+          <a:p>
+            <a:pPr>
+              <a:lnSpc>
+                <a:spcPts val="1425"/>
+              </a:lnSpc>
+              <a:buNone/>
+            </a:pPr>
+            <a:r>
+              <a:rPr lang="en-US" altLang="ko-KR" sz="1000" b="0">
+                <a:solidFill>
+                  <a:srgbClr val="BBBEBF"/>
+                </a:solidFill>
+                <a:effectLst/>
+                <a:latin typeface="Consolas" panose="020B0609020204030204" pitchFamily="49" charset="0"/>
+              </a:rPr>
+              <a:t>    }</a:t>
+            </a:r>
+          </a:p>
+          <a:p>
+            <a:pPr>
+              <a:lnSpc>
+                <a:spcPts val="1425"/>
+              </a:lnSpc>
+              <a:buNone/>
+            </a:pPr>
+            <a:r>
+              <a:rPr lang="en-US" altLang="ko-KR" sz="1000" b="0">
+                <a:solidFill>
+                  <a:srgbClr val="BBBEBF"/>
+                </a:solidFill>
+                <a:effectLst/>
+                <a:latin typeface="Consolas" panose="020B0609020204030204" pitchFamily="49" charset="0"/>
+              </a:rPr>
+              <a:t>    </a:t>
+            </a:r>
+            <a:r>
+              <a:rPr lang="en-US" altLang="ko-KR" sz="1000" b="0">
+                <a:solidFill>
+                  <a:srgbClr val="569CD6"/>
+                </a:solidFill>
+                <a:effectLst/>
+                <a:latin typeface="Consolas" panose="020B0609020204030204" pitchFamily="49" charset="0"/>
+              </a:rPr>
+              <a:t>public</a:t>
+            </a:r>
+            <a:r>
+              <a:rPr lang="en-US" altLang="ko-KR" sz="1000" b="0">
+                <a:solidFill>
+                  <a:srgbClr val="BBBEBF"/>
+                </a:solidFill>
+                <a:effectLst/>
+                <a:latin typeface="Consolas" panose="020B0609020204030204" pitchFamily="49" charset="0"/>
+              </a:rPr>
+              <a:t> </a:t>
+            </a:r>
+            <a:r>
+              <a:rPr lang="en-US" altLang="ko-KR" sz="1000" b="0">
+                <a:solidFill>
+                  <a:srgbClr val="4EC9B0"/>
+                </a:solidFill>
+                <a:effectLst/>
+                <a:latin typeface="Consolas" panose="020B0609020204030204" pitchFamily="49" charset="0"/>
+              </a:rPr>
+              <a:t>String</a:t>
+            </a:r>
+            <a:r>
+              <a:rPr lang="en-US" altLang="ko-KR" sz="1000" b="0">
+                <a:solidFill>
+                  <a:srgbClr val="BBBEBF"/>
+                </a:solidFill>
+                <a:effectLst/>
+                <a:latin typeface="Consolas" panose="020B0609020204030204" pitchFamily="49" charset="0"/>
+              </a:rPr>
+              <a:t> </a:t>
+            </a:r>
+            <a:r>
+              <a:rPr lang="en-US" altLang="ko-KR" sz="1000" b="0">
+                <a:solidFill>
+                  <a:srgbClr val="D2A8FF"/>
+                </a:solidFill>
+                <a:effectLst/>
+                <a:latin typeface="Consolas" panose="020B0609020204030204" pitchFamily="49" charset="0"/>
+              </a:rPr>
+              <a:t>getContent</a:t>
+            </a:r>
+            <a:r>
+              <a:rPr lang="en-US" altLang="ko-KR" sz="1000" b="0">
+                <a:solidFill>
+                  <a:srgbClr val="BBBEBF"/>
+                </a:solidFill>
+                <a:effectLst/>
+                <a:latin typeface="Consolas" panose="020B0609020204030204" pitchFamily="49" charset="0"/>
+              </a:rPr>
+              <a:t>() {</a:t>
+            </a:r>
+          </a:p>
+          <a:p>
+            <a:pPr>
+              <a:lnSpc>
+                <a:spcPts val="1425"/>
+              </a:lnSpc>
+              <a:buNone/>
+            </a:pPr>
+            <a:r>
+              <a:rPr lang="en-US" altLang="ko-KR" sz="1000" b="0">
+                <a:solidFill>
+                  <a:srgbClr val="BBBEBF"/>
+                </a:solidFill>
+                <a:effectLst/>
+                <a:latin typeface="Consolas" panose="020B0609020204030204" pitchFamily="49" charset="0"/>
+              </a:rPr>
+              <a:t>        </a:t>
+            </a:r>
+            <a:r>
+              <a:rPr lang="en-US" altLang="ko-KR" sz="1000" b="0">
+                <a:solidFill>
+                  <a:srgbClr val="C586C0"/>
+                </a:solidFill>
+                <a:effectLst/>
+                <a:latin typeface="Consolas" panose="020B0609020204030204" pitchFamily="49" charset="0"/>
+              </a:rPr>
+              <a:t>return</a:t>
+            </a:r>
+            <a:r>
+              <a:rPr lang="en-US" altLang="ko-KR" sz="1000" b="0">
+                <a:solidFill>
+                  <a:srgbClr val="BBBEBF"/>
+                </a:solidFill>
+                <a:effectLst/>
+                <a:latin typeface="Consolas" panose="020B0609020204030204" pitchFamily="49" charset="0"/>
+              </a:rPr>
+              <a:t> </a:t>
+            </a:r>
+            <a:r>
+              <a:rPr lang="en-US" altLang="ko-KR" sz="1000" b="0">
+                <a:solidFill>
+                  <a:srgbClr val="C9D1D9"/>
+                </a:solidFill>
+                <a:effectLst/>
+                <a:latin typeface="Consolas" panose="020B0609020204030204" pitchFamily="49" charset="0"/>
+              </a:rPr>
+              <a:t>content</a:t>
+            </a:r>
+            <a:r>
+              <a:rPr lang="en-US" altLang="ko-KR" sz="1000" b="0">
+                <a:solidFill>
+                  <a:srgbClr val="BBBEBF"/>
+                </a:solidFill>
+                <a:effectLst/>
+                <a:latin typeface="Consolas" panose="020B0609020204030204" pitchFamily="49" charset="0"/>
+              </a:rPr>
+              <a:t>;</a:t>
+            </a:r>
+          </a:p>
+          <a:p>
+            <a:pPr>
+              <a:lnSpc>
+                <a:spcPts val="1425"/>
+              </a:lnSpc>
+              <a:buNone/>
+            </a:pPr>
+            <a:r>
+              <a:rPr lang="en-US" altLang="ko-KR" sz="1000" b="0">
+                <a:solidFill>
+                  <a:srgbClr val="BBBEBF"/>
+                </a:solidFill>
+                <a:effectLst/>
+                <a:latin typeface="Consolas" panose="020B0609020204030204" pitchFamily="49" charset="0"/>
+              </a:rPr>
+              <a:t>    }</a:t>
+            </a:r>
+          </a:p>
+          <a:p>
+            <a:pPr>
+              <a:lnSpc>
+                <a:spcPts val="1425"/>
+              </a:lnSpc>
+              <a:buNone/>
+            </a:pPr>
+            <a:r>
+              <a:rPr lang="en-US" altLang="ko-KR" sz="1000" b="0">
+                <a:solidFill>
+                  <a:srgbClr val="BBBEBF"/>
+                </a:solidFill>
+                <a:effectLst/>
+                <a:latin typeface="Consolas" panose="020B0609020204030204" pitchFamily="49" charset="0"/>
+              </a:rPr>
+              <a:t>    </a:t>
+            </a:r>
+            <a:r>
+              <a:rPr lang="en-US" altLang="ko-KR" sz="1000" b="0">
+                <a:solidFill>
+                  <a:srgbClr val="569CD6"/>
+                </a:solidFill>
+                <a:effectLst/>
+                <a:latin typeface="Consolas" panose="020B0609020204030204" pitchFamily="49" charset="0"/>
+              </a:rPr>
+              <a:t>public</a:t>
+            </a:r>
+            <a:r>
+              <a:rPr lang="en-US" altLang="ko-KR" sz="1000" b="0">
+                <a:solidFill>
+                  <a:srgbClr val="BBBEBF"/>
+                </a:solidFill>
+                <a:effectLst/>
+                <a:latin typeface="Consolas" panose="020B0609020204030204" pitchFamily="49" charset="0"/>
+              </a:rPr>
+              <a:t> </a:t>
+            </a:r>
+            <a:r>
+              <a:rPr lang="en-US" altLang="ko-KR" sz="1000" b="0">
+                <a:solidFill>
+                  <a:srgbClr val="4EC9B0"/>
+                </a:solidFill>
+                <a:effectLst/>
+                <a:latin typeface="Consolas" panose="020B0609020204030204" pitchFamily="49" charset="0"/>
+              </a:rPr>
+              <a:t>Long</a:t>
+            </a:r>
+            <a:r>
+              <a:rPr lang="en-US" altLang="ko-KR" sz="1000" b="0">
+                <a:solidFill>
+                  <a:srgbClr val="BBBEBF"/>
+                </a:solidFill>
+                <a:effectLst/>
+                <a:latin typeface="Consolas" panose="020B0609020204030204" pitchFamily="49" charset="0"/>
+              </a:rPr>
+              <a:t> </a:t>
+            </a:r>
+            <a:r>
+              <a:rPr lang="en-US" altLang="ko-KR" sz="1000" b="0">
+                <a:solidFill>
+                  <a:srgbClr val="D2A8FF"/>
+                </a:solidFill>
+                <a:effectLst/>
+                <a:latin typeface="Consolas" panose="020B0609020204030204" pitchFamily="49" charset="0"/>
+              </a:rPr>
+              <a:t>getUserId</a:t>
+            </a:r>
+            <a:r>
+              <a:rPr lang="en-US" altLang="ko-KR" sz="1000" b="0">
+                <a:solidFill>
+                  <a:srgbClr val="BBBEBF"/>
+                </a:solidFill>
+                <a:effectLst/>
+                <a:latin typeface="Consolas" panose="020B0609020204030204" pitchFamily="49" charset="0"/>
+              </a:rPr>
+              <a:t>() {</a:t>
+            </a:r>
+          </a:p>
+          <a:p>
+            <a:pPr>
+              <a:lnSpc>
+                <a:spcPts val="1425"/>
+              </a:lnSpc>
+              <a:buNone/>
+            </a:pPr>
+            <a:r>
+              <a:rPr lang="en-US" altLang="ko-KR" sz="1000" b="0">
+                <a:solidFill>
+                  <a:srgbClr val="BBBEBF"/>
+                </a:solidFill>
+                <a:effectLst/>
+                <a:latin typeface="Consolas" panose="020B0609020204030204" pitchFamily="49" charset="0"/>
+              </a:rPr>
+              <a:t>        </a:t>
+            </a:r>
+            <a:r>
+              <a:rPr lang="en-US" altLang="ko-KR" sz="1000" b="0">
+                <a:solidFill>
+                  <a:srgbClr val="C586C0"/>
+                </a:solidFill>
+                <a:effectLst/>
+                <a:latin typeface="Consolas" panose="020B0609020204030204" pitchFamily="49" charset="0"/>
+              </a:rPr>
+              <a:t>return</a:t>
+            </a:r>
+            <a:r>
+              <a:rPr lang="en-US" altLang="ko-KR" sz="1000" b="0">
+                <a:solidFill>
+                  <a:srgbClr val="BBBEBF"/>
+                </a:solidFill>
+                <a:effectLst/>
+                <a:latin typeface="Consolas" panose="020B0609020204030204" pitchFamily="49" charset="0"/>
+              </a:rPr>
+              <a:t> </a:t>
+            </a:r>
+            <a:r>
+              <a:rPr lang="en-US" altLang="ko-KR" sz="1000" b="0">
+                <a:solidFill>
+                  <a:srgbClr val="C9D1D9"/>
+                </a:solidFill>
+                <a:effectLst/>
+                <a:latin typeface="Consolas" panose="020B0609020204030204" pitchFamily="49" charset="0"/>
+              </a:rPr>
+              <a:t>userId</a:t>
+            </a:r>
+            <a:r>
+              <a:rPr lang="en-US" altLang="ko-KR" sz="1000" b="0">
+                <a:solidFill>
+                  <a:srgbClr val="BBBEBF"/>
+                </a:solidFill>
+                <a:effectLst/>
+                <a:latin typeface="Consolas" panose="020B0609020204030204" pitchFamily="49" charset="0"/>
+              </a:rPr>
+              <a:t>;</a:t>
+            </a:r>
+          </a:p>
+          <a:p>
+            <a:pPr>
+              <a:lnSpc>
+                <a:spcPts val="1425"/>
+              </a:lnSpc>
+              <a:buNone/>
+            </a:pPr>
+            <a:r>
+              <a:rPr lang="en-US" altLang="ko-KR" sz="1000" b="0">
+                <a:solidFill>
+                  <a:srgbClr val="BBBEBF"/>
+                </a:solidFill>
+                <a:effectLst/>
+                <a:latin typeface="Consolas" panose="020B0609020204030204" pitchFamily="49" charset="0"/>
+              </a:rPr>
+              <a:t>    }    </a:t>
+            </a:r>
+          </a:p>
+          <a:p>
+            <a:pPr>
+              <a:lnSpc>
+                <a:spcPts val="1425"/>
+              </a:lnSpc>
+              <a:buNone/>
+            </a:pPr>
+            <a:r>
+              <a:rPr lang="en-US" altLang="ko-KR" sz="1000" b="0">
+                <a:solidFill>
+                  <a:srgbClr val="BBBEBF"/>
+                </a:solidFill>
+                <a:effectLst/>
+                <a:latin typeface="Consolas" panose="020B0609020204030204" pitchFamily="49" charset="0"/>
+              </a:rPr>
+              <a:t>}</a:t>
+            </a:r>
+          </a:p>
+        </p:txBody>
+      </p:sp>
+    </p:spTree>
+    <p:extLst>
+      <p:ext uri="{BB962C8B-B14F-4D97-AF65-F5344CB8AC3E}">
+        <p14:creationId xmlns:p14="http://schemas.microsoft.com/office/powerpoint/2010/main" val="1018145017"/>
+      </p:ext>
+    </p:extLst>
+  </p:cSld>
+  <p:clrMapOvr>
+    <a:masterClrMapping/>
+  </p:clrMapOvr>
+</p:sld>
+</file>
+
+<file path=ppt/slides/slide24.xml><?xml version="1.0" encoding="utf-8"?>
+<p:sld xmlns:a="http://schemas.openxmlformats.org/drawingml/2006/main" xmlns:r="http://schemas.openxmlformats.org/officeDocument/2006/relationships" xmlns:p="http://schemas.openxmlformats.org/presentationml/2006/main">
+  <p:cSld>
+    <p:spTree>
+      <p:nvGrpSpPr>
+        <p:cNvPr id="1" name="">
+          <a:extLst>
+            <a:ext uri="{FF2B5EF4-FFF2-40B4-BE49-F238E27FC236}">
+              <a16:creationId xmlns:a16="http://schemas.microsoft.com/office/drawing/2014/main" id="{4C5FA4B8-B4FC-D43B-33BD-D6B5C5CAD681}"/>
+            </a:ext>
+          </a:extLst>
+        </p:cNvPr>
+        <p:cNvGrpSpPr/>
+        <p:nvPr/>
+      </p:nvGrpSpPr>
+      <p:grpSpPr>
+        <a:xfrm>
+          <a:off x="0" y="0"/>
+          <a:ext cx="0" cy="0"/>
+          <a:chOff x="0" y="0"/>
+          <a:chExt cx="0" cy="0"/>
+        </a:xfrm>
+      </p:grpSpPr>
+      <p:sp>
+        <p:nvSpPr>
+          <p:cNvPr id="2" name="제목 1">
+            <a:extLst>
+              <a:ext uri="{FF2B5EF4-FFF2-40B4-BE49-F238E27FC236}">
+                <a16:creationId xmlns:a16="http://schemas.microsoft.com/office/drawing/2014/main" id="{8F3C37BC-69ED-A688-A6FF-C689B6A733A6}"/>
+              </a:ext>
+            </a:extLst>
+          </p:cNvPr>
+          <p:cNvSpPr>
+            <a:spLocks noGrp="1"/>
+          </p:cNvSpPr>
+          <p:nvPr>
+            <p:ph type="title"/>
+          </p:nvPr>
+        </p:nvSpPr>
+        <p:spPr/>
+        <p:txBody>
+          <a:bodyPr/>
+          <a:lstStyle/>
+          <a:p>
+            <a:r>
+              <a:rPr lang="en-US" altLang="ko-KR"/>
+              <a:t>BoardService </a:t>
+            </a:r>
+            <a:r>
+              <a:rPr lang="ko-KR" altLang="en-US"/>
+              <a:t>작성하기</a:t>
+            </a:r>
+            <a:r>
+              <a:rPr lang="en-US" altLang="ko-KR"/>
+              <a:t>[DTO] </a:t>
+            </a:r>
+            <a:endParaRPr lang="ko-KR" altLang="en-US"/>
+          </a:p>
+        </p:txBody>
+      </p:sp>
+      <p:grpSp>
+        <p:nvGrpSpPr>
+          <p:cNvPr id="6" name="그룹 5">
+            <a:extLst>
+              <a:ext uri="{FF2B5EF4-FFF2-40B4-BE49-F238E27FC236}">
+                <a16:creationId xmlns:a16="http://schemas.microsoft.com/office/drawing/2014/main" id="{759A3D9E-495B-EDB5-C430-D87DEB35F1E8}"/>
+              </a:ext>
+            </a:extLst>
+          </p:cNvPr>
+          <p:cNvGrpSpPr/>
+          <p:nvPr/>
+        </p:nvGrpSpPr>
+        <p:grpSpPr>
+          <a:xfrm>
+            <a:off x="892108" y="1847088"/>
+            <a:ext cx="2068891" cy="4938414"/>
+            <a:chOff x="892108" y="1847088"/>
+            <a:chExt cx="2068891" cy="4938414"/>
+          </a:xfrm>
+        </p:grpSpPr>
+        <p:pic>
+          <p:nvPicPr>
+            <p:cNvPr id="4" name="그림 3">
+              <a:extLst>
+                <a:ext uri="{FF2B5EF4-FFF2-40B4-BE49-F238E27FC236}">
+                  <a16:creationId xmlns:a16="http://schemas.microsoft.com/office/drawing/2014/main" id="{B6877D6B-EAA6-5064-D220-A34A076A5040}"/>
+                </a:ext>
+              </a:extLst>
+            </p:cNvPr>
+            <p:cNvPicPr>
+              <a:picLocks noChangeAspect="1"/>
+            </p:cNvPicPr>
+            <p:nvPr/>
+          </p:nvPicPr>
+          <p:blipFill>
+            <a:blip r:embed="rId2"/>
+            <a:stretch>
+              <a:fillRect/>
+            </a:stretch>
+          </p:blipFill>
+          <p:spPr>
+            <a:xfrm>
+              <a:off x="892108" y="1847088"/>
+              <a:ext cx="2068891" cy="4938414"/>
+            </a:xfrm>
+            <a:prstGeom prst="rect">
+              <a:avLst/>
+            </a:prstGeom>
+          </p:spPr>
+        </p:pic>
+        <p:sp>
+          <p:nvSpPr>
+            <p:cNvPr id="5" name="직사각형 4">
+              <a:extLst>
+                <a:ext uri="{FF2B5EF4-FFF2-40B4-BE49-F238E27FC236}">
+                  <a16:creationId xmlns:a16="http://schemas.microsoft.com/office/drawing/2014/main" id="{998DD6DA-D319-A7FA-F1B9-8F9FC5EE858D}"/>
+                </a:ext>
+              </a:extLst>
+            </p:cNvPr>
+            <p:cNvSpPr/>
+            <p:nvPr/>
+          </p:nvSpPr>
+          <p:spPr>
+            <a:xfrm>
+              <a:off x="1097280" y="4078225"/>
+              <a:ext cx="1508760" cy="386084"/>
+            </a:xfrm>
+            <a:prstGeom prst="rect">
+              <a:avLst/>
+            </a:prstGeom>
+            <a:noFill/>
+            <a:ln>
+              <a:solidFill>
+                <a:srgbClr val="FF0000"/>
+              </a:solidFill>
+            </a:ln>
+          </p:spPr>
+          <p:style>
+            <a:lnRef idx="2">
+              <a:schemeClr val="accent1">
+                <a:shade val="15000"/>
+              </a:schemeClr>
+            </a:lnRef>
+            <a:fillRef idx="1">
+              <a:schemeClr val="accent1"/>
+            </a:fillRef>
+            <a:effectRef idx="0">
+              <a:schemeClr val="accent1"/>
+            </a:effectRef>
+            <a:fontRef idx="minor">
+              <a:schemeClr val="lt1"/>
+            </a:fontRef>
+          </p:style>
+          <p:txBody>
+            <a:bodyPr rtlCol="0" anchor="ctr"/>
+            <a:lstStyle/>
+            <a:p>
+              <a:pPr algn="ctr"/>
+              <a:endParaRPr lang="ko-KR" altLang="en-US"/>
+            </a:p>
+          </p:txBody>
+        </p:sp>
+      </p:grpSp>
+      <p:pic>
+        <p:nvPicPr>
+          <p:cNvPr id="8" name="그림 7">
+            <a:extLst>
+              <a:ext uri="{FF2B5EF4-FFF2-40B4-BE49-F238E27FC236}">
+                <a16:creationId xmlns:a16="http://schemas.microsoft.com/office/drawing/2014/main" id="{CEFE9DF5-5F37-6BB2-64BF-6A359381A16A}"/>
+              </a:ext>
+            </a:extLst>
+          </p:cNvPr>
+          <p:cNvPicPr>
+            <a:picLocks noChangeAspect="1"/>
+          </p:cNvPicPr>
+          <p:nvPr/>
+        </p:nvPicPr>
+        <p:blipFill>
+          <a:blip r:embed="rId3"/>
+          <a:stretch>
+            <a:fillRect/>
+          </a:stretch>
+        </p:blipFill>
+        <p:spPr>
+          <a:xfrm>
+            <a:off x="3166171" y="1847088"/>
+            <a:ext cx="6230219" cy="4763165"/>
+          </a:xfrm>
+          <a:prstGeom prst="rect">
+            <a:avLst/>
+          </a:prstGeom>
+        </p:spPr>
+      </p:pic>
+    </p:spTree>
+    <p:extLst>
+      <p:ext uri="{BB962C8B-B14F-4D97-AF65-F5344CB8AC3E}">
+        <p14:creationId xmlns:p14="http://schemas.microsoft.com/office/powerpoint/2010/main" val="1991014203"/>
+      </p:ext>
+    </p:extLst>
+  </p:cSld>
+  <p:clrMapOvr>
+    <a:masterClrMapping/>
+  </p:clrMapOvr>
+</p:sld>
+</file>
+
+<file path=ppt/slides/slide25.xml><?xml version="1.0" encoding="utf-8"?>
+<p:sld xmlns:a="http://schemas.openxmlformats.org/drawingml/2006/main" xmlns:r="http://schemas.openxmlformats.org/officeDocument/2006/relationships" xmlns:p="http://schemas.openxmlformats.org/presentationml/2006/main">
+  <p:cSld>
+    <p:spTree>
+      <p:nvGrpSpPr>
+        <p:cNvPr id="1" name=""/>
+        <p:cNvGrpSpPr/>
+        <p:nvPr/>
+      </p:nvGrpSpPr>
+      <p:grpSpPr>
+        <a:xfrm>
+          <a:off x="0" y="0"/>
+          <a:ext cx="0" cy="0"/>
+          <a:chOff x="0" y="0"/>
+          <a:chExt cx="0" cy="0"/>
+        </a:xfrm>
+      </p:grpSpPr>
+      <p:sp>
+        <p:nvSpPr>
+          <p:cNvPr id="2" name="제목 1">
+            <a:extLst>
+              <a:ext uri="{FF2B5EF4-FFF2-40B4-BE49-F238E27FC236}">
+                <a16:creationId xmlns:a16="http://schemas.microsoft.com/office/drawing/2014/main" id="{6C6D9EB1-27AB-5536-4E42-C4ABCC1EFFF4}"/>
+              </a:ext>
+            </a:extLst>
+          </p:cNvPr>
+          <p:cNvSpPr>
+            <a:spLocks noGrp="1"/>
+          </p:cNvSpPr>
+          <p:nvPr>
+            <p:ph type="title"/>
+          </p:nvPr>
+        </p:nvSpPr>
+        <p:spPr/>
+        <p:txBody>
+          <a:bodyPr/>
+          <a:lstStyle/>
+          <a:p>
+            <a:r>
+              <a:rPr lang="en-US" altLang="ko-KR"/>
+              <a:t>BoardService </a:t>
+            </a:r>
+            <a:r>
+              <a:rPr lang="ko-KR" altLang="en-US"/>
+              <a:t>작성하기</a:t>
+            </a:r>
+            <a:r>
+              <a:rPr lang="en-US" altLang="ko-KR"/>
+              <a:t>[Controller] </a:t>
+            </a:r>
+            <a:endParaRPr lang="ko-KR" altLang="en-US"/>
+          </a:p>
+        </p:txBody>
+      </p:sp>
+      <p:grpSp>
+        <p:nvGrpSpPr>
+          <p:cNvPr id="6" name="그룹 5">
+            <a:extLst>
+              <a:ext uri="{FF2B5EF4-FFF2-40B4-BE49-F238E27FC236}">
+                <a16:creationId xmlns:a16="http://schemas.microsoft.com/office/drawing/2014/main" id="{4AE1E3C2-30F1-BD62-BF3B-45901B2DDC1A}"/>
+              </a:ext>
+            </a:extLst>
+          </p:cNvPr>
+          <p:cNvGrpSpPr/>
+          <p:nvPr/>
+        </p:nvGrpSpPr>
+        <p:grpSpPr>
+          <a:xfrm>
+            <a:off x="892108" y="1847088"/>
+            <a:ext cx="2068891" cy="4938414"/>
+            <a:chOff x="892108" y="1847088"/>
+            <a:chExt cx="2068891" cy="4938414"/>
+          </a:xfrm>
+        </p:grpSpPr>
+        <p:pic>
+          <p:nvPicPr>
+            <p:cNvPr id="4" name="그림 3">
+              <a:extLst>
+                <a:ext uri="{FF2B5EF4-FFF2-40B4-BE49-F238E27FC236}">
+                  <a16:creationId xmlns:a16="http://schemas.microsoft.com/office/drawing/2014/main" id="{C8AE1C16-940D-962C-24EB-841855C8017F}"/>
+                </a:ext>
+              </a:extLst>
+            </p:cNvPr>
+            <p:cNvPicPr>
+              <a:picLocks noChangeAspect="1"/>
+            </p:cNvPicPr>
+            <p:nvPr/>
+          </p:nvPicPr>
+          <p:blipFill>
+            <a:blip r:embed="rId2"/>
+            <a:stretch>
+              <a:fillRect/>
+            </a:stretch>
+          </p:blipFill>
+          <p:spPr>
+            <a:xfrm>
+              <a:off x="892108" y="1847088"/>
+              <a:ext cx="2068891" cy="4938414"/>
+            </a:xfrm>
+            <a:prstGeom prst="rect">
+              <a:avLst/>
+            </a:prstGeom>
+          </p:spPr>
+        </p:pic>
+        <p:sp>
+          <p:nvSpPr>
+            <p:cNvPr id="5" name="직사각형 4">
+              <a:extLst>
+                <a:ext uri="{FF2B5EF4-FFF2-40B4-BE49-F238E27FC236}">
+                  <a16:creationId xmlns:a16="http://schemas.microsoft.com/office/drawing/2014/main" id="{5B59B0A5-0AC5-113C-FD97-FE0604D37A89}"/>
+                </a:ext>
+              </a:extLst>
+            </p:cNvPr>
+            <p:cNvSpPr/>
+            <p:nvPr/>
+          </p:nvSpPr>
+          <p:spPr>
+            <a:xfrm>
+              <a:off x="1124712" y="3328416"/>
+              <a:ext cx="1069848" cy="301752"/>
+            </a:xfrm>
+            <a:prstGeom prst="rect">
+              <a:avLst/>
+            </a:prstGeom>
+            <a:noFill/>
+            <a:ln>
+              <a:solidFill>
+                <a:srgbClr val="FF0000"/>
+              </a:solidFill>
+            </a:ln>
+          </p:spPr>
+          <p:style>
+            <a:lnRef idx="2">
+              <a:schemeClr val="accent1">
+                <a:shade val="15000"/>
+              </a:schemeClr>
+            </a:lnRef>
+            <a:fillRef idx="1">
+              <a:schemeClr val="accent1"/>
+            </a:fillRef>
+            <a:effectRef idx="0">
+              <a:schemeClr val="accent1"/>
+            </a:effectRef>
+            <a:fontRef idx="minor">
+              <a:schemeClr val="lt1"/>
+            </a:fontRef>
+          </p:style>
+          <p:txBody>
+            <a:bodyPr rtlCol="0" anchor="ctr"/>
+            <a:lstStyle/>
+            <a:p>
+              <a:pPr algn="ctr"/>
+              <a:endParaRPr lang="ko-KR" altLang="en-US"/>
+            </a:p>
+          </p:txBody>
+        </p:sp>
+      </p:grpSp>
+      <p:sp>
+        <p:nvSpPr>
+          <p:cNvPr id="8" name="TextBox 7">
+            <a:extLst>
+              <a:ext uri="{FF2B5EF4-FFF2-40B4-BE49-F238E27FC236}">
+                <a16:creationId xmlns:a16="http://schemas.microsoft.com/office/drawing/2014/main" id="{BD45C55E-2B17-EAA1-FBB1-6F82E70DEF37}"/>
+              </a:ext>
+            </a:extLst>
+          </p:cNvPr>
+          <p:cNvSpPr txBox="1"/>
+          <p:nvPr/>
+        </p:nvSpPr>
+        <p:spPr>
+          <a:xfrm>
+            <a:off x="3079242" y="1878406"/>
+            <a:ext cx="6094476" cy="3503523"/>
+          </a:xfrm>
+          <a:prstGeom prst="rect">
+            <a:avLst/>
+          </a:prstGeom>
+          <a:solidFill>
+            <a:schemeClr val="tx1"/>
+          </a:solidFill>
+        </p:spPr>
+        <p:txBody>
+          <a:bodyPr wrap="square">
+            <a:spAutoFit/>
+          </a:bodyPr>
+          <a:lstStyle/>
+          <a:p>
+            <a:pPr>
+              <a:lnSpc>
+                <a:spcPts val="1425"/>
+              </a:lnSpc>
+              <a:buNone/>
+            </a:pPr>
+            <a:r>
+              <a:rPr lang="en-US" altLang="ko-KR" sz="1200" b="0">
+                <a:solidFill>
+                  <a:srgbClr val="BBBEBF"/>
+                </a:solidFill>
+                <a:effectLst/>
+                <a:latin typeface="Consolas" panose="020B0609020204030204" pitchFamily="49" charset="0"/>
+              </a:rPr>
+              <a:t>@</a:t>
+            </a:r>
+            <a:r>
+              <a:rPr lang="en-US" altLang="ko-KR" sz="1200" b="0">
+                <a:solidFill>
+                  <a:srgbClr val="4EC9B0"/>
+                </a:solidFill>
+                <a:effectLst/>
+                <a:latin typeface="Consolas" panose="020B0609020204030204" pitchFamily="49" charset="0"/>
+              </a:rPr>
+              <a:t>RestController</a:t>
+            </a:r>
+            <a:endParaRPr lang="en-US" altLang="ko-KR" sz="1200" b="0">
+              <a:solidFill>
+                <a:srgbClr val="BBBEBF"/>
+              </a:solidFill>
+              <a:effectLst/>
+              <a:latin typeface="Consolas" panose="020B0609020204030204" pitchFamily="49" charset="0"/>
+            </a:endParaRPr>
+          </a:p>
+          <a:p>
+            <a:pPr>
+              <a:lnSpc>
+                <a:spcPts val="1425"/>
+              </a:lnSpc>
+              <a:buNone/>
+            </a:pPr>
+            <a:r>
+              <a:rPr lang="en-US" altLang="ko-KR" sz="1200" b="0">
+                <a:solidFill>
+                  <a:srgbClr val="BBBEBF"/>
+                </a:solidFill>
+                <a:effectLst/>
+                <a:latin typeface="Consolas" panose="020B0609020204030204" pitchFamily="49" charset="0"/>
+              </a:rPr>
+              <a:t>@</a:t>
+            </a:r>
+            <a:r>
+              <a:rPr lang="en-US" altLang="ko-KR" sz="1200" b="0">
+                <a:solidFill>
+                  <a:srgbClr val="4EC9B0"/>
+                </a:solidFill>
+                <a:effectLst/>
+                <a:latin typeface="Consolas" panose="020B0609020204030204" pitchFamily="49" charset="0"/>
+              </a:rPr>
+              <a:t>RequestMapping</a:t>
+            </a:r>
+            <a:r>
+              <a:rPr lang="en-US" altLang="ko-KR" sz="1200" b="0">
+                <a:solidFill>
+                  <a:srgbClr val="BBBEBF"/>
+                </a:solidFill>
+                <a:effectLst/>
+                <a:latin typeface="Consolas" panose="020B0609020204030204" pitchFamily="49" charset="0"/>
+              </a:rPr>
+              <a:t>(</a:t>
+            </a:r>
+            <a:r>
+              <a:rPr lang="en-US" altLang="ko-KR" sz="1200" b="0">
+                <a:solidFill>
+                  <a:srgbClr val="A5D6FF"/>
+                </a:solidFill>
+                <a:effectLst/>
+                <a:latin typeface="Consolas" panose="020B0609020204030204" pitchFamily="49" charset="0"/>
+              </a:rPr>
+              <a:t>"/boards"</a:t>
+            </a:r>
+            <a:r>
+              <a:rPr lang="en-US" altLang="ko-KR" sz="1200" b="0">
+                <a:solidFill>
+                  <a:srgbClr val="BBBEBF"/>
+                </a:solidFill>
+                <a:effectLst/>
+                <a:latin typeface="Consolas" panose="020B0609020204030204" pitchFamily="49" charset="0"/>
+              </a:rPr>
+              <a:t>)</a:t>
+            </a:r>
+          </a:p>
+          <a:p>
+            <a:pPr>
+              <a:lnSpc>
+                <a:spcPts val="1425"/>
+              </a:lnSpc>
+              <a:buNone/>
+            </a:pPr>
+            <a:r>
+              <a:rPr lang="en-US" altLang="ko-KR" sz="1200" b="0">
+                <a:solidFill>
+                  <a:srgbClr val="569CD6"/>
+                </a:solidFill>
+                <a:effectLst/>
+                <a:latin typeface="Consolas" panose="020B0609020204030204" pitchFamily="49" charset="0"/>
+              </a:rPr>
+              <a:t>public</a:t>
+            </a:r>
+            <a:r>
+              <a:rPr lang="en-US" altLang="ko-KR" sz="1200" b="0">
+                <a:solidFill>
+                  <a:srgbClr val="BBBEBF"/>
+                </a:solidFill>
+                <a:effectLst/>
+                <a:latin typeface="Consolas" panose="020B0609020204030204" pitchFamily="49" charset="0"/>
+              </a:rPr>
+              <a:t> </a:t>
+            </a:r>
+            <a:r>
+              <a:rPr lang="en-US" altLang="ko-KR" sz="1200" b="0">
+                <a:solidFill>
+                  <a:srgbClr val="569CD6"/>
+                </a:solidFill>
+                <a:effectLst/>
+                <a:latin typeface="Consolas" panose="020B0609020204030204" pitchFamily="49" charset="0"/>
+              </a:rPr>
+              <a:t>class</a:t>
+            </a:r>
+            <a:r>
+              <a:rPr lang="en-US" altLang="ko-KR" sz="1200" b="0">
+                <a:solidFill>
+                  <a:srgbClr val="BBBEBF"/>
+                </a:solidFill>
+                <a:effectLst/>
+                <a:latin typeface="Consolas" panose="020B0609020204030204" pitchFamily="49" charset="0"/>
+              </a:rPr>
+              <a:t> </a:t>
+            </a:r>
+            <a:r>
+              <a:rPr lang="en-US" altLang="ko-KR" sz="1200" b="0">
+                <a:solidFill>
+                  <a:srgbClr val="4EC9B0"/>
+                </a:solidFill>
+                <a:effectLst/>
+                <a:latin typeface="Consolas" panose="020B0609020204030204" pitchFamily="49" charset="0"/>
+              </a:rPr>
+              <a:t>BoardController</a:t>
+            </a:r>
+            <a:r>
+              <a:rPr lang="en-US" altLang="ko-KR" sz="1200" b="0">
+                <a:solidFill>
+                  <a:srgbClr val="BBBEBF"/>
+                </a:solidFill>
+                <a:effectLst/>
+                <a:latin typeface="Consolas" panose="020B0609020204030204" pitchFamily="49" charset="0"/>
+              </a:rPr>
+              <a:t> {</a:t>
+            </a:r>
+          </a:p>
+          <a:p>
+            <a:pPr>
+              <a:lnSpc>
+                <a:spcPts val="1425"/>
+              </a:lnSpc>
+              <a:buNone/>
+            </a:pPr>
+            <a:br>
+              <a:rPr lang="en-US" altLang="ko-KR" sz="1200" b="0">
+                <a:solidFill>
+                  <a:srgbClr val="BBBEBF"/>
+                </a:solidFill>
+                <a:effectLst/>
+                <a:latin typeface="Consolas" panose="020B0609020204030204" pitchFamily="49" charset="0"/>
+              </a:rPr>
+            </a:br>
+            <a:endParaRPr lang="en-US" altLang="ko-KR" sz="1200" b="0">
+              <a:solidFill>
+                <a:srgbClr val="BBBEBF"/>
+              </a:solidFill>
+              <a:effectLst/>
+              <a:latin typeface="Consolas" panose="020B0609020204030204" pitchFamily="49" charset="0"/>
+            </a:endParaRPr>
+          </a:p>
+          <a:p>
+            <a:pPr>
+              <a:lnSpc>
+                <a:spcPts val="1425"/>
+              </a:lnSpc>
+              <a:buNone/>
+            </a:pPr>
+            <a:r>
+              <a:rPr lang="en-US" altLang="ko-KR" sz="1200" b="0">
+                <a:solidFill>
+                  <a:srgbClr val="BBBEBF"/>
+                </a:solidFill>
+                <a:effectLst/>
+                <a:latin typeface="Consolas" panose="020B0609020204030204" pitchFamily="49" charset="0"/>
+              </a:rPr>
+              <a:t>    </a:t>
+            </a:r>
+            <a:r>
+              <a:rPr lang="en-US" altLang="ko-KR" sz="1200" b="0">
+                <a:solidFill>
+                  <a:srgbClr val="569CD6"/>
+                </a:solidFill>
+                <a:effectLst/>
+                <a:latin typeface="Consolas" panose="020B0609020204030204" pitchFamily="49" charset="0"/>
+              </a:rPr>
+              <a:t>private</a:t>
+            </a:r>
+            <a:r>
+              <a:rPr lang="en-US" altLang="ko-KR" sz="1200" b="0">
+                <a:solidFill>
+                  <a:srgbClr val="BBBEBF"/>
+                </a:solidFill>
+                <a:effectLst/>
+                <a:latin typeface="Consolas" panose="020B0609020204030204" pitchFamily="49" charset="0"/>
+              </a:rPr>
+              <a:t> </a:t>
+            </a:r>
+            <a:r>
+              <a:rPr lang="en-US" altLang="ko-KR" sz="1200" b="0">
+                <a:solidFill>
+                  <a:srgbClr val="569CD6"/>
+                </a:solidFill>
+                <a:effectLst/>
+                <a:latin typeface="Consolas" panose="020B0609020204030204" pitchFamily="49" charset="0"/>
+              </a:rPr>
+              <a:t>final</a:t>
+            </a:r>
+            <a:r>
+              <a:rPr lang="en-US" altLang="ko-KR" sz="1200" b="0">
+                <a:solidFill>
+                  <a:srgbClr val="BBBEBF"/>
+                </a:solidFill>
+                <a:effectLst/>
+                <a:latin typeface="Consolas" panose="020B0609020204030204" pitchFamily="49" charset="0"/>
+              </a:rPr>
+              <a:t> </a:t>
+            </a:r>
+            <a:r>
+              <a:rPr lang="en-US" altLang="ko-KR" sz="1200" b="0">
+                <a:solidFill>
+                  <a:srgbClr val="4EC9B0"/>
+                </a:solidFill>
+                <a:effectLst/>
+                <a:latin typeface="Consolas" panose="020B0609020204030204" pitchFamily="49" charset="0"/>
+              </a:rPr>
+              <a:t>BoardService</a:t>
+            </a:r>
+            <a:r>
+              <a:rPr lang="en-US" altLang="ko-KR" sz="1200" b="0">
+                <a:solidFill>
+                  <a:srgbClr val="FFA657"/>
+                </a:solidFill>
+                <a:effectLst/>
+                <a:latin typeface="Consolas" panose="020B0609020204030204" pitchFamily="49" charset="0"/>
+              </a:rPr>
+              <a:t> </a:t>
+            </a:r>
+            <a:r>
+              <a:rPr lang="en-US" altLang="ko-KR" sz="1200" b="0">
+                <a:solidFill>
+                  <a:srgbClr val="79C0FF"/>
+                </a:solidFill>
+                <a:effectLst/>
+                <a:latin typeface="Consolas" panose="020B0609020204030204" pitchFamily="49" charset="0"/>
+              </a:rPr>
+              <a:t>boardService</a:t>
+            </a:r>
+            <a:r>
+              <a:rPr lang="en-US" altLang="ko-KR" sz="1200" b="0">
+                <a:solidFill>
+                  <a:srgbClr val="BBBEBF"/>
+                </a:solidFill>
+                <a:effectLst/>
+                <a:latin typeface="Consolas" panose="020B0609020204030204" pitchFamily="49" charset="0"/>
+              </a:rPr>
+              <a:t>;</a:t>
+            </a:r>
+          </a:p>
+          <a:p>
+            <a:pPr>
+              <a:lnSpc>
+                <a:spcPts val="1425"/>
+              </a:lnSpc>
+              <a:buNone/>
+            </a:pPr>
+            <a:r>
+              <a:rPr lang="en-US" altLang="ko-KR" sz="1200" b="0">
+                <a:solidFill>
+                  <a:srgbClr val="BBBEBF"/>
+                </a:solidFill>
+                <a:effectLst/>
+                <a:latin typeface="Consolas" panose="020B0609020204030204" pitchFamily="49" charset="0"/>
+              </a:rPr>
+              <a:t>    </a:t>
+            </a:r>
+            <a:r>
+              <a:rPr lang="en-US" altLang="ko-KR" sz="1200" b="0">
+                <a:solidFill>
+                  <a:srgbClr val="569CD6"/>
+                </a:solidFill>
+                <a:effectLst/>
+                <a:latin typeface="Consolas" panose="020B0609020204030204" pitchFamily="49" charset="0"/>
+              </a:rPr>
+              <a:t>public</a:t>
+            </a:r>
+            <a:r>
+              <a:rPr lang="en-US" altLang="ko-KR" sz="1200" b="0">
+                <a:solidFill>
+                  <a:srgbClr val="BBBEBF"/>
+                </a:solidFill>
+                <a:effectLst/>
+                <a:latin typeface="Consolas" panose="020B0609020204030204" pitchFamily="49" charset="0"/>
+              </a:rPr>
+              <a:t> </a:t>
+            </a:r>
+            <a:r>
+              <a:rPr lang="en-US" altLang="ko-KR" sz="1200" b="0">
+                <a:solidFill>
+                  <a:srgbClr val="D2A8FF"/>
+                </a:solidFill>
+                <a:effectLst/>
+                <a:latin typeface="Consolas" panose="020B0609020204030204" pitchFamily="49" charset="0"/>
+              </a:rPr>
+              <a:t>BoardController</a:t>
+            </a:r>
+            <a:r>
+              <a:rPr lang="en-US" altLang="ko-KR" sz="1200" b="0">
+                <a:solidFill>
+                  <a:srgbClr val="BBBEBF"/>
+                </a:solidFill>
+                <a:effectLst/>
+                <a:latin typeface="Consolas" panose="020B0609020204030204" pitchFamily="49" charset="0"/>
+              </a:rPr>
+              <a:t>(</a:t>
+            </a:r>
+            <a:r>
+              <a:rPr lang="en-US" altLang="ko-KR" sz="1200" b="0">
+                <a:solidFill>
+                  <a:srgbClr val="4EC9B0"/>
+                </a:solidFill>
+                <a:effectLst/>
+                <a:latin typeface="Consolas" panose="020B0609020204030204" pitchFamily="49" charset="0"/>
+              </a:rPr>
+              <a:t>BoardService</a:t>
+            </a:r>
+            <a:r>
+              <a:rPr lang="en-US" altLang="ko-KR" sz="1200" b="0">
+                <a:solidFill>
+                  <a:srgbClr val="BBBEBF"/>
+                </a:solidFill>
+                <a:effectLst/>
+                <a:latin typeface="Consolas" panose="020B0609020204030204" pitchFamily="49" charset="0"/>
+              </a:rPr>
+              <a:t> </a:t>
+            </a:r>
+            <a:r>
+              <a:rPr lang="en-US" altLang="ko-KR" sz="1200" b="0">
+                <a:solidFill>
+                  <a:srgbClr val="FFA657"/>
+                </a:solidFill>
+                <a:effectLst/>
+                <a:latin typeface="Consolas" panose="020B0609020204030204" pitchFamily="49" charset="0"/>
+              </a:rPr>
+              <a:t>boardService</a:t>
+            </a:r>
+            <a:r>
+              <a:rPr lang="en-US" altLang="ko-KR" sz="1200" b="0">
+                <a:solidFill>
+                  <a:srgbClr val="BBBEBF"/>
+                </a:solidFill>
+                <a:effectLst/>
+                <a:latin typeface="Consolas" panose="020B0609020204030204" pitchFamily="49" charset="0"/>
+              </a:rPr>
+              <a:t>) {</a:t>
+            </a:r>
+          </a:p>
+          <a:p>
+            <a:pPr>
+              <a:lnSpc>
+                <a:spcPts val="1425"/>
+              </a:lnSpc>
+              <a:buNone/>
+            </a:pPr>
+            <a:r>
+              <a:rPr lang="en-US" altLang="ko-KR" sz="1200" b="0">
+                <a:solidFill>
+                  <a:srgbClr val="BBBEBF"/>
+                </a:solidFill>
+                <a:effectLst/>
+                <a:latin typeface="Consolas" panose="020B0609020204030204" pitchFamily="49" charset="0"/>
+              </a:rPr>
+              <a:t>        </a:t>
+            </a:r>
+            <a:r>
+              <a:rPr lang="en-US" altLang="ko-KR" sz="1200" b="0">
+                <a:solidFill>
+                  <a:srgbClr val="79C0FF"/>
+                </a:solidFill>
+                <a:effectLst/>
+                <a:latin typeface="Consolas" panose="020B0609020204030204" pitchFamily="49" charset="0"/>
+              </a:rPr>
+              <a:t>this</a:t>
+            </a:r>
+            <a:r>
+              <a:rPr lang="en-US" altLang="ko-KR" sz="1200" b="0">
+                <a:solidFill>
+                  <a:srgbClr val="BBBEBF"/>
+                </a:solidFill>
+                <a:effectLst/>
+                <a:latin typeface="Consolas" panose="020B0609020204030204" pitchFamily="49" charset="0"/>
+              </a:rPr>
+              <a:t>.</a:t>
+            </a:r>
+            <a:r>
+              <a:rPr lang="en-US" altLang="ko-KR" sz="1200" b="0">
+                <a:solidFill>
+                  <a:srgbClr val="79C0FF"/>
+                </a:solidFill>
+                <a:effectLst/>
+                <a:latin typeface="Consolas" panose="020B0609020204030204" pitchFamily="49" charset="0"/>
+              </a:rPr>
+              <a:t>boardService</a:t>
+            </a:r>
+            <a:r>
+              <a:rPr lang="en-US" altLang="ko-KR" sz="1200" b="0">
+                <a:solidFill>
+                  <a:srgbClr val="BBBEBF"/>
+                </a:solidFill>
+                <a:effectLst/>
+                <a:latin typeface="Consolas" panose="020B0609020204030204" pitchFamily="49" charset="0"/>
+              </a:rPr>
+              <a:t> </a:t>
+            </a:r>
+            <a:r>
+              <a:rPr lang="en-US" altLang="ko-KR" sz="1200" b="0">
+                <a:solidFill>
+                  <a:srgbClr val="D4D4D4"/>
+                </a:solidFill>
+                <a:effectLst/>
+                <a:latin typeface="Consolas" panose="020B0609020204030204" pitchFamily="49" charset="0"/>
+              </a:rPr>
+              <a:t>=</a:t>
+            </a:r>
+            <a:r>
+              <a:rPr lang="en-US" altLang="ko-KR" sz="1200" b="0">
+                <a:solidFill>
+                  <a:srgbClr val="BBBEBF"/>
+                </a:solidFill>
+                <a:effectLst/>
+                <a:latin typeface="Consolas" panose="020B0609020204030204" pitchFamily="49" charset="0"/>
+              </a:rPr>
+              <a:t> </a:t>
+            </a:r>
+            <a:r>
+              <a:rPr lang="en-US" altLang="ko-KR" sz="1200" b="0">
+                <a:solidFill>
+                  <a:srgbClr val="FFA657"/>
+                </a:solidFill>
+                <a:effectLst/>
+                <a:latin typeface="Consolas" panose="020B0609020204030204" pitchFamily="49" charset="0"/>
+              </a:rPr>
+              <a:t>boardService</a:t>
+            </a:r>
+            <a:r>
+              <a:rPr lang="en-US" altLang="ko-KR" sz="1200" b="0">
+                <a:solidFill>
+                  <a:srgbClr val="BBBEBF"/>
+                </a:solidFill>
+                <a:effectLst/>
+                <a:latin typeface="Consolas" panose="020B0609020204030204" pitchFamily="49" charset="0"/>
+              </a:rPr>
+              <a:t>;</a:t>
+            </a:r>
+          </a:p>
+          <a:p>
+            <a:pPr>
+              <a:lnSpc>
+                <a:spcPts val="1425"/>
+              </a:lnSpc>
+              <a:buNone/>
+            </a:pPr>
+            <a:r>
+              <a:rPr lang="en-US" altLang="ko-KR" sz="1200" b="0">
+                <a:solidFill>
+                  <a:srgbClr val="BBBEBF"/>
+                </a:solidFill>
+                <a:effectLst/>
+                <a:latin typeface="Consolas" panose="020B0609020204030204" pitchFamily="49" charset="0"/>
+              </a:rPr>
+              <a:t>    }</a:t>
+            </a:r>
+          </a:p>
+          <a:p>
+            <a:pPr>
+              <a:lnSpc>
+                <a:spcPts val="1425"/>
+              </a:lnSpc>
+              <a:buNone/>
+            </a:pPr>
+            <a:br>
+              <a:rPr lang="en-US" altLang="ko-KR" sz="1200" b="0">
+                <a:solidFill>
+                  <a:srgbClr val="BBBEBF"/>
+                </a:solidFill>
+                <a:effectLst/>
+                <a:latin typeface="Consolas" panose="020B0609020204030204" pitchFamily="49" charset="0"/>
+              </a:rPr>
+            </a:br>
+            <a:endParaRPr lang="en-US" altLang="ko-KR" sz="1200" b="0">
+              <a:solidFill>
+                <a:srgbClr val="BBBEBF"/>
+              </a:solidFill>
+              <a:effectLst/>
+              <a:latin typeface="Consolas" panose="020B0609020204030204" pitchFamily="49" charset="0"/>
+            </a:endParaRPr>
+          </a:p>
+          <a:p>
+            <a:pPr>
+              <a:lnSpc>
+                <a:spcPts val="1425"/>
+              </a:lnSpc>
+              <a:buNone/>
+            </a:pPr>
+            <a:r>
+              <a:rPr lang="en-US" altLang="ko-KR" sz="1200" b="0">
+                <a:solidFill>
+                  <a:srgbClr val="BBBEBF"/>
+                </a:solidFill>
+                <a:effectLst/>
+                <a:latin typeface="Consolas" panose="020B0609020204030204" pitchFamily="49" charset="0"/>
+              </a:rPr>
+              <a:t>    @</a:t>
+            </a:r>
+            <a:r>
+              <a:rPr lang="en-US" altLang="ko-KR" sz="1200" b="0">
+                <a:solidFill>
+                  <a:srgbClr val="4EC9B0"/>
+                </a:solidFill>
+                <a:effectLst/>
+                <a:latin typeface="Consolas" panose="020B0609020204030204" pitchFamily="49" charset="0"/>
+              </a:rPr>
+              <a:t>PostMapping</a:t>
+            </a:r>
+            <a:endParaRPr lang="en-US" altLang="ko-KR" sz="1200" b="0">
+              <a:solidFill>
+                <a:srgbClr val="BBBEBF"/>
+              </a:solidFill>
+              <a:effectLst/>
+              <a:latin typeface="Consolas" panose="020B0609020204030204" pitchFamily="49" charset="0"/>
+            </a:endParaRPr>
+          </a:p>
+          <a:p>
+            <a:pPr>
+              <a:lnSpc>
+                <a:spcPts val="1425"/>
+              </a:lnSpc>
+              <a:buNone/>
+            </a:pPr>
+            <a:r>
+              <a:rPr lang="en-US" altLang="ko-KR" sz="1200" b="0">
+                <a:solidFill>
+                  <a:srgbClr val="BBBEBF"/>
+                </a:solidFill>
+                <a:effectLst/>
+                <a:latin typeface="Consolas" panose="020B0609020204030204" pitchFamily="49" charset="0"/>
+              </a:rPr>
+              <a:t>    </a:t>
+            </a:r>
+            <a:r>
+              <a:rPr lang="en-US" altLang="ko-KR" sz="1200" b="0">
+                <a:solidFill>
+                  <a:srgbClr val="569CD6"/>
+                </a:solidFill>
+                <a:effectLst/>
+                <a:latin typeface="Consolas" panose="020B0609020204030204" pitchFamily="49" charset="0"/>
+              </a:rPr>
+              <a:t>public</a:t>
+            </a:r>
+            <a:r>
+              <a:rPr lang="en-US" altLang="ko-KR" sz="1200" b="0">
+                <a:solidFill>
+                  <a:srgbClr val="BBBEBF"/>
+                </a:solidFill>
+                <a:effectLst/>
+                <a:latin typeface="Consolas" panose="020B0609020204030204" pitchFamily="49" charset="0"/>
+              </a:rPr>
+              <a:t> </a:t>
+            </a:r>
+            <a:r>
+              <a:rPr lang="en-US" altLang="ko-KR" sz="1200" b="0">
+                <a:solidFill>
+                  <a:srgbClr val="4EC9B0"/>
+                </a:solidFill>
+                <a:effectLst/>
+                <a:latin typeface="Consolas" panose="020B0609020204030204" pitchFamily="49" charset="0"/>
+              </a:rPr>
+              <a:t>ResponseEntity</a:t>
+            </a:r>
+            <a:r>
+              <a:rPr lang="en-US" altLang="ko-KR" sz="1200" b="0">
+                <a:solidFill>
+                  <a:srgbClr val="BBBEBF"/>
+                </a:solidFill>
+                <a:effectLst/>
+                <a:latin typeface="Consolas" panose="020B0609020204030204" pitchFamily="49" charset="0"/>
+              </a:rPr>
+              <a:t>&lt;</a:t>
+            </a:r>
+            <a:r>
+              <a:rPr lang="en-US" altLang="ko-KR" sz="1200" b="0">
+                <a:solidFill>
+                  <a:srgbClr val="4EC9B0"/>
+                </a:solidFill>
+                <a:effectLst/>
+                <a:latin typeface="Consolas" panose="020B0609020204030204" pitchFamily="49" charset="0"/>
+              </a:rPr>
+              <a:t>Void</a:t>
+            </a:r>
+            <a:r>
+              <a:rPr lang="en-US" altLang="ko-KR" sz="1200" b="0">
+                <a:solidFill>
+                  <a:srgbClr val="BBBEBF"/>
+                </a:solidFill>
+                <a:effectLst/>
+                <a:latin typeface="Consolas" panose="020B0609020204030204" pitchFamily="49" charset="0"/>
+              </a:rPr>
+              <a:t>&gt; </a:t>
+            </a:r>
+            <a:r>
+              <a:rPr lang="en-US" altLang="ko-KR" sz="1200" b="0">
+                <a:solidFill>
+                  <a:srgbClr val="D2A8FF"/>
+                </a:solidFill>
+                <a:effectLst/>
+                <a:latin typeface="Consolas" panose="020B0609020204030204" pitchFamily="49" charset="0"/>
+              </a:rPr>
+              <a:t>createBoard</a:t>
+            </a:r>
+            <a:r>
+              <a:rPr lang="en-US" altLang="ko-KR" sz="1200" b="0">
+                <a:solidFill>
+                  <a:srgbClr val="BBBEBF"/>
+                </a:solidFill>
+                <a:effectLst/>
+                <a:latin typeface="Consolas" panose="020B0609020204030204" pitchFamily="49" charset="0"/>
+              </a:rPr>
+              <a:t>(</a:t>
+            </a:r>
+          </a:p>
+          <a:p>
+            <a:pPr>
+              <a:lnSpc>
+                <a:spcPts val="1425"/>
+              </a:lnSpc>
+              <a:buNone/>
+            </a:pPr>
+            <a:r>
+              <a:rPr lang="en-US" altLang="ko-KR" sz="1200" b="0">
+                <a:solidFill>
+                  <a:srgbClr val="BBBEBF"/>
+                </a:solidFill>
+                <a:effectLst/>
+                <a:latin typeface="Consolas" panose="020B0609020204030204" pitchFamily="49" charset="0"/>
+              </a:rPr>
+              <a:t>        @</a:t>
+            </a:r>
+            <a:r>
+              <a:rPr lang="en-US" altLang="ko-KR" sz="1200" b="0">
+                <a:solidFill>
+                  <a:srgbClr val="4EC9B0"/>
+                </a:solidFill>
+                <a:effectLst/>
+                <a:latin typeface="Consolas" panose="020B0609020204030204" pitchFamily="49" charset="0"/>
+              </a:rPr>
+              <a:t>RequestBody</a:t>
+            </a:r>
+            <a:r>
+              <a:rPr lang="en-US" altLang="ko-KR" sz="1200" b="0">
+                <a:solidFill>
+                  <a:srgbClr val="BBBEBF"/>
+                </a:solidFill>
+                <a:effectLst/>
+                <a:latin typeface="Consolas" panose="020B0609020204030204" pitchFamily="49" charset="0"/>
+              </a:rPr>
+              <a:t> </a:t>
+            </a:r>
+            <a:r>
+              <a:rPr lang="en-US" altLang="ko-KR" sz="1200" b="0">
+                <a:solidFill>
+                  <a:srgbClr val="4EC9B0"/>
+                </a:solidFill>
+                <a:effectLst/>
+                <a:latin typeface="Consolas" panose="020B0609020204030204" pitchFamily="49" charset="0"/>
+              </a:rPr>
+              <a:t>CreateBoardRequestDto</a:t>
+            </a:r>
+            <a:r>
+              <a:rPr lang="en-US" altLang="ko-KR" sz="1200" b="0">
+                <a:solidFill>
+                  <a:srgbClr val="BBBEBF"/>
+                </a:solidFill>
+                <a:effectLst/>
+                <a:latin typeface="Consolas" panose="020B0609020204030204" pitchFamily="49" charset="0"/>
+              </a:rPr>
+              <a:t> </a:t>
+            </a:r>
+            <a:r>
+              <a:rPr lang="en-US" altLang="ko-KR" sz="1200" b="0">
+                <a:solidFill>
+                  <a:srgbClr val="FFA657"/>
+                </a:solidFill>
+                <a:effectLst/>
+                <a:latin typeface="Consolas" panose="020B0609020204030204" pitchFamily="49" charset="0"/>
+              </a:rPr>
+              <a:t>createBoardRequestDto</a:t>
+            </a:r>
+            <a:endParaRPr lang="en-US" altLang="ko-KR" sz="1200" b="0">
+              <a:solidFill>
+                <a:srgbClr val="BBBEBF"/>
+              </a:solidFill>
+              <a:effectLst/>
+              <a:latin typeface="Consolas" panose="020B0609020204030204" pitchFamily="49" charset="0"/>
+            </a:endParaRPr>
+          </a:p>
+          <a:p>
+            <a:pPr>
+              <a:lnSpc>
+                <a:spcPts val="1425"/>
+              </a:lnSpc>
+              <a:buNone/>
+            </a:pPr>
+            <a:r>
+              <a:rPr lang="en-US" altLang="ko-KR" sz="1200" b="0">
+                <a:solidFill>
+                  <a:srgbClr val="BBBEBF"/>
+                </a:solidFill>
+                <a:effectLst/>
+                <a:latin typeface="Consolas" panose="020B0609020204030204" pitchFamily="49" charset="0"/>
+              </a:rPr>
+              <a:t>    ) {</a:t>
+            </a:r>
+          </a:p>
+          <a:p>
+            <a:pPr>
+              <a:lnSpc>
+                <a:spcPts val="1425"/>
+              </a:lnSpc>
+              <a:buNone/>
+            </a:pPr>
+            <a:r>
+              <a:rPr lang="en-US" altLang="ko-KR" sz="1200" b="0">
+                <a:solidFill>
+                  <a:srgbClr val="BBBEBF"/>
+                </a:solidFill>
+                <a:effectLst/>
+                <a:latin typeface="Consolas" panose="020B0609020204030204" pitchFamily="49" charset="0"/>
+              </a:rPr>
+              <a:t>        </a:t>
+            </a:r>
+            <a:r>
+              <a:rPr lang="en-US" altLang="ko-KR" sz="1200" b="0">
+                <a:solidFill>
+                  <a:srgbClr val="79C0FF"/>
+                </a:solidFill>
+                <a:effectLst/>
+                <a:latin typeface="Consolas" panose="020B0609020204030204" pitchFamily="49" charset="0"/>
+              </a:rPr>
+              <a:t>boardService</a:t>
+            </a:r>
+            <a:r>
+              <a:rPr lang="en-US" altLang="ko-KR" sz="1200" b="0">
+                <a:solidFill>
+                  <a:srgbClr val="BBBEBF"/>
+                </a:solidFill>
+                <a:effectLst/>
+                <a:latin typeface="Consolas" panose="020B0609020204030204" pitchFamily="49" charset="0"/>
+              </a:rPr>
+              <a:t>.</a:t>
+            </a:r>
+            <a:r>
+              <a:rPr lang="en-US" altLang="ko-KR" sz="1200" b="0">
+                <a:solidFill>
+                  <a:srgbClr val="D2A8FF"/>
+                </a:solidFill>
+                <a:effectLst/>
+                <a:latin typeface="Consolas" panose="020B0609020204030204" pitchFamily="49" charset="0"/>
+              </a:rPr>
+              <a:t>create</a:t>
+            </a:r>
+            <a:r>
+              <a:rPr lang="en-US" altLang="ko-KR" sz="1200" b="0">
+                <a:solidFill>
+                  <a:srgbClr val="BBBEBF"/>
+                </a:solidFill>
+                <a:effectLst/>
+                <a:latin typeface="Consolas" panose="020B0609020204030204" pitchFamily="49" charset="0"/>
+              </a:rPr>
+              <a:t>(</a:t>
+            </a:r>
+            <a:r>
+              <a:rPr lang="en-US" altLang="ko-KR" sz="1200" b="0">
+                <a:solidFill>
+                  <a:srgbClr val="FFA657"/>
+                </a:solidFill>
+                <a:effectLst/>
+                <a:latin typeface="Consolas" panose="020B0609020204030204" pitchFamily="49" charset="0"/>
+              </a:rPr>
+              <a:t>createBoardRequestDto</a:t>
+            </a:r>
+            <a:r>
+              <a:rPr lang="en-US" altLang="ko-KR" sz="1200" b="0">
+                <a:solidFill>
+                  <a:srgbClr val="BBBEBF"/>
+                </a:solidFill>
+                <a:effectLst/>
+                <a:latin typeface="Consolas" panose="020B0609020204030204" pitchFamily="49" charset="0"/>
+              </a:rPr>
+              <a:t>);</a:t>
+            </a:r>
+          </a:p>
+          <a:p>
+            <a:pPr>
+              <a:lnSpc>
+                <a:spcPts val="1425"/>
+              </a:lnSpc>
+              <a:buNone/>
+            </a:pPr>
+            <a:r>
+              <a:rPr lang="en-US" altLang="ko-KR" sz="1200" b="0">
+                <a:solidFill>
+                  <a:srgbClr val="BBBEBF"/>
+                </a:solidFill>
+                <a:effectLst/>
+                <a:latin typeface="Consolas" panose="020B0609020204030204" pitchFamily="49" charset="0"/>
+              </a:rPr>
+              <a:t>        </a:t>
+            </a:r>
+            <a:r>
+              <a:rPr lang="en-US" altLang="ko-KR" sz="1200" b="0">
+                <a:solidFill>
+                  <a:srgbClr val="C586C0"/>
+                </a:solidFill>
+                <a:effectLst/>
+                <a:latin typeface="Consolas" panose="020B0609020204030204" pitchFamily="49" charset="0"/>
+              </a:rPr>
+              <a:t>return</a:t>
+            </a:r>
+            <a:r>
+              <a:rPr lang="en-US" altLang="ko-KR" sz="1200" b="0">
+                <a:solidFill>
+                  <a:srgbClr val="BBBEBF"/>
+                </a:solidFill>
+                <a:effectLst/>
+                <a:latin typeface="Consolas" panose="020B0609020204030204" pitchFamily="49" charset="0"/>
+              </a:rPr>
+              <a:t> </a:t>
+            </a:r>
+            <a:r>
+              <a:rPr lang="en-US" altLang="ko-KR" sz="1200" b="0">
+                <a:solidFill>
+                  <a:srgbClr val="4EC9B0"/>
+                </a:solidFill>
+                <a:effectLst/>
+                <a:latin typeface="Consolas" panose="020B0609020204030204" pitchFamily="49" charset="0"/>
+              </a:rPr>
+              <a:t>ResponseEntity</a:t>
+            </a:r>
+            <a:r>
+              <a:rPr lang="en-US" altLang="ko-KR" sz="1200" b="0">
+                <a:solidFill>
+                  <a:srgbClr val="BBBEBF"/>
+                </a:solidFill>
+                <a:effectLst/>
+                <a:latin typeface="Consolas" panose="020B0609020204030204" pitchFamily="49" charset="0"/>
+              </a:rPr>
+              <a:t>.</a:t>
+            </a:r>
+            <a:r>
+              <a:rPr lang="en-US" altLang="ko-KR" sz="1200" b="0">
+                <a:solidFill>
+                  <a:srgbClr val="D2A8FF"/>
+                </a:solidFill>
+                <a:effectLst/>
+                <a:latin typeface="Consolas" panose="020B0609020204030204" pitchFamily="49" charset="0"/>
+              </a:rPr>
+              <a:t>noContent</a:t>
+            </a:r>
+            <a:r>
+              <a:rPr lang="en-US" altLang="ko-KR" sz="1200" b="0">
+                <a:solidFill>
+                  <a:srgbClr val="BBBEBF"/>
+                </a:solidFill>
+                <a:effectLst/>
+                <a:latin typeface="Consolas" panose="020B0609020204030204" pitchFamily="49" charset="0"/>
+              </a:rPr>
+              <a:t>().</a:t>
+            </a:r>
+            <a:r>
+              <a:rPr lang="en-US" altLang="ko-KR" sz="1200" b="0">
+                <a:solidFill>
+                  <a:srgbClr val="D2A8FF"/>
+                </a:solidFill>
+                <a:effectLst/>
+                <a:latin typeface="Consolas" panose="020B0609020204030204" pitchFamily="49" charset="0"/>
+              </a:rPr>
+              <a:t>build</a:t>
+            </a:r>
+            <a:r>
+              <a:rPr lang="en-US" altLang="ko-KR" sz="1200" b="0">
+                <a:solidFill>
+                  <a:srgbClr val="BBBEBF"/>
+                </a:solidFill>
+                <a:effectLst/>
+                <a:latin typeface="Consolas" panose="020B0609020204030204" pitchFamily="49" charset="0"/>
+              </a:rPr>
+              <a:t>();</a:t>
+            </a:r>
+          </a:p>
+          <a:p>
+            <a:pPr>
+              <a:lnSpc>
+                <a:spcPts val="1425"/>
+              </a:lnSpc>
+              <a:buNone/>
+            </a:pPr>
+            <a:r>
+              <a:rPr lang="en-US" altLang="ko-KR" sz="1200" b="0">
+                <a:solidFill>
+                  <a:srgbClr val="BBBEBF"/>
+                </a:solidFill>
+                <a:effectLst/>
+                <a:latin typeface="Consolas" panose="020B0609020204030204" pitchFamily="49" charset="0"/>
+              </a:rPr>
+              <a:t>    }</a:t>
+            </a:r>
+          </a:p>
+          <a:p>
+            <a:pPr>
+              <a:lnSpc>
+                <a:spcPts val="1425"/>
+              </a:lnSpc>
+              <a:buNone/>
+            </a:pPr>
+            <a:r>
+              <a:rPr lang="en-US" altLang="ko-KR" sz="1200" b="0">
+                <a:solidFill>
+                  <a:srgbClr val="BBBEBF"/>
+                </a:solidFill>
+                <a:effectLst/>
+                <a:latin typeface="Consolas" panose="020B0609020204030204" pitchFamily="49" charset="0"/>
+              </a:rPr>
+              <a:t>}</a:t>
+            </a:r>
+          </a:p>
+        </p:txBody>
+      </p:sp>
+      <p:sp>
+        <p:nvSpPr>
+          <p:cNvPr id="9" name="TextBox 8">
+            <a:extLst>
+              <a:ext uri="{FF2B5EF4-FFF2-40B4-BE49-F238E27FC236}">
+                <a16:creationId xmlns:a16="http://schemas.microsoft.com/office/drawing/2014/main" id="{C3E21D97-D1AC-7B2B-E8BB-2C1A26B565B8}"/>
+              </a:ext>
+            </a:extLst>
+          </p:cNvPr>
+          <p:cNvSpPr txBox="1"/>
+          <p:nvPr/>
+        </p:nvSpPr>
+        <p:spPr>
+          <a:xfrm>
+            <a:off x="3079242" y="5541264"/>
+            <a:ext cx="8551926" cy="738664"/>
+          </a:xfrm>
+          <a:prstGeom prst="rect">
+            <a:avLst/>
+          </a:prstGeom>
+          <a:noFill/>
+        </p:spPr>
+        <p:txBody>
+          <a:bodyPr wrap="square" rtlCol="0">
+            <a:spAutoFit/>
+          </a:bodyPr>
+          <a:lstStyle/>
+          <a:p>
+            <a:r>
+              <a:rPr lang="en-US" altLang="ko-KR" sz="1400"/>
+              <a:t>1. createBoard </a:t>
+            </a:r>
+            <a:r>
+              <a:rPr lang="ko-KR" altLang="en-US" sz="1400"/>
+              <a:t>메소드의 </a:t>
+            </a:r>
+            <a:r>
+              <a:rPr lang="en-US" altLang="ko-KR" sz="1400"/>
+              <a:t>@PostMapping </a:t>
+            </a:r>
+            <a:r>
+              <a:rPr lang="ko-KR" altLang="en-US" sz="1400"/>
+              <a:t>주소가 언급되어있지 않다</a:t>
+            </a:r>
+            <a:r>
+              <a:rPr lang="en-US" altLang="ko-KR" sz="1400"/>
+              <a:t>. </a:t>
+            </a:r>
+            <a:br>
+              <a:rPr lang="en-US" altLang="ko-KR" sz="1400"/>
+            </a:br>
+            <a:r>
+              <a:rPr lang="en-US" altLang="ko-KR" sz="1400"/>
+              <a:t>    </a:t>
+            </a:r>
+            <a:r>
+              <a:rPr lang="en-US" altLang="ko-KR" sz="1400">
+                <a:sym typeface="Wingdings" panose="05000000000000000000" pitchFamily="2" charset="2"/>
+              </a:rPr>
+              <a:t> </a:t>
+            </a:r>
+            <a:r>
+              <a:rPr lang="en-US" altLang="ko-KR" sz="1400">
+                <a:sym typeface="Wingdings" panose="05000000000000000000" pitchFamily="2" charset="2"/>
+                <a:hlinkClick r:id="rId3"/>
+              </a:rPr>
+              <a:t>http://localhost:8081/boards</a:t>
+            </a:r>
+            <a:r>
+              <a:rPr lang="en-US" altLang="ko-KR" sz="1400">
+                <a:sym typeface="Wingdings" panose="05000000000000000000" pitchFamily="2" charset="2"/>
+              </a:rPr>
+              <a:t> </a:t>
+            </a:r>
+            <a:r>
+              <a:rPr lang="ko-KR" altLang="en-US" sz="1400">
+                <a:sym typeface="Wingdings" panose="05000000000000000000" pitchFamily="2" charset="2"/>
+              </a:rPr>
+              <a:t>가 </a:t>
+            </a:r>
+            <a:r>
+              <a:rPr lang="en-US" altLang="ko-KR" sz="1400">
+                <a:sym typeface="Wingdings" panose="05000000000000000000" pitchFamily="2" charset="2"/>
+              </a:rPr>
+              <a:t>createBoard</a:t>
+            </a:r>
+            <a:r>
+              <a:rPr lang="ko-KR" altLang="en-US" sz="1400">
+                <a:sym typeface="Wingdings" panose="05000000000000000000" pitchFamily="2" charset="2"/>
+              </a:rPr>
+              <a:t> 메소드의 주소이다</a:t>
+            </a:r>
+            <a:r>
+              <a:rPr lang="en-US" altLang="ko-KR" sz="1400">
+                <a:sym typeface="Wingdings" panose="05000000000000000000" pitchFamily="2" charset="2"/>
+              </a:rPr>
+              <a:t>.</a:t>
+            </a:r>
+            <a:endParaRPr lang="en-US" altLang="ko-KR" sz="1400"/>
+          </a:p>
+          <a:p>
+            <a:endParaRPr lang="ko-KR" altLang="en-US" sz="1400"/>
+          </a:p>
+        </p:txBody>
+      </p:sp>
+    </p:spTree>
+    <p:extLst>
+      <p:ext uri="{BB962C8B-B14F-4D97-AF65-F5344CB8AC3E}">
+        <p14:creationId xmlns:p14="http://schemas.microsoft.com/office/powerpoint/2010/main" val="3540541429"/>
+      </p:ext>
+    </p:extLst>
+  </p:cSld>
+  <p:clrMapOvr>
+    <a:masterClrMapping/>
+  </p:clrMapOvr>
+</p:sld>
+</file>
+
+<file path=ppt/slides/slide26.xml><?xml version="1.0" encoding="utf-8"?>
+<p:sld xmlns:a="http://schemas.openxmlformats.org/drawingml/2006/main" xmlns:r="http://schemas.openxmlformats.org/officeDocument/2006/relationships" xmlns:p="http://schemas.openxmlformats.org/presentationml/2006/main">
+  <p:cSld>
+    <p:spTree>
+      <p:nvGrpSpPr>
+        <p:cNvPr id="1" name="">
+          <a:extLst>
+            <a:ext uri="{FF2B5EF4-FFF2-40B4-BE49-F238E27FC236}">
+              <a16:creationId xmlns:a16="http://schemas.microsoft.com/office/drawing/2014/main" id="{A64791B9-005D-6EB3-B5B7-8387BCCD4F0B}"/>
+            </a:ext>
+          </a:extLst>
+        </p:cNvPr>
+        <p:cNvGrpSpPr/>
+        <p:nvPr/>
+      </p:nvGrpSpPr>
+      <p:grpSpPr>
+        <a:xfrm>
+          <a:off x="0" y="0"/>
+          <a:ext cx="0" cy="0"/>
+          <a:chOff x="0" y="0"/>
+          <a:chExt cx="0" cy="0"/>
+        </a:xfrm>
+      </p:grpSpPr>
+      <p:sp>
+        <p:nvSpPr>
+          <p:cNvPr id="2" name="제목 1">
+            <a:extLst>
+              <a:ext uri="{FF2B5EF4-FFF2-40B4-BE49-F238E27FC236}">
+                <a16:creationId xmlns:a16="http://schemas.microsoft.com/office/drawing/2014/main" id="{69CC635A-C553-B5FE-5198-1139BDA94D6F}"/>
+              </a:ext>
+            </a:extLst>
+          </p:cNvPr>
+          <p:cNvSpPr>
+            <a:spLocks noGrp="1"/>
+          </p:cNvSpPr>
+          <p:nvPr>
+            <p:ph type="title"/>
+          </p:nvPr>
+        </p:nvSpPr>
+        <p:spPr/>
+        <p:txBody>
+          <a:bodyPr/>
+          <a:lstStyle/>
+          <a:p>
+            <a:r>
+              <a:rPr lang="en-US" altLang="ko-KR"/>
+              <a:t>BoardService </a:t>
+            </a:r>
+            <a:r>
+              <a:rPr lang="ko-KR" altLang="en-US"/>
+              <a:t>작성하기</a:t>
+            </a:r>
+            <a:r>
+              <a:rPr lang="en-US" altLang="ko-KR"/>
+              <a:t>[Service] </a:t>
+            </a:r>
+            <a:endParaRPr lang="ko-KR" altLang="en-US"/>
+          </a:p>
+        </p:txBody>
+      </p:sp>
+      <p:grpSp>
+        <p:nvGrpSpPr>
+          <p:cNvPr id="6" name="그룹 5">
+            <a:extLst>
+              <a:ext uri="{FF2B5EF4-FFF2-40B4-BE49-F238E27FC236}">
+                <a16:creationId xmlns:a16="http://schemas.microsoft.com/office/drawing/2014/main" id="{A38A990E-23F0-6F40-CED7-463259B4D3A1}"/>
+              </a:ext>
+            </a:extLst>
+          </p:cNvPr>
+          <p:cNvGrpSpPr/>
+          <p:nvPr/>
+        </p:nvGrpSpPr>
+        <p:grpSpPr>
+          <a:xfrm>
+            <a:off x="892108" y="1847088"/>
+            <a:ext cx="2068891" cy="4938414"/>
+            <a:chOff x="892108" y="1847088"/>
+            <a:chExt cx="2068891" cy="4938414"/>
+          </a:xfrm>
+        </p:grpSpPr>
+        <p:pic>
+          <p:nvPicPr>
+            <p:cNvPr id="4" name="그림 3">
+              <a:extLst>
+                <a:ext uri="{FF2B5EF4-FFF2-40B4-BE49-F238E27FC236}">
+                  <a16:creationId xmlns:a16="http://schemas.microsoft.com/office/drawing/2014/main" id="{61D78527-36A9-2646-8259-5F204E7D8410}"/>
+                </a:ext>
+              </a:extLst>
+            </p:cNvPr>
+            <p:cNvPicPr>
+              <a:picLocks noChangeAspect="1"/>
+            </p:cNvPicPr>
+            <p:nvPr/>
+          </p:nvPicPr>
+          <p:blipFill>
+            <a:blip r:embed="rId2"/>
+            <a:stretch>
+              <a:fillRect/>
+            </a:stretch>
+          </p:blipFill>
+          <p:spPr>
+            <a:xfrm>
+              <a:off x="892108" y="1847088"/>
+              <a:ext cx="2068891" cy="4938414"/>
+            </a:xfrm>
+            <a:prstGeom prst="rect">
+              <a:avLst/>
+            </a:prstGeom>
+          </p:spPr>
+        </p:pic>
+        <p:sp>
+          <p:nvSpPr>
+            <p:cNvPr id="5" name="직사각형 4">
+              <a:extLst>
+                <a:ext uri="{FF2B5EF4-FFF2-40B4-BE49-F238E27FC236}">
+                  <a16:creationId xmlns:a16="http://schemas.microsoft.com/office/drawing/2014/main" id="{B701BBE8-6C37-48B1-5365-E43289F98BC2}"/>
+                </a:ext>
+              </a:extLst>
+            </p:cNvPr>
+            <p:cNvSpPr/>
+            <p:nvPr/>
+          </p:nvSpPr>
+          <p:spPr>
+            <a:xfrm>
+              <a:off x="1097280" y="4434841"/>
+              <a:ext cx="1005840" cy="292607"/>
+            </a:xfrm>
+            <a:prstGeom prst="rect">
+              <a:avLst/>
+            </a:prstGeom>
+            <a:noFill/>
+            <a:ln>
+              <a:solidFill>
+                <a:srgbClr val="FF0000"/>
+              </a:solidFill>
+            </a:ln>
+          </p:spPr>
+          <p:style>
+            <a:lnRef idx="2">
+              <a:schemeClr val="accent1">
+                <a:shade val="15000"/>
+              </a:schemeClr>
+            </a:lnRef>
+            <a:fillRef idx="1">
+              <a:schemeClr val="accent1"/>
+            </a:fillRef>
+            <a:effectRef idx="0">
+              <a:schemeClr val="accent1"/>
+            </a:effectRef>
+            <a:fontRef idx="minor">
+              <a:schemeClr val="lt1"/>
+            </a:fontRef>
+          </p:style>
+          <p:txBody>
+            <a:bodyPr rtlCol="0" anchor="ctr"/>
+            <a:lstStyle/>
+            <a:p>
+              <a:pPr algn="ctr"/>
+              <a:endParaRPr lang="ko-KR" altLang="en-US"/>
+            </a:p>
+          </p:txBody>
+        </p:sp>
+      </p:grpSp>
+      <p:pic>
+        <p:nvPicPr>
+          <p:cNvPr id="7" name="그림 6">
+            <a:extLst>
+              <a:ext uri="{FF2B5EF4-FFF2-40B4-BE49-F238E27FC236}">
+                <a16:creationId xmlns:a16="http://schemas.microsoft.com/office/drawing/2014/main" id="{76AA898F-535D-86B9-391A-7D103241A94F}"/>
+              </a:ext>
+            </a:extLst>
+          </p:cNvPr>
+          <p:cNvPicPr>
+            <a:picLocks noChangeAspect="1"/>
+          </p:cNvPicPr>
+          <p:nvPr/>
+        </p:nvPicPr>
+        <p:blipFill>
+          <a:blip r:embed="rId3"/>
+          <a:stretch>
+            <a:fillRect/>
+          </a:stretch>
+        </p:blipFill>
+        <p:spPr>
+          <a:xfrm>
+            <a:off x="3129595" y="1847088"/>
+            <a:ext cx="5572903" cy="3010320"/>
+          </a:xfrm>
+          <a:prstGeom prst="rect">
+            <a:avLst/>
+          </a:prstGeom>
+        </p:spPr>
+      </p:pic>
+    </p:spTree>
+    <p:extLst>
+      <p:ext uri="{BB962C8B-B14F-4D97-AF65-F5344CB8AC3E}">
+        <p14:creationId xmlns:p14="http://schemas.microsoft.com/office/powerpoint/2010/main" val="3518985761"/>
+      </p:ext>
+    </p:extLst>
+  </p:cSld>
+  <p:clrMapOvr>
+    <a:masterClrMapping/>
+  </p:clrMapOvr>
+</p:sld>
+</file>
+
+<file path=ppt/slides/slide27.xml><?xml version="1.0" encoding="utf-8"?>
+<p:sld xmlns:a="http://schemas.openxmlformats.org/drawingml/2006/main" xmlns:r="http://schemas.openxmlformats.org/officeDocument/2006/relationships" xmlns:p="http://schemas.openxmlformats.org/presentationml/2006/main">
+  <p:cSld>
+    <p:spTree>
+      <p:nvGrpSpPr>
+        <p:cNvPr id="1" name="">
+          <a:extLst>
+            <a:ext uri="{FF2B5EF4-FFF2-40B4-BE49-F238E27FC236}">
+              <a16:creationId xmlns:a16="http://schemas.microsoft.com/office/drawing/2014/main" id="{470CB3B7-EDA9-4559-0AA7-D2A4B3E37DFD}"/>
+            </a:ext>
+          </a:extLst>
+        </p:cNvPr>
+        <p:cNvGrpSpPr/>
+        <p:nvPr/>
+      </p:nvGrpSpPr>
+      <p:grpSpPr>
+        <a:xfrm>
+          <a:off x="0" y="0"/>
+          <a:ext cx="0" cy="0"/>
+          <a:chOff x="0" y="0"/>
+          <a:chExt cx="0" cy="0"/>
+        </a:xfrm>
+      </p:grpSpPr>
+      <p:sp>
+        <p:nvSpPr>
+          <p:cNvPr id="2" name="제목 1">
+            <a:extLst>
+              <a:ext uri="{FF2B5EF4-FFF2-40B4-BE49-F238E27FC236}">
+                <a16:creationId xmlns:a16="http://schemas.microsoft.com/office/drawing/2014/main" id="{ADC6FE85-E498-4CF1-A066-B5BD4B129518}"/>
+              </a:ext>
+            </a:extLst>
+          </p:cNvPr>
+          <p:cNvSpPr>
+            <a:spLocks noGrp="1"/>
+          </p:cNvSpPr>
+          <p:nvPr>
+            <p:ph type="title"/>
+          </p:nvPr>
+        </p:nvSpPr>
+        <p:spPr/>
+        <p:txBody>
+          <a:bodyPr/>
+          <a:lstStyle/>
+          <a:p>
+            <a:r>
+              <a:rPr lang="en-US" altLang="ko-KR"/>
+              <a:t>BoardService </a:t>
+            </a:r>
+            <a:r>
+              <a:rPr lang="ko-KR" altLang="en-US"/>
+              <a:t>작성하기</a:t>
+            </a:r>
+            <a:r>
+              <a:rPr lang="en-US" altLang="ko-KR"/>
+              <a:t>[Repository] </a:t>
+            </a:r>
+            <a:endParaRPr lang="ko-KR" altLang="en-US"/>
+          </a:p>
+        </p:txBody>
+      </p:sp>
+      <p:grpSp>
+        <p:nvGrpSpPr>
+          <p:cNvPr id="6" name="그룹 5">
+            <a:extLst>
+              <a:ext uri="{FF2B5EF4-FFF2-40B4-BE49-F238E27FC236}">
+                <a16:creationId xmlns:a16="http://schemas.microsoft.com/office/drawing/2014/main" id="{D7A52557-5E57-C282-9A80-40BC07085334}"/>
+              </a:ext>
+            </a:extLst>
+          </p:cNvPr>
+          <p:cNvGrpSpPr/>
+          <p:nvPr/>
+        </p:nvGrpSpPr>
+        <p:grpSpPr>
+          <a:xfrm>
+            <a:off x="892108" y="1847088"/>
+            <a:ext cx="2068891" cy="4938414"/>
+            <a:chOff x="892108" y="1847088"/>
+            <a:chExt cx="2068891" cy="4938414"/>
+          </a:xfrm>
+        </p:grpSpPr>
+        <p:pic>
+          <p:nvPicPr>
+            <p:cNvPr id="4" name="그림 3">
+              <a:extLst>
+                <a:ext uri="{FF2B5EF4-FFF2-40B4-BE49-F238E27FC236}">
+                  <a16:creationId xmlns:a16="http://schemas.microsoft.com/office/drawing/2014/main" id="{AD06D028-EB5C-01C8-0211-C6F5E69B8C97}"/>
+                </a:ext>
+              </a:extLst>
+            </p:cNvPr>
+            <p:cNvPicPr>
+              <a:picLocks noChangeAspect="1"/>
+            </p:cNvPicPr>
+            <p:nvPr/>
+          </p:nvPicPr>
+          <p:blipFill>
+            <a:blip r:embed="rId2"/>
+            <a:stretch>
+              <a:fillRect/>
+            </a:stretch>
+          </p:blipFill>
+          <p:spPr>
+            <a:xfrm>
+              <a:off x="892108" y="1847088"/>
+              <a:ext cx="2068891" cy="4938414"/>
+            </a:xfrm>
+            <a:prstGeom prst="rect">
+              <a:avLst/>
+            </a:prstGeom>
+          </p:spPr>
+        </p:pic>
+        <p:sp>
+          <p:nvSpPr>
+            <p:cNvPr id="5" name="직사각형 4">
+              <a:extLst>
+                <a:ext uri="{FF2B5EF4-FFF2-40B4-BE49-F238E27FC236}">
+                  <a16:creationId xmlns:a16="http://schemas.microsoft.com/office/drawing/2014/main" id="{160AE330-CB9B-97D9-D18C-77807D0791BD}"/>
+                </a:ext>
+              </a:extLst>
+            </p:cNvPr>
+            <p:cNvSpPr/>
+            <p:nvPr/>
+          </p:nvSpPr>
+          <p:spPr>
+            <a:xfrm>
+              <a:off x="1097280" y="3931920"/>
+              <a:ext cx="1225296" cy="192024"/>
+            </a:xfrm>
+            <a:prstGeom prst="rect">
+              <a:avLst/>
+            </a:prstGeom>
+            <a:noFill/>
+            <a:ln>
+              <a:solidFill>
+                <a:srgbClr val="FF0000"/>
+              </a:solidFill>
+            </a:ln>
+          </p:spPr>
+          <p:style>
+            <a:lnRef idx="2">
+              <a:schemeClr val="accent1">
+                <a:shade val="15000"/>
+              </a:schemeClr>
+            </a:lnRef>
+            <a:fillRef idx="1">
+              <a:schemeClr val="accent1"/>
+            </a:fillRef>
+            <a:effectRef idx="0">
+              <a:schemeClr val="accent1"/>
+            </a:effectRef>
+            <a:fontRef idx="minor">
+              <a:schemeClr val="lt1"/>
+            </a:fontRef>
+          </p:style>
+          <p:txBody>
+            <a:bodyPr rtlCol="0" anchor="ctr"/>
+            <a:lstStyle/>
+            <a:p>
+              <a:pPr algn="ctr"/>
+              <a:endParaRPr lang="ko-KR" altLang="en-US"/>
+            </a:p>
+          </p:txBody>
+        </p:sp>
+      </p:grpSp>
+      <p:pic>
+        <p:nvPicPr>
+          <p:cNvPr id="8" name="그림 7">
+            <a:extLst>
+              <a:ext uri="{FF2B5EF4-FFF2-40B4-BE49-F238E27FC236}">
+                <a16:creationId xmlns:a16="http://schemas.microsoft.com/office/drawing/2014/main" id="{8643E68C-9376-E6C1-A358-AD3929278287}"/>
+              </a:ext>
+            </a:extLst>
+          </p:cNvPr>
+          <p:cNvPicPr>
+            <a:picLocks noChangeAspect="1"/>
+          </p:cNvPicPr>
+          <p:nvPr/>
+        </p:nvPicPr>
+        <p:blipFill>
+          <a:blip r:embed="rId3"/>
+          <a:stretch>
+            <a:fillRect/>
+          </a:stretch>
+        </p:blipFill>
+        <p:spPr>
+          <a:xfrm>
+            <a:off x="3166096" y="1847088"/>
+            <a:ext cx="5658640" cy="647790"/>
+          </a:xfrm>
+          <a:prstGeom prst="rect">
+            <a:avLst/>
+          </a:prstGeom>
+        </p:spPr>
+      </p:pic>
+    </p:spTree>
+    <p:extLst>
+      <p:ext uri="{BB962C8B-B14F-4D97-AF65-F5344CB8AC3E}">
+        <p14:creationId xmlns:p14="http://schemas.microsoft.com/office/powerpoint/2010/main" val="2791085214"/>
+      </p:ext>
+    </p:extLst>
+  </p:cSld>
+  <p:clrMapOvr>
+    <a:masterClrMapping/>
+  </p:clrMapOvr>
+</p:sld>
+</file>
+
+<file path=ppt/slides/slide28.xml><?xml version="1.0" encoding="utf-8"?>
+<p:sld xmlns:a="http://schemas.openxmlformats.org/drawingml/2006/main" xmlns:r="http://schemas.openxmlformats.org/officeDocument/2006/relationships" xmlns:p="http://schemas.openxmlformats.org/presentationml/2006/main">
+  <p:cSld>
+    <p:spTree>
+      <p:nvGrpSpPr>
+        <p:cNvPr id="1" name=""/>
+        <p:cNvGrpSpPr/>
+        <p:nvPr/>
+      </p:nvGrpSpPr>
+      <p:grpSpPr>
+        <a:xfrm>
+          <a:off x="0" y="0"/>
+          <a:ext cx="0" cy="0"/>
+          <a:chOff x="0" y="0"/>
+          <a:chExt cx="0" cy="0"/>
+        </a:xfrm>
+      </p:grpSpPr>
+      <p:sp>
+        <p:nvSpPr>
+          <p:cNvPr id="2" name="제목 1">
+            <a:extLst>
+              <a:ext uri="{FF2B5EF4-FFF2-40B4-BE49-F238E27FC236}">
+                <a16:creationId xmlns:a16="http://schemas.microsoft.com/office/drawing/2014/main" id="{581A65E8-AA8B-1FFE-1F0B-438E32CB204E}"/>
+              </a:ext>
+            </a:extLst>
+          </p:cNvPr>
+          <p:cNvSpPr>
+            <a:spLocks noGrp="1"/>
+          </p:cNvSpPr>
+          <p:nvPr>
+            <p:ph type="title"/>
+          </p:nvPr>
+        </p:nvSpPr>
+        <p:spPr/>
+        <p:txBody>
+          <a:bodyPr/>
+          <a:lstStyle/>
+          <a:p>
+            <a:r>
+              <a:rPr lang="en-US" altLang="ko-KR"/>
+              <a:t>PostMan </a:t>
+            </a:r>
+            <a:r>
+              <a:rPr lang="ko-KR" altLang="en-US"/>
+              <a:t>테스트</a:t>
+            </a:r>
+          </a:p>
+        </p:txBody>
+      </p:sp>
+      <p:pic>
+        <p:nvPicPr>
+          <p:cNvPr id="4" name="그림 3">
+            <a:extLst>
+              <a:ext uri="{FF2B5EF4-FFF2-40B4-BE49-F238E27FC236}">
+                <a16:creationId xmlns:a16="http://schemas.microsoft.com/office/drawing/2014/main" id="{C77BD94B-B8C8-8AC2-7FCE-162E0098415D}"/>
+              </a:ext>
+            </a:extLst>
+          </p:cNvPr>
+          <p:cNvPicPr>
+            <a:picLocks noChangeAspect="1"/>
+          </p:cNvPicPr>
+          <p:nvPr/>
+        </p:nvPicPr>
+        <p:blipFill>
+          <a:blip r:embed="rId2"/>
+          <a:stretch>
+            <a:fillRect/>
+          </a:stretch>
+        </p:blipFill>
+        <p:spPr>
+          <a:xfrm>
+            <a:off x="616641" y="1853890"/>
+            <a:ext cx="2838846" cy="3534268"/>
+          </a:xfrm>
+          <a:prstGeom prst="rect">
+            <a:avLst/>
+          </a:prstGeom>
+        </p:spPr>
+      </p:pic>
+      <p:pic>
+        <p:nvPicPr>
+          <p:cNvPr id="6" name="그림 5">
+            <a:extLst>
+              <a:ext uri="{FF2B5EF4-FFF2-40B4-BE49-F238E27FC236}">
+                <a16:creationId xmlns:a16="http://schemas.microsoft.com/office/drawing/2014/main" id="{D726E171-CC15-5062-38E3-57598CA0F0CB}"/>
+              </a:ext>
+            </a:extLst>
+          </p:cNvPr>
+          <p:cNvPicPr>
+            <a:picLocks noChangeAspect="1"/>
+          </p:cNvPicPr>
+          <p:nvPr/>
+        </p:nvPicPr>
+        <p:blipFill>
+          <a:blip r:embed="rId3"/>
+          <a:stretch>
+            <a:fillRect/>
+          </a:stretch>
+        </p:blipFill>
+        <p:spPr>
+          <a:xfrm>
+            <a:off x="3669478" y="1853890"/>
+            <a:ext cx="7230484" cy="3096057"/>
+          </a:xfrm>
+          <a:prstGeom prst="rect">
+            <a:avLst/>
+          </a:prstGeom>
+        </p:spPr>
+      </p:pic>
+      <p:pic>
+        <p:nvPicPr>
+          <p:cNvPr id="8" name="그림 7">
+            <a:extLst>
+              <a:ext uri="{FF2B5EF4-FFF2-40B4-BE49-F238E27FC236}">
+                <a16:creationId xmlns:a16="http://schemas.microsoft.com/office/drawing/2014/main" id="{BC415BCA-644B-F9C3-297A-1D735CD47DF0}"/>
+              </a:ext>
+            </a:extLst>
+          </p:cNvPr>
+          <p:cNvPicPr>
+            <a:picLocks noChangeAspect="1"/>
+          </p:cNvPicPr>
+          <p:nvPr/>
+        </p:nvPicPr>
+        <p:blipFill>
+          <a:blip r:embed="rId4"/>
+          <a:stretch>
+            <a:fillRect/>
+          </a:stretch>
+        </p:blipFill>
+        <p:spPr>
+          <a:xfrm>
+            <a:off x="3669478" y="5140473"/>
+            <a:ext cx="7316221" cy="495369"/>
+          </a:xfrm>
+          <a:prstGeom prst="rect">
+            <a:avLst/>
+          </a:prstGeom>
+        </p:spPr>
+      </p:pic>
+    </p:spTree>
+    <p:extLst>
+      <p:ext uri="{BB962C8B-B14F-4D97-AF65-F5344CB8AC3E}">
+        <p14:creationId xmlns:p14="http://schemas.microsoft.com/office/powerpoint/2010/main" val="197718463"/>
+      </p:ext>
+    </p:extLst>
+  </p:cSld>
+  <p:clrMapOvr>
+    <a:masterClrMapping/>
+  </p:clrMapOvr>
+</p:sld>
+</file>
+
+<file path=ppt/slides/slide29.xml><?xml version="1.0" encoding="utf-8"?>
+<p:sld xmlns:a="http://schemas.openxmlformats.org/drawingml/2006/main" xmlns:r="http://schemas.openxmlformats.org/officeDocument/2006/relationships" xmlns:p="http://schemas.openxmlformats.org/presentationml/2006/main">
+  <p:cSld>
+    <p:spTree>
+      <p:nvGrpSpPr>
+        <p:cNvPr id="1" name="">
+          <a:extLst>
+            <a:ext uri="{FF2B5EF4-FFF2-40B4-BE49-F238E27FC236}">
+              <a16:creationId xmlns:a16="http://schemas.microsoft.com/office/drawing/2014/main" id="{52FD959F-D6F0-040A-34D0-8C93A8314CB2}"/>
+            </a:ext>
+          </a:extLst>
+        </p:cNvPr>
+        <p:cNvGrpSpPr/>
+        <p:nvPr/>
+      </p:nvGrpSpPr>
+      <p:grpSpPr>
+        <a:xfrm>
+          <a:off x="0" y="0"/>
+          <a:ext cx="0" cy="0"/>
+          <a:chOff x="0" y="0"/>
+          <a:chExt cx="0" cy="0"/>
+        </a:xfrm>
+      </p:grpSpPr>
+      <p:sp>
+        <p:nvSpPr>
+          <p:cNvPr id="2" name="제목 1">
+            <a:extLst>
+              <a:ext uri="{FF2B5EF4-FFF2-40B4-BE49-F238E27FC236}">
+                <a16:creationId xmlns:a16="http://schemas.microsoft.com/office/drawing/2014/main" id="{D6D60CD8-CC1F-A5F7-C8C0-BF205B497928}"/>
+              </a:ext>
+            </a:extLst>
+          </p:cNvPr>
+          <p:cNvSpPr>
+            <a:spLocks noGrp="1"/>
+          </p:cNvSpPr>
+          <p:nvPr>
+            <p:ph type="title"/>
+          </p:nvPr>
+        </p:nvSpPr>
+        <p:spPr/>
+        <p:txBody>
+          <a:bodyPr/>
+          <a:lstStyle/>
+          <a:p>
+            <a:r>
+              <a:rPr lang="en-US" altLang="ko-KR"/>
+              <a:t>Board DB </a:t>
+            </a:r>
+            <a:r>
+              <a:rPr lang="ko-KR" altLang="en-US"/>
+              <a:t>확인</a:t>
+            </a:r>
+          </a:p>
+        </p:txBody>
+      </p:sp>
+      <p:pic>
+        <p:nvPicPr>
+          <p:cNvPr id="9" name="그림 8">
+            <a:extLst>
+              <a:ext uri="{FF2B5EF4-FFF2-40B4-BE49-F238E27FC236}">
+                <a16:creationId xmlns:a16="http://schemas.microsoft.com/office/drawing/2014/main" id="{3A939A58-3DAB-E0FF-C6A6-0B08F303A398}"/>
+              </a:ext>
+            </a:extLst>
+          </p:cNvPr>
+          <p:cNvPicPr>
+            <a:picLocks noChangeAspect="1"/>
+          </p:cNvPicPr>
+          <p:nvPr/>
+        </p:nvPicPr>
+        <p:blipFill>
+          <a:blip r:embed="rId2"/>
+          <a:stretch>
+            <a:fillRect/>
+          </a:stretch>
+        </p:blipFill>
+        <p:spPr>
+          <a:xfrm>
+            <a:off x="1097280" y="5120639"/>
+            <a:ext cx="3134162" cy="1114581"/>
+          </a:xfrm>
+          <a:prstGeom prst="rect">
+            <a:avLst/>
+          </a:prstGeom>
+          <a:ln>
+            <a:solidFill>
+              <a:schemeClr val="tx1"/>
+            </a:solidFill>
+          </a:ln>
+        </p:spPr>
+      </p:pic>
+      <p:pic>
+        <p:nvPicPr>
+          <p:cNvPr id="5" name="그림 4">
+            <a:extLst>
+              <a:ext uri="{FF2B5EF4-FFF2-40B4-BE49-F238E27FC236}">
+                <a16:creationId xmlns:a16="http://schemas.microsoft.com/office/drawing/2014/main" id="{2D79E252-6FED-4AFE-0B91-F8058B1970C2}"/>
+              </a:ext>
+            </a:extLst>
+          </p:cNvPr>
+          <p:cNvPicPr>
+            <a:picLocks noChangeAspect="1"/>
+          </p:cNvPicPr>
+          <p:nvPr/>
+        </p:nvPicPr>
+        <p:blipFill>
+          <a:blip r:embed="rId3"/>
+          <a:stretch>
+            <a:fillRect/>
+          </a:stretch>
+        </p:blipFill>
+        <p:spPr>
+          <a:xfrm>
+            <a:off x="1125859" y="1914313"/>
+            <a:ext cx="3105583" cy="3029373"/>
+          </a:xfrm>
+          <a:prstGeom prst="rect">
+            <a:avLst/>
+          </a:prstGeom>
+          <a:ln>
+            <a:solidFill>
+              <a:schemeClr val="tx1"/>
+            </a:solidFill>
+          </a:ln>
+        </p:spPr>
+      </p:pic>
+      <p:pic>
+        <p:nvPicPr>
+          <p:cNvPr id="8" name="그림 7">
+            <a:extLst>
+              <a:ext uri="{FF2B5EF4-FFF2-40B4-BE49-F238E27FC236}">
+                <a16:creationId xmlns:a16="http://schemas.microsoft.com/office/drawing/2014/main" id="{BBE23C49-7159-ADC9-00D7-21765EF657B8}"/>
+              </a:ext>
+            </a:extLst>
+          </p:cNvPr>
+          <p:cNvPicPr>
+            <a:picLocks noChangeAspect="1"/>
+          </p:cNvPicPr>
+          <p:nvPr/>
+        </p:nvPicPr>
+        <p:blipFill>
+          <a:blip r:embed="rId4"/>
+          <a:stretch>
+            <a:fillRect/>
+          </a:stretch>
+        </p:blipFill>
+        <p:spPr>
+          <a:xfrm>
+            <a:off x="4472032" y="1914313"/>
+            <a:ext cx="2095792" cy="428685"/>
+          </a:xfrm>
+          <a:prstGeom prst="rect">
+            <a:avLst/>
+          </a:prstGeom>
+          <a:ln>
+            <a:solidFill>
+              <a:schemeClr val="tx1"/>
+            </a:solidFill>
+          </a:ln>
+        </p:spPr>
+      </p:pic>
+      <p:pic>
+        <p:nvPicPr>
+          <p:cNvPr id="11" name="그림 10">
+            <a:extLst>
+              <a:ext uri="{FF2B5EF4-FFF2-40B4-BE49-F238E27FC236}">
+                <a16:creationId xmlns:a16="http://schemas.microsoft.com/office/drawing/2014/main" id="{272B40C9-9299-1509-E384-4F01A84421AC}"/>
+              </a:ext>
+            </a:extLst>
+          </p:cNvPr>
+          <p:cNvPicPr>
+            <a:picLocks noChangeAspect="1"/>
+          </p:cNvPicPr>
+          <p:nvPr/>
+        </p:nvPicPr>
+        <p:blipFill>
+          <a:blip r:embed="rId5"/>
+          <a:stretch>
+            <a:fillRect/>
+          </a:stretch>
+        </p:blipFill>
+        <p:spPr>
+          <a:xfrm>
+            <a:off x="4472032" y="2429880"/>
+            <a:ext cx="2210108" cy="971686"/>
+          </a:xfrm>
+          <a:prstGeom prst="rect">
+            <a:avLst/>
+          </a:prstGeom>
+          <a:ln>
+            <a:solidFill>
+              <a:schemeClr val="tx1"/>
+            </a:solidFill>
+          </a:ln>
+        </p:spPr>
+      </p:pic>
+    </p:spTree>
+    <p:extLst>
+      <p:ext uri="{BB962C8B-B14F-4D97-AF65-F5344CB8AC3E}">
+        <p14:creationId xmlns:p14="http://schemas.microsoft.com/office/powerpoint/2010/main" val="264815905"/>
       </p:ext>
     </p:extLst>
   </p:cSld>
